--- a/comite/Comite_Agosto_2026_breve.pptx
+++ b/comite/Comite_Agosto_2026_breve.pptx
@@ -19,9 +19,12 @@
     <p:sldId id="267" r:id="rId13"/>
     <p:sldId id="268" r:id="rId14"/>
     <p:sldId id="269" r:id="rId15"/>
+    <p:sldId id="270" r:id="rId16"/>
+    <p:sldId id="271" r:id="rId17"/>
+    <p:sldId id="272" r:id="rId18"/>
   </p:sldIdLst>
   <p:notesMasterIdLst>
-    <p:notesMasterId r:id="rId16"/>
+    <p:notesMasterId r:id="rId19"/>
   </p:notesMasterIdLst>
   <p:sldSz cx="12192000" cy="6858000"/>
   <p:notesSz cx="6858000" cy="12192000"/>
@@ -779,7 +782,7 @@
           <a:p>
             <a:r>
               <a:rPr lang="en-US" dirty="0"/>
-              <a:t>Septiembre (184 programadas): pronóstico EWMA prudente 3,06 % = 5,6 suspensiones (P5–P95 2–10); si se sostiene el trimestre (1,23 %) ≈ 2. Septiembre–diciembre (734 programadas): 9 al 1,23 %, 29 al 4 %, 69 al 9,38 %. HPMM con 7 pabellones (5.387 programadas al año): 66 suspensiones al año al 1,23 % frente a 505 a la tasa 2025: 439 pacientes evitados. Distribución binomial.</a:t>
+              <a:t>Escritorio SITGEQ (captura de septiembre): tasa de ocupación diaria 91,7 % (meta 85, ▼3,7 % vs período anterior); cirugías realizadas 14,6 por día (▲53,7 %; meta 60 por día marcada "crítico": parámetro no alcanzable con 3 pabellones, corresponde corregirlo); rendimiento diario por pabellón 7,3 (▲78 %, meta 6); retraso de primera hora 12 min (▼53,2 %, meta 30, proyección ▲1,7 %); tiempo de recambio promedio 14 min (▼58,8 %, meta 15, proyección ▲1,4 %); subprogramación diaria 0,3 h (▼40 %, meta 0,5); pacientes en lista de espera no GES 42,3 % (▼33,1 %, meta 50). Se excluye la tasa de suspensión del escritorio (7,5 %) porque usa otro numerador y cohorte (agenda confirmada) que el indicador del comité. El recambio del escritorio (promedio 14) y el del export 830 (media 22,6, mediana 18) usan fórmulas y cohortes distintas: coinciden en la dirección (bajan los recambios largos), no en la magnitud. Las proyecciones "= 0,0 %" indican que el módulo de proyección no tiene serie suficiente.</a:t>
             </a:r>
             <a:endParaRPr lang="en-US" dirty="0"/>
           </a:p>
@@ -867,7 +870,7 @@
           <a:p>
             <a:r>
               <a:rPr lang="en-US" dirty="0"/>
-              <a:t>Prioridades con responsable y plazo a acordar en el comité. Corresponden a las láminas de gestión, lunes, causas, registro operable y almuerzo de la versión completa.</a:t>
+              <a:t>Base: informe del 6-sep (export 830, agosto, pabellones 2–4, L–V). En la franja 12:30–14:00 caen 2.015 min de intervalos entre pacientes (33 h 35; 40 de 141 pares; 39 pabellón-días en 20 fechas). Bloque libre continuo ≥ 60 min: 16 jornadas de pabellón en 12 fechas; ≥ 90 min: 2. Ocupación mediana de un caso electivo L–V: 100,5 min; recambio neto mediano 18 min: ciclo típico ≈ 2 h; caso corto (≤ 60 min de ocupación) ≈ 1,3 h. Escenario conservador: solo los 16 bloques observados ≥ 60 min → hasta 16 casos cortos (o 2 típicos). Escenario medido: 33 h 35 menos el recambio normal de los 40 pares (40 × 18 = 12 h) = 21,6 h libres → 11 casos típicos o 17 cortos al mes. Cota superior teórica: la franja completa en 51 pabellón-días (76,5 h) → 38 casos típicos (48 con Pabellón 2 los 21 días). Sobre 201 CME L–V en agosto, 11–17 casos son +5 a +8 %. Al año (×12): 130–200 cirugías; en HPMM con 7 pabellones (×2,3): 300–470. Requisito: paciente preparado, equipo, instrumental y recuperación disponibles; no se suman fragmentos de salas o días distintos.</a:t>
             </a:r>
             <a:endParaRPr lang="en-US" dirty="0"/>
           </a:p>
@@ -955,7 +958,7 @@
           <a:p>
             <a:r>
               <a:rPr lang="en-US" dirty="0"/>
-              <a:t>Fuentes: monitoreo diario -15/-16 (serie homogénea ene-2025 a ago-2026, criterio L–V); informe de suspensiones de agosto (correo del 2-sep); exports SITGEQ 787 y 830; informe "Evolución del proceso quirúrgico" (6-sep); REM832; escritorio SITGEQ (5-sep); Comité de julio; SPC_Suspensiones_HQ. Sin datos personales.</a:t>
+              <a:t>Propuesta a validar con jefaturas asistenciales y gestión de personas (paso 4 del plan del informe del 6-sep). Relevo escalonado: un equipo (enfermera, TENS, arsenalera y anestesiólogo) cubre 45 min en cada pabellón mientras su equipo titular almuerza: Pabellón 2 12:00–12:45, Pabellón 3 12:45–13:30, Pabellón 4 13:30–14:15. Costo: 2 h 15 por día por función (47 h al mes). Los pabellones no se detienen y el descanso se mantiene. Piloto de 4 semanas: jornadas con y sin cobertura bajo agenda y complejidad documentadas (aleatorizar si es factible). Registrar por intervalo: sala lista, paciente listo, equipo disponible, causa del bloqueo y hora de reanudación. Comparar hora final de tabla, carga de trabajo, casos completados y recambio bruto y neto. Decisión en comité con beneficio, efectos adversos y factibilidad.</a:t>
             </a:r>
             <a:endParaRPr lang="en-US" dirty="0"/>
           </a:p>
@@ -979,6 +982,270 @@
             <a:fld id="{F7021451-1387-4CA6-816F-3879F97B5CBC}" type="slidenum">
               <a:rPr lang="en-US"/>
               <a:t>14</a:t>
+            </a:fld>
+            <a:endParaRPr lang="en-US"/>
+          </a:p>
+        </p:txBody>
+      </p:sp>
+    </p:spTree>
+    <p:extLst>
+      <p:ext uri="{BB962C8B-B14F-4D97-AF65-F5344CB8AC3E}">
+        <p14:creationId xmlns:p14="http://schemas.microsoft.com/office/powerpoint/2010/main" val="1024086991"/>
+      </p:ext>
+    </p:extLst>
+  </p:cSld>
+  <p:clrMapOvr>
+    <a:masterClrMapping/>
+  </p:clrMapOvr>
+</p:notes>
+</file>
+
+<file path=ppt/notesSlides/notesSlide15.xml><?xml version="1.0" encoding="utf-8"?>
+<p:notes xmlns:a="http://schemas.openxmlformats.org/drawingml/2006/main" xmlns:r="http://schemas.openxmlformats.org/officeDocument/2006/relationships" xmlns:p="http://schemas.openxmlformats.org/presentationml/2006/main">
+  <p:cSld>
+    <p:spTree>
+      <p:nvGrpSpPr>
+        <p:cNvPr id="1" name=""/>
+        <p:cNvGrpSpPr/>
+        <p:nvPr/>
+      </p:nvGrpSpPr>
+      <p:grpSpPr>
+        <a:xfrm>
+          <a:off x="0" y="0"/>
+          <a:ext cx="0" cy="0"/>
+          <a:chOff x="0" y="0"/>
+          <a:chExt cx="0" cy="0"/>
+        </a:xfrm>
+      </p:grpSpPr>
+      <p:sp>
+        <p:nvSpPr>
+          <p:cNvPr id="2" name="Slide Image Placeholder 1"/>
+          <p:cNvSpPr>
+            <a:spLocks noGrp="1" noRot="1" noChangeAspect="1"/>
+          </p:cNvSpPr>
+          <p:nvPr>
+            <p:ph type="sldImg"/>
+          </p:nvPr>
+        </p:nvSpPr>
+        <p:spPr/>
+      </p:sp>
+      <p:sp>
+        <p:nvSpPr>
+          <p:cNvPr id="3" name="Notes Placeholder 2"/>
+          <p:cNvSpPr>
+            <a:spLocks noGrp="1"/>
+          </p:cNvSpPr>
+          <p:nvPr>
+            <p:ph type="body" idx="1"/>
+          </p:nvPr>
+        </p:nvSpPr>
+        <p:spPr/>
+        <p:txBody>
+          <a:bodyPr/>
+          <a:lstStyle/>
+          <a:p>
+            <a:r>
+              <a:rPr lang="en-US" dirty="0"/>
+              <a:t>Septiembre (184 programadas): pronóstico EWMA prudente 3,06 % = 5,6 suspensiones (P5–P95 2–10); si se sostiene el trimestre (1,23 %) ≈ 2. Septiembre–diciembre (734 programadas): 9 al 1,23 %, 29 al 4 %, 69 al 9,38 %. HPMM con 7 pabellones (5.387 programadas al año): 66 suspensiones al año al 1,23 % frente a 505 a la tasa 2025: 439 pacientes evitados. Distribución binomial.</a:t>
+            </a:r>
+            <a:endParaRPr lang="en-US" dirty="0"/>
+          </a:p>
+        </p:txBody>
+      </p:sp>
+      <p:sp>
+        <p:nvSpPr>
+          <p:cNvPr id="4" name="Slide Number Placeholder 3"/>
+          <p:cNvSpPr>
+            <a:spLocks noGrp="1"/>
+          </p:cNvSpPr>
+          <p:nvPr>
+            <p:ph type="sldNum" sz="quarter" idx="10"/>
+          </p:nvPr>
+        </p:nvSpPr>
+        <p:spPr/>
+        <p:txBody>
+          <a:bodyPr/>
+          <a:lstStyle/>
+          <a:p>
+            <a:fld id="{F7021451-1387-4CA6-816F-3879F97B5CBC}" type="slidenum">
+              <a:rPr lang="en-US"/>
+              <a:t>15</a:t>
+            </a:fld>
+            <a:endParaRPr lang="en-US"/>
+          </a:p>
+        </p:txBody>
+      </p:sp>
+    </p:spTree>
+    <p:extLst>
+      <p:ext uri="{BB962C8B-B14F-4D97-AF65-F5344CB8AC3E}">
+        <p14:creationId xmlns:p14="http://schemas.microsoft.com/office/powerpoint/2010/main" val="1024086991"/>
+      </p:ext>
+    </p:extLst>
+  </p:cSld>
+  <p:clrMapOvr>
+    <a:masterClrMapping/>
+  </p:clrMapOvr>
+</p:notes>
+</file>
+
+<file path=ppt/notesSlides/notesSlide16.xml><?xml version="1.0" encoding="utf-8"?>
+<p:notes xmlns:a="http://schemas.openxmlformats.org/drawingml/2006/main" xmlns:r="http://schemas.openxmlformats.org/officeDocument/2006/relationships" xmlns:p="http://schemas.openxmlformats.org/presentationml/2006/main">
+  <p:cSld>
+    <p:spTree>
+      <p:nvGrpSpPr>
+        <p:cNvPr id="1" name=""/>
+        <p:cNvGrpSpPr/>
+        <p:nvPr/>
+      </p:nvGrpSpPr>
+      <p:grpSpPr>
+        <a:xfrm>
+          <a:off x="0" y="0"/>
+          <a:ext cx="0" cy="0"/>
+          <a:chOff x="0" y="0"/>
+          <a:chExt cx="0" cy="0"/>
+        </a:xfrm>
+      </p:grpSpPr>
+      <p:sp>
+        <p:nvSpPr>
+          <p:cNvPr id="2" name="Slide Image Placeholder 1"/>
+          <p:cNvSpPr>
+            <a:spLocks noGrp="1" noRot="1" noChangeAspect="1"/>
+          </p:cNvSpPr>
+          <p:nvPr>
+            <p:ph type="sldImg"/>
+          </p:nvPr>
+        </p:nvSpPr>
+        <p:spPr/>
+      </p:sp>
+      <p:sp>
+        <p:nvSpPr>
+          <p:cNvPr id="3" name="Notes Placeholder 2"/>
+          <p:cNvSpPr>
+            <a:spLocks noGrp="1"/>
+          </p:cNvSpPr>
+          <p:nvPr>
+            <p:ph type="body" idx="1"/>
+          </p:nvPr>
+        </p:nvSpPr>
+        <p:spPr/>
+        <p:txBody>
+          <a:bodyPr/>
+          <a:lstStyle/>
+          <a:p>
+            <a:r>
+              <a:rPr lang="en-US" dirty="0"/>
+              <a:t>Prioridades con responsable y plazo a acordar en el comité. Corresponden a las láminas de gestión, lunes, causas, registro operable y almuerzo de la versión completa.</a:t>
+            </a:r>
+            <a:endParaRPr lang="en-US" dirty="0"/>
+          </a:p>
+        </p:txBody>
+      </p:sp>
+      <p:sp>
+        <p:nvSpPr>
+          <p:cNvPr id="4" name="Slide Number Placeholder 3"/>
+          <p:cNvSpPr>
+            <a:spLocks noGrp="1"/>
+          </p:cNvSpPr>
+          <p:nvPr>
+            <p:ph type="sldNum" sz="quarter" idx="10"/>
+          </p:nvPr>
+        </p:nvSpPr>
+        <p:spPr/>
+        <p:txBody>
+          <a:bodyPr/>
+          <a:lstStyle/>
+          <a:p>
+            <a:fld id="{F7021451-1387-4CA6-816F-3879F97B5CBC}" type="slidenum">
+              <a:rPr lang="en-US"/>
+              <a:t>16</a:t>
+            </a:fld>
+            <a:endParaRPr lang="en-US"/>
+          </a:p>
+        </p:txBody>
+      </p:sp>
+    </p:spTree>
+    <p:extLst>
+      <p:ext uri="{BB962C8B-B14F-4D97-AF65-F5344CB8AC3E}">
+        <p14:creationId xmlns:p14="http://schemas.microsoft.com/office/powerpoint/2010/main" val="1024086991"/>
+      </p:ext>
+    </p:extLst>
+  </p:cSld>
+  <p:clrMapOvr>
+    <a:masterClrMapping/>
+  </p:clrMapOvr>
+</p:notes>
+</file>
+
+<file path=ppt/notesSlides/notesSlide17.xml><?xml version="1.0" encoding="utf-8"?>
+<p:notes xmlns:a="http://schemas.openxmlformats.org/drawingml/2006/main" xmlns:r="http://schemas.openxmlformats.org/officeDocument/2006/relationships" xmlns:p="http://schemas.openxmlformats.org/presentationml/2006/main">
+  <p:cSld>
+    <p:spTree>
+      <p:nvGrpSpPr>
+        <p:cNvPr id="1" name=""/>
+        <p:cNvGrpSpPr/>
+        <p:nvPr/>
+      </p:nvGrpSpPr>
+      <p:grpSpPr>
+        <a:xfrm>
+          <a:off x="0" y="0"/>
+          <a:ext cx="0" cy="0"/>
+          <a:chOff x="0" y="0"/>
+          <a:chExt cx="0" cy="0"/>
+        </a:xfrm>
+      </p:grpSpPr>
+      <p:sp>
+        <p:nvSpPr>
+          <p:cNvPr id="2" name="Slide Image Placeholder 1"/>
+          <p:cNvSpPr>
+            <a:spLocks noGrp="1" noRot="1" noChangeAspect="1"/>
+          </p:cNvSpPr>
+          <p:nvPr>
+            <p:ph type="sldImg"/>
+          </p:nvPr>
+        </p:nvSpPr>
+        <p:spPr/>
+      </p:sp>
+      <p:sp>
+        <p:nvSpPr>
+          <p:cNvPr id="3" name="Notes Placeholder 2"/>
+          <p:cNvSpPr>
+            <a:spLocks noGrp="1"/>
+          </p:cNvSpPr>
+          <p:nvPr>
+            <p:ph type="body" idx="1"/>
+          </p:nvPr>
+        </p:nvSpPr>
+        <p:spPr/>
+        <p:txBody>
+          <a:bodyPr/>
+          <a:lstStyle/>
+          <a:p>
+            <a:r>
+              <a:rPr lang="en-US" dirty="0"/>
+              <a:t>Fuentes: monitoreo diario -15/-16 (serie homogénea ene-2025 a ago-2026, criterio L–V); informe de suspensiones de agosto (correo del 2-sep); exports SITGEQ 787 y 830; informe "Evolución del proceso quirúrgico" (6-sep); REM832; escritorio SITGEQ (5-sep); Comité de julio; SPC_Suspensiones_HQ. Sin datos personales.</a:t>
+            </a:r>
+            <a:endParaRPr lang="en-US" dirty="0"/>
+          </a:p>
+        </p:txBody>
+      </p:sp>
+      <p:sp>
+        <p:nvSpPr>
+          <p:cNvPr id="4" name="Slide Number Placeholder 3"/>
+          <p:cNvSpPr>
+            <a:spLocks noGrp="1"/>
+          </p:cNvSpPr>
+          <p:nvPr>
+            <p:ph type="sldNum" sz="quarter" idx="10"/>
+          </p:nvPr>
+        </p:nvSpPr>
+        <p:spPr/>
+        <p:txBody>
+          <a:bodyPr/>
+          <a:lstStyle/>
+          <a:p>
+            <a:fld id="{F7021451-1387-4CA6-816F-3879F97B5CBC}" type="slidenum">
+              <a:rPr lang="en-US"/>
+              <a:t>17</a:t>
             </a:fld>
             <a:endParaRPr lang="en-US"/>
           </a:p>
@@ -2211,7 +2478,7 @@
                 <a:ea typeface="Arial" pitchFamily="34" charset="-122"/>
                 <a:cs typeface="Arial" pitchFamily="34" charset="-120"/>
               </a:rPr>
-              <a:t>1  /  14</a:t>
+              <a:t>1  /  17</a:t>
             </a:r>
             <a:endParaRPr lang="en-US" sz="1000" dirty="0"/>
           </a:p>
@@ -2965,7 +3232,7 @@
                 <a:ea typeface="Arial" pitchFamily="34" charset="-122"/>
                 <a:cs typeface="Arial" pitchFamily="34" charset="-120"/>
               </a:rPr>
-              <a:t>10  /  14</a:t>
+              <a:t>10  /  17</a:t>
             </a:r>
             <a:endParaRPr lang="en-US" sz="1000" dirty="0"/>
           </a:p>
@@ -4295,7 +4562,7 @@
                 <a:ea typeface="Arial" pitchFamily="34" charset="-122"/>
                 <a:cs typeface="Arial" pitchFamily="34" charset="-120"/>
               </a:rPr>
-              <a:t>11  /  14</a:t>
+              <a:t>11  /  17</a:t>
             </a:r>
             <a:endParaRPr lang="en-US" sz="1000" dirty="0"/>
           </a:p>
@@ -5154,7 +5421,7 @@
                 <a:ea typeface="Arial" pitchFamily="34" charset="-122"/>
                 <a:cs typeface="Arial" pitchFamily="34" charset="-120"/>
               </a:rPr>
-              <a:t>11  ·  PROYECCIÓN</a:t>
+              <a:t>11  ·  ESCRITORIO SITGEQ · AGOSTO</a:t>
             </a:r>
             <a:endParaRPr lang="en-US" sz="1200" dirty="0"/>
           </a:p>
@@ -5193,7 +5460,7 @@
                 <a:ea typeface="Arial" pitchFamily="34" charset="-122"/>
                 <a:cs typeface="Arial" pitchFamily="34" charset="-120"/>
               </a:rPr>
-              <a:t>Qué esperar si el régimen se sostiene, y qué pasa si no</a:t>
+              <a:t>Los indicadores del escritorio SITGEQ, en una sola vista</a:t>
             </a:r>
             <a:endParaRPr lang="en-US" sz="2800" dirty="0"/>
           </a:p>
@@ -5232,7 +5499,7 @@
                 <a:ea typeface="Arial" pitchFamily="34" charset="-122"/>
                 <a:cs typeface="Arial" pitchFamily="34" charset="-120"/>
               </a:rPr>
-              <a:t>12  /  14</a:t>
+              <a:t>12  /  17</a:t>
             </a:r>
             <a:endParaRPr lang="en-US" sz="1000" dirty="0"/>
           </a:p>
@@ -5285,12 +5552,12 @@
         </p:nvSpPr>
         <p:spPr>
           <a:xfrm>
-            <a:off x="548640" y="1828800"/>
-            <a:ext cx="3566160" cy="2148840"/>
+            <a:off x="548640" y="1737360"/>
+            <a:ext cx="2679192" cy="1938528"/>
           </a:xfrm>
           <a:prstGeom prst="roundRect">
             <a:avLst>
-              <a:gd name="adj" fmla="val 3404"/>
+              <a:gd name="adj" fmla="val 3774"/>
             </a:avLst>
           </a:prstGeom>
           <a:solidFill>
@@ -5312,24 +5579,24 @@
         </p:nvSpPr>
         <p:spPr>
           <a:xfrm>
-            <a:off x="804672" y="1956816"/>
-            <a:ext cx="3054096" cy="670560"/>
-          </a:xfrm>
-          <a:prstGeom prst="rect">
-            <a:avLst/>
-          </a:prstGeom>
-          <a:noFill/>
-          <a:ln/>
-        </p:spPr>
-        <p:txBody>
-          <a:bodyPr wrap="square" lIns="0" tIns="0" rIns="0" bIns="0" rtlCol="0" anchor="ctr"/>
-          <a:lstStyle/>
-          <a:p>
-            <a:pPr algn="l" indent="0" marL="0">
-              <a:buNone/>
-            </a:pPr>
-            <a:r>
-              <a:rPr lang="en-US" sz="4400" b="1" dirty="0">
+            <a:off x="713232" y="1847088"/>
+            <a:ext cx="320040" cy="329184"/>
+          </a:xfrm>
+          <a:prstGeom prst="rect">
+            <a:avLst/>
+          </a:prstGeom>
+          <a:noFill/>
+          <a:ln/>
+        </p:spPr>
+        <p:txBody>
+          <a:bodyPr wrap="square" lIns="0" tIns="0" rIns="0" bIns="0" rtlCol="0" anchor="ctr"/>
+          <a:lstStyle/>
+          <a:p>
+            <a:pPr algn="l" indent="0" marL="0">
+              <a:buNone/>
+            </a:pPr>
+            <a:r>
+              <a:rPr lang="en-US" sz="1600" dirty="0">
                 <a:solidFill>
                   <a:srgbClr val="5EEAD4"/>
                 </a:solidFill>
@@ -5337,9 +5604,9 @@
                 <a:ea typeface="Arial" pitchFamily="34" charset="-122"/>
                 <a:cs typeface="Arial" pitchFamily="34" charset="-120"/>
               </a:rPr>
-              <a:t>2 a 10</a:t>
-            </a:r>
-            <a:endParaRPr lang="en-US" sz="4400" dirty="0"/>
+              <a:t>◐</a:t>
+            </a:r>
+            <a:endParaRPr lang="en-US" sz="1600" dirty="0"/>
           </a:p>
         </p:txBody>
       </p:sp>
@@ -5351,24 +5618,24 @@
         </p:nvSpPr>
         <p:spPr>
           <a:xfrm>
-            <a:off x="804672" y="2627376"/>
-            <a:ext cx="3054096" cy="274320"/>
-          </a:xfrm>
-          <a:prstGeom prst="rect">
-            <a:avLst/>
-          </a:prstGeom>
-          <a:noFill/>
-          <a:ln/>
-        </p:spPr>
-        <p:txBody>
-          <a:bodyPr wrap="square" lIns="0" tIns="0" rIns="0" bIns="0" rtlCol="0" anchor="ctr"/>
-          <a:lstStyle/>
-          <a:p>
-            <a:pPr algn="l" indent="0" marL="0">
-              <a:buNone/>
-            </a:pPr>
-            <a:r>
-              <a:rPr lang="en-US" sz="1300" b="1" dirty="0">
+            <a:off x="1024128" y="1828800"/>
+            <a:ext cx="2084832" cy="365760"/>
+          </a:xfrm>
+          <a:prstGeom prst="rect">
+            <a:avLst/>
+          </a:prstGeom>
+          <a:noFill/>
+          <a:ln/>
+        </p:spPr>
+        <p:txBody>
+          <a:bodyPr wrap="square" lIns="0" tIns="0" rIns="0" bIns="0" rtlCol="0" anchor="ctr"/>
+          <a:lstStyle/>
+          <a:p>
+            <a:pPr algn="l" indent="0" marL="0">
+              <a:buNone/>
+            </a:pPr>
+            <a:r>
+              <a:rPr lang="en-US" sz="1150" b="1" dirty="0">
                 <a:solidFill>
                   <a:srgbClr val="EAF1FB"/>
                 </a:solidFill>
@@ -5376,9 +5643,9 @@
                 <a:ea typeface="Arial" pitchFamily="34" charset="-122"/>
                 <a:cs typeface="Arial" pitchFamily="34" charset="-120"/>
               </a:rPr>
-              <a:t>suspensiones en septiembre</a:t>
-            </a:r>
-            <a:endParaRPr lang="en-US" sz="1300" dirty="0"/>
+              <a:t>Tasa de ocupación diaria</a:t>
+            </a:r>
+            <a:endParaRPr lang="en-US" sz="1150" dirty="0"/>
           </a:p>
         </p:txBody>
       </p:sp>
@@ -5390,24 +5657,63 @@
         </p:nvSpPr>
         <p:spPr>
           <a:xfrm>
-            <a:off x="804672" y="2901696"/>
-            <a:ext cx="3054096" cy="1021080"/>
-          </a:xfrm>
-          <a:prstGeom prst="rect">
-            <a:avLst/>
-          </a:prstGeom>
-          <a:noFill/>
-          <a:ln/>
-        </p:spPr>
-        <p:txBody>
-          <a:bodyPr wrap="square" lIns="0" tIns="0" rIns="0" bIns="0" rtlCol="0" anchor="t"/>
-          <a:lstStyle/>
-          <a:p>
-            <a:pPr algn="l" indent="0" marL="0">
-              <a:buNone/>
-            </a:pPr>
-            <a:r>
-              <a:rPr lang="en-US" sz="1250" dirty="0">
+            <a:off x="713232" y="2194560"/>
+            <a:ext cx="1463040" cy="548640"/>
+          </a:xfrm>
+          <a:prstGeom prst="rect">
+            <a:avLst/>
+          </a:prstGeom>
+          <a:noFill/>
+          <a:ln/>
+        </p:spPr>
+        <p:txBody>
+          <a:bodyPr wrap="square" lIns="0" tIns="0" rIns="0" bIns="0" rtlCol="0" anchor="ctr"/>
+          <a:lstStyle/>
+          <a:p>
+            <a:pPr algn="l" indent="0" marL="0">
+              <a:buNone/>
+            </a:pPr>
+            <a:r>
+              <a:rPr lang="en-US" sz="3200" b="1" dirty="0">
+                <a:solidFill>
+                  <a:srgbClr val="FFFFFF"/>
+                </a:solidFill>
+                <a:latin typeface="Arial" pitchFamily="34" charset="0"/>
+                <a:ea typeface="Arial" pitchFamily="34" charset="-122"/>
+                <a:cs typeface="Arial" pitchFamily="34" charset="-120"/>
+              </a:rPr>
+              <a:t>91,7</a:t>
+            </a:r>
+            <a:endParaRPr lang="en-US" sz="3200" dirty="0"/>
+          </a:p>
+        </p:txBody>
+      </p:sp>
+      <p:sp>
+        <p:nvSpPr>
+          <p:cNvPr id="13" name="Text 10"/>
+          <p:cNvSpPr txBox="1"/>
+          <p:nvPr/>
+        </p:nvSpPr>
+        <p:spPr>
+          <a:xfrm>
+            <a:off x="1856232" y="2304288"/>
+            <a:ext cx="1097280" cy="365760"/>
+          </a:xfrm>
+          <a:prstGeom prst="rect">
+            <a:avLst/>
+          </a:prstGeom>
+          <a:noFill/>
+          <a:ln/>
+        </p:spPr>
+        <p:txBody>
+          <a:bodyPr wrap="square" lIns="0" tIns="0" rIns="0" bIns="0" rtlCol="0" anchor="ctr"/>
+          <a:lstStyle/>
+          <a:p>
+            <a:pPr algn="l" indent="0" marL="0">
+              <a:buNone/>
+            </a:pPr>
+            <a:r>
+              <a:rPr lang="en-US" sz="1200" b="1" dirty="0">
                 <a:solidFill>
                   <a:srgbClr val="94AACC"/>
                 </a:solidFill>
@@ -5415,26 +5721,851 @@
                 <a:ea typeface="Arial" pitchFamily="34" charset="-122"/>
                 <a:cs typeface="Arial" pitchFamily="34" charset="-120"/>
               </a:rPr>
-              <a:t>pronóstico prudente · más de 10 es señal de deterioro</a:t>
-            </a:r>
-            <a:endParaRPr lang="en-US" sz="1250" dirty="0"/>
-          </a:p>
-        </p:txBody>
-      </p:sp>
-      <p:sp>
-        <p:nvSpPr>
-          <p:cNvPr id="13" name="Shape 10"/>
+              <a:t>%</a:t>
+            </a:r>
+            <a:endParaRPr lang="en-US" sz="1200" dirty="0"/>
+          </a:p>
+        </p:txBody>
+      </p:sp>
+      <p:sp>
+        <p:nvSpPr>
+          <p:cNvPr id="14" name="Text 11"/>
+          <p:cNvSpPr txBox="1"/>
+          <p:nvPr/>
+        </p:nvSpPr>
+        <p:spPr>
+          <a:xfrm>
+            <a:off x="713232" y="2788920"/>
+            <a:ext cx="1600200" cy="274320"/>
+          </a:xfrm>
+          <a:prstGeom prst="rect">
+            <a:avLst/>
+          </a:prstGeom>
+          <a:noFill/>
+          <a:ln/>
+        </p:spPr>
+        <p:txBody>
+          <a:bodyPr wrap="square" lIns="0" tIns="0" rIns="0" bIns="0" rtlCol="0" anchor="ctr"/>
+          <a:lstStyle/>
+          <a:p>
+            <a:pPr algn="l" indent="0" marL="0">
+              <a:buNone/>
+            </a:pPr>
+            <a:r>
+              <a:rPr lang="en-US" sz="1100" dirty="0">
+                <a:solidFill>
+                  <a:srgbClr val="BCCDE8"/>
+                </a:solidFill>
+                <a:latin typeface="Arial" pitchFamily="34" charset="0"/>
+                <a:ea typeface="Arial" pitchFamily="34" charset="-122"/>
+                <a:cs typeface="Arial" pitchFamily="34" charset="-120"/>
+              </a:rPr>
+              <a:t>Vs. período anterior</a:t>
+            </a:r>
+            <a:endParaRPr lang="en-US" sz="1100" dirty="0"/>
+          </a:p>
+        </p:txBody>
+      </p:sp>
+      <p:sp>
+        <p:nvSpPr>
+          <p:cNvPr id="15" name="Shape 12"/>
           <p:cNvSpPr/>
           <p:nvPr/>
         </p:nvSpPr>
         <p:spPr>
           <a:xfrm>
-            <a:off x="4311396" y="1828800"/>
-            <a:ext cx="3566160" cy="2148840"/>
+            <a:off x="2176272" y="2788920"/>
+            <a:ext cx="886968" cy="274320"/>
           </a:xfrm>
           <a:prstGeom prst="roundRect">
             <a:avLst>
-              <a:gd name="adj" fmla="val 3404"/>
+              <a:gd name="adj" fmla="val 26667"/>
+            </a:avLst>
+          </a:prstGeom>
+          <a:solidFill>
+            <a:srgbClr val="F26B6B">
+              <a:alpha val="18000"/>
+            </a:srgbClr>
+          </a:solidFill>
+          <a:ln w="9525">
+            <a:solidFill>
+              <a:srgbClr val="F26B6B"/>
+            </a:solidFill>
+            <a:prstDash val="solid"/>
+          </a:ln>
+        </p:spPr>
+      </p:sp>
+      <p:sp>
+        <p:nvSpPr>
+          <p:cNvPr id="16" name="Text 13"/>
+          <p:cNvSpPr txBox="1"/>
+          <p:nvPr/>
+        </p:nvSpPr>
+        <p:spPr>
+          <a:xfrm>
+            <a:off x="2176272" y="2788920"/>
+            <a:ext cx="886968" cy="274320"/>
+          </a:xfrm>
+          <a:prstGeom prst="rect">
+            <a:avLst/>
+          </a:prstGeom>
+          <a:noFill/>
+          <a:ln/>
+        </p:spPr>
+        <p:txBody>
+          <a:bodyPr wrap="square" lIns="0" tIns="0" rIns="0" bIns="0" rtlCol="0" anchor="ctr"/>
+          <a:lstStyle/>
+          <a:p>
+            <a:pPr algn="ctr" indent="0" marL="0">
+              <a:buNone/>
+            </a:pPr>
+            <a:r>
+              <a:rPr lang="en-US" sz="1150" b="1" dirty="0">
+                <a:solidFill>
+                  <a:srgbClr val="F26B6B"/>
+                </a:solidFill>
+                <a:latin typeface="Arial" pitchFamily="34" charset="0"/>
+                <a:ea typeface="Arial" pitchFamily="34" charset="-122"/>
+                <a:cs typeface="Arial" pitchFamily="34" charset="-120"/>
+              </a:rPr>
+              <a:t>▼ 3,7 %</a:t>
+            </a:r>
+            <a:endParaRPr lang="en-US" sz="1150" dirty="0"/>
+          </a:p>
+        </p:txBody>
+      </p:sp>
+      <p:sp>
+        <p:nvSpPr>
+          <p:cNvPr id="17" name="Text 14"/>
+          <p:cNvSpPr txBox="1"/>
+          <p:nvPr/>
+        </p:nvSpPr>
+        <p:spPr>
+          <a:xfrm>
+            <a:off x="713232" y="3081528"/>
+            <a:ext cx="1600200" cy="274320"/>
+          </a:xfrm>
+          <a:prstGeom prst="rect">
+            <a:avLst/>
+          </a:prstGeom>
+          <a:noFill/>
+          <a:ln/>
+        </p:spPr>
+        <p:txBody>
+          <a:bodyPr wrap="square" lIns="0" tIns="0" rIns="0" bIns="0" rtlCol="0" anchor="ctr"/>
+          <a:lstStyle/>
+          <a:p>
+            <a:pPr algn="l" indent="0" marL="0">
+              <a:buNone/>
+            </a:pPr>
+            <a:r>
+              <a:rPr lang="en-US" sz="1100" dirty="0">
+                <a:solidFill>
+                  <a:srgbClr val="BCCDE8"/>
+                </a:solidFill>
+                <a:latin typeface="Arial" pitchFamily="34" charset="0"/>
+                <a:ea typeface="Arial" pitchFamily="34" charset="-122"/>
+                <a:cs typeface="Arial" pitchFamily="34" charset="-120"/>
+              </a:rPr>
+              <a:t>Proyección a 3 meses</a:t>
+            </a:r>
+            <a:endParaRPr lang="en-US" sz="1100" dirty="0"/>
+          </a:p>
+        </p:txBody>
+      </p:sp>
+      <p:sp>
+        <p:nvSpPr>
+          <p:cNvPr id="18" name="Shape 15"/>
+          <p:cNvSpPr/>
+          <p:nvPr/>
+        </p:nvSpPr>
+        <p:spPr>
+          <a:xfrm>
+            <a:off x="2176272" y="3081528"/>
+            <a:ext cx="886968" cy="274320"/>
+          </a:xfrm>
+          <a:prstGeom prst="roundRect">
+            <a:avLst>
+              <a:gd name="adj" fmla="val 26667"/>
+            </a:avLst>
+          </a:prstGeom>
+          <a:solidFill>
+            <a:srgbClr val="94AACC">
+              <a:alpha val="18000"/>
+            </a:srgbClr>
+          </a:solidFill>
+          <a:ln w="9525">
+            <a:solidFill>
+              <a:srgbClr val="94AACC"/>
+            </a:solidFill>
+            <a:prstDash val="solid"/>
+          </a:ln>
+        </p:spPr>
+      </p:sp>
+      <p:sp>
+        <p:nvSpPr>
+          <p:cNvPr id="19" name="Text 16"/>
+          <p:cNvSpPr txBox="1"/>
+          <p:nvPr/>
+        </p:nvSpPr>
+        <p:spPr>
+          <a:xfrm>
+            <a:off x="2176272" y="3081528"/>
+            <a:ext cx="886968" cy="274320"/>
+          </a:xfrm>
+          <a:prstGeom prst="rect">
+            <a:avLst/>
+          </a:prstGeom>
+          <a:noFill/>
+          <a:ln/>
+        </p:spPr>
+        <p:txBody>
+          <a:bodyPr wrap="square" lIns="0" tIns="0" rIns="0" bIns="0" rtlCol="0" anchor="ctr"/>
+          <a:lstStyle/>
+          <a:p>
+            <a:pPr algn="ctr" indent="0" marL="0">
+              <a:buNone/>
+            </a:pPr>
+            <a:r>
+              <a:rPr lang="en-US" sz="1150" b="1" dirty="0">
+                <a:solidFill>
+                  <a:srgbClr val="94AACC"/>
+                </a:solidFill>
+                <a:latin typeface="Arial" pitchFamily="34" charset="0"/>
+                <a:ea typeface="Arial" pitchFamily="34" charset="-122"/>
+                <a:cs typeface="Arial" pitchFamily="34" charset="-120"/>
+              </a:rPr>
+              <a:t>= 0,0 %</a:t>
+            </a:r>
+            <a:endParaRPr lang="en-US" sz="1150" dirty="0"/>
+          </a:p>
+        </p:txBody>
+      </p:sp>
+      <p:sp>
+        <p:nvSpPr>
+          <p:cNvPr id="20" name="Text 17"/>
+          <p:cNvSpPr txBox="1"/>
+          <p:nvPr/>
+        </p:nvSpPr>
+        <p:spPr>
+          <a:xfrm>
+            <a:off x="713232" y="3374136"/>
+            <a:ext cx="1600200" cy="274320"/>
+          </a:xfrm>
+          <a:prstGeom prst="rect">
+            <a:avLst/>
+          </a:prstGeom>
+          <a:noFill/>
+          <a:ln/>
+        </p:spPr>
+        <p:txBody>
+          <a:bodyPr wrap="square" lIns="0" tIns="0" rIns="0" bIns="0" rtlCol="0" anchor="ctr"/>
+          <a:lstStyle/>
+          <a:p>
+            <a:pPr algn="l" indent="0" marL="0">
+              <a:buNone/>
+            </a:pPr>
+            <a:r>
+              <a:rPr lang="en-US" sz="1100" dirty="0">
+                <a:solidFill>
+                  <a:srgbClr val="BCCDE8"/>
+                </a:solidFill>
+                <a:latin typeface="Arial" pitchFamily="34" charset="0"/>
+                <a:ea typeface="Arial" pitchFamily="34" charset="-122"/>
+                <a:cs typeface="Arial" pitchFamily="34" charset="-120"/>
+              </a:rPr>
+              <a:t>Meta 85 %</a:t>
+            </a:r>
+            <a:endParaRPr lang="en-US" sz="1100" dirty="0"/>
+          </a:p>
+        </p:txBody>
+      </p:sp>
+      <p:sp>
+        <p:nvSpPr>
+          <p:cNvPr id="21" name="Shape 18"/>
+          <p:cNvSpPr/>
+          <p:nvPr/>
+        </p:nvSpPr>
+        <p:spPr>
+          <a:xfrm>
+            <a:off x="2176272" y="3374136"/>
+            <a:ext cx="886968" cy="274320"/>
+          </a:xfrm>
+          <a:prstGeom prst="roundRect">
+            <a:avLst>
+              <a:gd name="adj" fmla="val 26667"/>
+            </a:avLst>
+          </a:prstGeom>
+          <a:solidFill>
+            <a:srgbClr val="34D399">
+              <a:alpha val="18000"/>
+            </a:srgbClr>
+          </a:solidFill>
+          <a:ln w="9525">
+            <a:solidFill>
+              <a:srgbClr val="34D399"/>
+            </a:solidFill>
+            <a:prstDash val="solid"/>
+          </a:ln>
+        </p:spPr>
+      </p:sp>
+      <p:sp>
+        <p:nvSpPr>
+          <p:cNvPr id="22" name="Text 19"/>
+          <p:cNvSpPr txBox="1"/>
+          <p:nvPr/>
+        </p:nvSpPr>
+        <p:spPr>
+          <a:xfrm>
+            <a:off x="2176272" y="3374136"/>
+            <a:ext cx="886968" cy="274320"/>
+          </a:xfrm>
+          <a:prstGeom prst="rect">
+            <a:avLst/>
+          </a:prstGeom>
+          <a:noFill/>
+          <a:ln/>
+        </p:spPr>
+        <p:txBody>
+          <a:bodyPr wrap="square" lIns="0" tIns="0" rIns="0" bIns="0" rtlCol="0" anchor="ctr"/>
+          <a:lstStyle/>
+          <a:p>
+            <a:pPr algn="ctr" indent="0" marL="0">
+              <a:buNone/>
+            </a:pPr>
+            <a:r>
+              <a:rPr lang="en-US" sz="1150" b="1" dirty="0">
+                <a:solidFill>
+                  <a:srgbClr val="34D399"/>
+                </a:solidFill>
+                <a:latin typeface="Arial" pitchFamily="34" charset="0"/>
+                <a:ea typeface="Arial" pitchFamily="34" charset="-122"/>
+                <a:cs typeface="Arial" pitchFamily="34" charset="-120"/>
+              </a:rPr>
+              <a:t>✓ OK</a:t>
+            </a:r>
+            <a:endParaRPr lang="en-US" sz="1150" dirty="0"/>
+          </a:p>
+        </p:txBody>
+      </p:sp>
+      <p:sp>
+        <p:nvSpPr>
+          <p:cNvPr id="23" name="Shape 20"/>
+          <p:cNvSpPr/>
+          <p:nvPr/>
+        </p:nvSpPr>
+        <p:spPr>
+          <a:xfrm>
+            <a:off x="3355848" y="1737360"/>
+            <a:ext cx="2679192" cy="1938528"/>
+          </a:xfrm>
+          <a:prstGeom prst="roundRect">
+            <a:avLst>
+              <a:gd name="adj" fmla="val 3774"/>
+            </a:avLst>
+          </a:prstGeom>
+          <a:solidFill>
+            <a:srgbClr val="0F1930"/>
+          </a:solidFill>
+          <a:ln w="19050">
+            <a:solidFill>
+              <a:srgbClr val="F26B6B"/>
+            </a:solidFill>
+            <a:prstDash val="solid"/>
+          </a:ln>
+        </p:spPr>
+      </p:sp>
+      <p:sp>
+        <p:nvSpPr>
+          <p:cNvPr id="24" name="Text 21"/>
+          <p:cNvSpPr txBox="1"/>
+          <p:nvPr/>
+        </p:nvSpPr>
+        <p:spPr>
+          <a:xfrm>
+            <a:off x="3520440" y="1847088"/>
+            <a:ext cx="320040" cy="329184"/>
+          </a:xfrm>
+          <a:prstGeom prst="rect">
+            <a:avLst/>
+          </a:prstGeom>
+          <a:noFill/>
+          <a:ln/>
+        </p:spPr>
+        <p:txBody>
+          <a:bodyPr wrap="square" lIns="0" tIns="0" rIns="0" bIns="0" rtlCol="0" anchor="ctr"/>
+          <a:lstStyle/>
+          <a:p>
+            <a:pPr algn="l" indent="0" marL="0">
+              <a:buNone/>
+            </a:pPr>
+            <a:r>
+              <a:rPr lang="en-US" sz="1600" dirty="0">
+                <a:solidFill>
+                  <a:srgbClr val="5EEAD4"/>
+                </a:solidFill>
+                <a:latin typeface="Arial" pitchFamily="34" charset="0"/>
+                <a:ea typeface="Arial" pitchFamily="34" charset="-122"/>
+                <a:cs typeface="Arial" pitchFamily="34" charset="-120"/>
+              </a:rPr>
+              <a:t>✂</a:t>
+            </a:r>
+            <a:endParaRPr lang="en-US" sz="1600" dirty="0"/>
+          </a:p>
+        </p:txBody>
+      </p:sp>
+      <p:sp>
+        <p:nvSpPr>
+          <p:cNvPr id="25" name="Text 22"/>
+          <p:cNvSpPr txBox="1"/>
+          <p:nvPr/>
+        </p:nvSpPr>
+        <p:spPr>
+          <a:xfrm>
+            <a:off x="3831336" y="1828800"/>
+            <a:ext cx="2084832" cy="365760"/>
+          </a:xfrm>
+          <a:prstGeom prst="rect">
+            <a:avLst/>
+          </a:prstGeom>
+          <a:noFill/>
+          <a:ln/>
+        </p:spPr>
+        <p:txBody>
+          <a:bodyPr wrap="square" lIns="0" tIns="0" rIns="0" bIns="0" rtlCol="0" anchor="ctr"/>
+          <a:lstStyle/>
+          <a:p>
+            <a:pPr algn="l" indent="0" marL="0">
+              <a:buNone/>
+            </a:pPr>
+            <a:r>
+              <a:rPr lang="en-US" sz="1150" b="1" dirty="0">
+                <a:solidFill>
+                  <a:srgbClr val="EAF1FB"/>
+                </a:solidFill>
+                <a:latin typeface="Arial" pitchFamily="34" charset="0"/>
+                <a:ea typeface="Arial" pitchFamily="34" charset="-122"/>
+                <a:cs typeface="Arial" pitchFamily="34" charset="-120"/>
+              </a:rPr>
+              <a:t>Cirugías realizadas</a:t>
+            </a:r>
+            <a:endParaRPr lang="en-US" sz="1150" dirty="0"/>
+          </a:p>
+        </p:txBody>
+      </p:sp>
+      <p:sp>
+        <p:nvSpPr>
+          <p:cNvPr id="26" name="Text 23"/>
+          <p:cNvSpPr txBox="1"/>
+          <p:nvPr/>
+        </p:nvSpPr>
+        <p:spPr>
+          <a:xfrm>
+            <a:off x="3520440" y="2194560"/>
+            <a:ext cx="1463040" cy="548640"/>
+          </a:xfrm>
+          <a:prstGeom prst="rect">
+            <a:avLst/>
+          </a:prstGeom>
+          <a:noFill/>
+          <a:ln/>
+        </p:spPr>
+        <p:txBody>
+          <a:bodyPr wrap="square" lIns="0" tIns="0" rIns="0" bIns="0" rtlCol="0" anchor="ctr"/>
+          <a:lstStyle/>
+          <a:p>
+            <a:pPr algn="l" indent="0" marL="0">
+              <a:buNone/>
+            </a:pPr>
+            <a:r>
+              <a:rPr lang="en-US" sz="3200" b="1" dirty="0">
+                <a:solidFill>
+                  <a:srgbClr val="FFFFFF"/>
+                </a:solidFill>
+                <a:latin typeface="Arial" pitchFamily="34" charset="0"/>
+                <a:ea typeface="Arial" pitchFamily="34" charset="-122"/>
+                <a:cs typeface="Arial" pitchFamily="34" charset="-120"/>
+              </a:rPr>
+              <a:t>14,6</a:t>
+            </a:r>
+            <a:endParaRPr lang="en-US" sz="3200" dirty="0"/>
+          </a:p>
+        </p:txBody>
+      </p:sp>
+      <p:sp>
+        <p:nvSpPr>
+          <p:cNvPr id="27" name="Text 24"/>
+          <p:cNvSpPr txBox="1"/>
+          <p:nvPr/>
+        </p:nvSpPr>
+        <p:spPr>
+          <a:xfrm>
+            <a:off x="4663440" y="2304288"/>
+            <a:ext cx="1097280" cy="365760"/>
+          </a:xfrm>
+          <a:prstGeom prst="rect">
+            <a:avLst/>
+          </a:prstGeom>
+          <a:noFill/>
+          <a:ln/>
+        </p:spPr>
+        <p:txBody>
+          <a:bodyPr wrap="square" lIns="0" tIns="0" rIns="0" bIns="0" rtlCol="0" anchor="ctr"/>
+          <a:lstStyle/>
+          <a:p>
+            <a:pPr algn="l" indent="0" marL="0">
+              <a:buNone/>
+            </a:pPr>
+            <a:r>
+              <a:rPr lang="en-US" sz="1200" b="1" dirty="0">
+                <a:solidFill>
+                  <a:srgbClr val="94AACC"/>
+                </a:solidFill>
+                <a:latin typeface="Arial" pitchFamily="34" charset="0"/>
+                <a:ea typeface="Arial" pitchFamily="34" charset="-122"/>
+                <a:cs typeface="Arial" pitchFamily="34" charset="-120"/>
+              </a:rPr>
+              <a:t>cir/día</a:t>
+            </a:r>
+            <a:endParaRPr lang="en-US" sz="1200" dirty="0"/>
+          </a:p>
+        </p:txBody>
+      </p:sp>
+      <p:sp>
+        <p:nvSpPr>
+          <p:cNvPr id="28" name="Text 25"/>
+          <p:cNvSpPr txBox="1"/>
+          <p:nvPr/>
+        </p:nvSpPr>
+        <p:spPr>
+          <a:xfrm>
+            <a:off x="3520440" y="2788920"/>
+            <a:ext cx="1600200" cy="274320"/>
+          </a:xfrm>
+          <a:prstGeom prst="rect">
+            <a:avLst/>
+          </a:prstGeom>
+          <a:noFill/>
+          <a:ln/>
+        </p:spPr>
+        <p:txBody>
+          <a:bodyPr wrap="square" lIns="0" tIns="0" rIns="0" bIns="0" rtlCol="0" anchor="ctr"/>
+          <a:lstStyle/>
+          <a:p>
+            <a:pPr algn="l" indent="0" marL="0">
+              <a:buNone/>
+            </a:pPr>
+            <a:r>
+              <a:rPr lang="en-US" sz="1100" dirty="0">
+                <a:solidFill>
+                  <a:srgbClr val="BCCDE8"/>
+                </a:solidFill>
+                <a:latin typeface="Arial" pitchFamily="34" charset="0"/>
+                <a:ea typeface="Arial" pitchFamily="34" charset="-122"/>
+                <a:cs typeface="Arial" pitchFamily="34" charset="-120"/>
+              </a:rPr>
+              <a:t>Vs. período anterior</a:t>
+            </a:r>
+            <a:endParaRPr lang="en-US" sz="1100" dirty="0"/>
+          </a:p>
+        </p:txBody>
+      </p:sp>
+      <p:sp>
+        <p:nvSpPr>
+          <p:cNvPr id="29" name="Shape 26"/>
+          <p:cNvSpPr/>
+          <p:nvPr/>
+        </p:nvSpPr>
+        <p:spPr>
+          <a:xfrm>
+            <a:off x="4983480" y="2788920"/>
+            <a:ext cx="886968" cy="274320"/>
+          </a:xfrm>
+          <a:prstGeom prst="roundRect">
+            <a:avLst>
+              <a:gd name="adj" fmla="val 26667"/>
+            </a:avLst>
+          </a:prstGeom>
+          <a:solidFill>
+            <a:srgbClr val="34D399">
+              <a:alpha val="18000"/>
+            </a:srgbClr>
+          </a:solidFill>
+          <a:ln w="9525">
+            <a:solidFill>
+              <a:srgbClr val="34D399"/>
+            </a:solidFill>
+            <a:prstDash val="solid"/>
+          </a:ln>
+        </p:spPr>
+      </p:sp>
+      <p:sp>
+        <p:nvSpPr>
+          <p:cNvPr id="30" name="Text 27"/>
+          <p:cNvSpPr txBox="1"/>
+          <p:nvPr/>
+        </p:nvSpPr>
+        <p:spPr>
+          <a:xfrm>
+            <a:off x="4983480" y="2788920"/>
+            <a:ext cx="886968" cy="274320"/>
+          </a:xfrm>
+          <a:prstGeom prst="rect">
+            <a:avLst/>
+          </a:prstGeom>
+          <a:noFill/>
+          <a:ln/>
+        </p:spPr>
+        <p:txBody>
+          <a:bodyPr wrap="square" lIns="0" tIns="0" rIns="0" bIns="0" rtlCol="0" anchor="ctr"/>
+          <a:lstStyle/>
+          <a:p>
+            <a:pPr algn="ctr" indent="0" marL="0">
+              <a:buNone/>
+            </a:pPr>
+            <a:r>
+              <a:rPr lang="en-US" sz="1150" b="1" dirty="0">
+                <a:solidFill>
+                  <a:srgbClr val="34D399"/>
+                </a:solidFill>
+                <a:latin typeface="Arial" pitchFamily="34" charset="0"/>
+                <a:ea typeface="Arial" pitchFamily="34" charset="-122"/>
+                <a:cs typeface="Arial" pitchFamily="34" charset="-120"/>
+              </a:rPr>
+              <a:t>▲ 53,7 %</a:t>
+            </a:r>
+            <a:endParaRPr lang="en-US" sz="1150" dirty="0"/>
+          </a:p>
+        </p:txBody>
+      </p:sp>
+      <p:sp>
+        <p:nvSpPr>
+          <p:cNvPr id="31" name="Text 28"/>
+          <p:cNvSpPr txBox="1"/>
+          <p:nvPr/>
+        </p:nvSpPr>
+        <p:spPr>
+          <a:xfrm>
+            <a:off x="3520440" y="3081528"/>
+            <a:ext cx="1600200" cy="274320"/>
+          </a:xfrm>
+          <a:prstGeom prst="rect">
+            <a:avLst/>
+          </a:prstGeom>
+          <a:noFill/>
+          <a:ln/>
+        </p:spPr>
+        <p:txBody>
+          <a:bodyPr wrap="square" lIns="0" tIns="0" rIns="0" bIns="0" rtlCol="0" anchor="ctr"/>
+          <a:lstStyle/>
+          <a:p>
+            <a:pPr algn="l" indent="0" marL="0">
+              <a:buNone/>
+            </a:pPr>
+            <a:r>
+              <a:rPr lang="en-US" sz="1100" dirty="0">
+                <a:solidFill>
+                  <a:srgbClr val="BCCDE8"/>
+                </a:solidFill>
+                <a:latin typeface="Arial" pitchFamily="34" charset="0"/>
+                <a:ea typeface="Arial" pitchFamily="34" charset="-122"/>
+                <a:cs typeface="Arial" pitchFamily="34" charset="-120"/>
+              </a:rPr>
+              <a:t>Proyección a 3 meses</a:t>
+            </a:r>
+            <a:endParaRPr lang="en-US" sz="1100" dirty="0"/>
+          </a:p>
+        </p:txBody>
+      </p:sp>
+      <p:sp>
+        <p:nvSpPr>
+          <p:cNvPr id="32" name="Shape 29"/>
+          <p:cNvSpPr/>
+          <p:nvPr/>
+        </p:nvSpPr>
+        <p:spPr>
+          <a:xfrm>
+            <a:off x="4983480" y="3081528"/>
+            <a:ext cx="886968" cy="274320"/>
+          </a:xfrm>
+          <a:prstGeom prst="roundRect">
+            <a:avLst>
+              <a:gd name="adj" fmla="val 26667"/>
+            </a:avLst>
+          </a:prstGeom>
+          <a:solidFill>
+            <a:srgbClr val="94AACC">
+              <a:alpha val="18000"/>
+            </a:srgbClr>
+          </a:solidFill>
+          <a:ln w="9525">
+            <a:solidFill>
+              <a:srgbClr val="94AACC"/>
+            </a:solidFill>
+            <a:prstDash val="solid"/>
+          </a:ln>
+        </p:spPr>
+      </p:sp>
+      <p:sp>
+        <p:nvSpPr>
+          <p:cNvPr id="33" name="Text 30"/>
+          <p:cNvSpPr txBox="1"/>
+          <p:nvPr/>
+        </p:nvSpPr>
+        <p:spPr>
+          <a:xfrm>
+            <a:off x="4983480" y="3081528"/>
+            <a:ext cx="886968" cy="274320"/>
+          </a:xfrm>
+          <a:prstGeom prst="rect">
+            <a:avLst/>
+          </a:prstGeom>
+          <a:noFill/>
+          <a:ln/>
+        </p:spPr>
+        <p:txBody>
+          <a:bodyPr wrap="square" lIns="0" tIns="0" rIns="0" bIns="0" rtlCol="0" anchor="ctr"/>
+          <a:lstStyle/>
+          <a:p>
+            <a:pPr algn="ctr" indent="0" marL="0">
+              <a:buNone/>
+            </a:pPr>
+            <a:r>
+              <a:rPr lang="en-US" sz="1150" b="1" dirty="0">
+                <a:solidFill>
+                  <a:srgbClr val="94AACC"/>
+                </a:solidFill>
+                <a:latin typeface="Arial" pitchFamily="34" charset="0"/>
+                <a:ea typeface="Arial" pitchFamily="34" charset="-122"/>
+                <a:cs typeface="Arial" pitchFamily="34" charset="-120"/>
+              </a:rPr>
+              <a:t>= 0,0 %</a:t>
+            </a:r>
+            <a:endParaRPr lang="en-US" sz="1150" dirty="0"/>
+          </a:p>
+        </p:txBody>
+      </p:sp>
+      <p:sp>
+        <p:nvSpPr>
+          <p:cNvPr id="34" name="Text 31"/>
+          <p:cNvSpPr txBox="1"/>
+          <p:nvPr/>
+        </p:nvSpPr>
+        <p:spPr>
+          <a:xfrm>
+            <a:off x="3520440" y="3374136"/>
+            <a:ext cx="1600200" cy="274320"/>
+          </a:xfrm>
+          <a:prstGeom prst="rect">
+            <a:avLst/>
+          </a:prstGeom>
+          <a:noFill/>
+          <a:ln/>
+        </p:spPr>
+        <p:txBody>
+          <a:bodyPr wrap="square" lIns="0" tIns="0" rIns="0" bIns="0" rtlCol="0" anchor="ctr"/>
+          <a:lstStyle/>
+          <a:p>
+            <a:pPr algn="l" indent="0" marL="0">
+              <a:buNone/>
+            </a:pPr>
+            <a:r>
+              <a:rPr lang="en-US" sz="1100" dirty="0">
+                <a:solidFill>
+                  <a:srgbClr val="BCCDE8"/>
+                </a:solidFill>
+                <a:latin typeface="Arial" pitchFamily="34" charset="0"/>
+                <a:ea typeface="Arial" pitchFamily="34" charset="-122"/>
+                <a:cs typeface="Arial" pitchFamily="34" charset="-120"/>
+              </a:rPr>
+              <a:t>Meta 60 (corregir)</a:t>
+            </a:r>
+            <a:endParaRPr lang="en-US" sz="1100" dirty="0"/>
+          </a:p>
+        </p:txBody>
+      </p:sp>
+      <p:sp>
+        <p:nvSpPr>
+          <p:cNvPr id="35" name="Shape 32"/>
+          <p:cNvSpPr/>
+          <p:nvPr/>
+        </p:nvSpPr>
+        <p:spPr>
+          <a:xfrm>
+            <a:off x="4983480" y="3374136"/>
+            <a:ext cx="886968" cy="274320"/>
+          </a:xfrm>
+          <a:prstGeom prst="roundRect">
+            <a:avLst>
+              <a:gd name="adj" fmla="val 26667"/>
+            </a:avLst>
+          </a:prstGeom>
+          <a:solidFill>
+            <a:srgbClr val="F26B6B">
+              <a:alpha val="18000"/>
+            </a:srgbClr>
+          </a:solidFill>
+          <a:ln w="9525">
+            <a:solidFill>
+              <a:srgbClr val="F26B6B"/>
+            </a:solidFill>
+            <a:prstDash val="solid"/>
+          </a:ln>
+        </p:spPr>
+      </p:sp>
+      <p:sp>
+        <p:nvSpPr>
+          <p:cNvPr id="36" name="Text 33"/>
+          <p:cNvSpPr txBox="1"/>
+          <p:nvPr/>
+        </p:nvSpPr>
+        <p:spPr>
+          <a:xfrm>
+            <a:off x="4983480" y="3374136"/>
+            <a:ext cx="886968" cy="274320"/>
+          </a:xfrm>
+          <a:prstGeom prst="rect">
+            <a:avLst/>
+          </a:prstGeom>
+          <a:noFill/>
+          <a:ln/>
+        </p:spPr>
+        <p:txBody>
+          <a:bodyPr wrap="square" lIns="0" tIns="0" rIns="0" bIns="0" rtlCol="0" anchor="ctr"/>
+          <a:lstStyle/>
+          <a:p>
+            <a:pPr algn="ctr" indent="0" marL="0">
+              <a:buNone/>
+            </a:pPr>
+            <a:r>
+              <a:rPr lang="en-US" sz="1150" b="1" dirty="0">
+                <a:solidFill>
+                  <a:srgbClr val="F26B6B"/>
+                </a:solidFill>
+                <a:latin typeface="Arial" pitchFamily="34" charset="0"/>
+                <a:ea typeface="Arial" pitchFamily="34" charset="-122"/>
+                <a:cs typeface="Arial" pitchFamily="34" charset="-120"/>
+              </a:rPr>
+              <a:t>✕ Crítico</a:t>
+            </a:r>
+            <a:endParaRPr lang="en-US" sz="1150" dirty="0"/>
+          </a:p>
+        </p:txBody>
+      </p:sp>
+      <p:sp>
+        <p:nvSpPr>
+          <p:cNvPr id="37" name="Shape 34"/>
+          <p:cNvSpPr/>
+          <p:nvPr/>
+        </p:nvSpPr>
+        <p:spPr>
+          <a:xfrm>
+            <a:off x="6163056" y="1737360"/>
+            <a:ext cx="2679192" cy="1938528"/>
+          </a:xfrm>
+          <a:prstGeom prst="roundRect">
+            <a:avLst>
+              <a:gd name="adj" fmla="val 3774"/>
             </a:avLst>
           </a:prstGeom>
           <a:solidFill>
@@ -5450,69 +6581,69 @@
       </p:sp>
       <p:sp>
         <p:nvSpPr>
-          <p:cNvPr id="14" name="Text 11"/>
-          <p:cNvSpPr txBox="1"/>
-          <p:nvPr/>
-        </p:nvSpPr>
-        <p:spPr>
-          <a:xfrm>
-            <a:off x="4567428" y="1956816"/>
-            <a:ext cx="3054096" cy="670560"/>
-          </a:xfrm>
-          <a:prstGeom prst="rect">
-            <a:avLst/>
-          </a:prstGeom>
-          <a:noFill/>
-          <a:ln/>
-        </p:spPr>
-        <p:txBody>
-          <a:bodyPr wrap="square" lIns="0" tIns="0" rIns="0" bIns="0" rtlCol="0" anchor="ctr"/>
-          <a:lstStyle/>
-          <a:p>
-            <a:pPr algn="l" indent="0" marL="0">
-              <a:buNone/>
-            </a:pPr>
-            <a:r>
-              <a:rPr lang="en-US" sz="4400" b="1" dirty="0">
-                <a:solidFill>
-                  <a:srgbClr val="F5B342"/>
-                </a:solidFill>
-                <a:latin typeface="Arial" pitchFamily="34" charset="0"/>
-                <a:ea typeface="Arial" pitchFamily="34" charset="-122"/>
-                <a:cs typeface="Arial" pitchFamily="34" charset="-120"/>
-              </a:rPr>
-              <a:t>9 · 29 · 69</a:t>
-            </a:r>
-            <a:endParaRPr lang="en-US" sz="4400" dirty="0"/>
-          </a:p>
-        </p:txBody>
-      </p:sp>
-      <p:sp>
-        <p:nvSpPr>
-          <p:cNvPr id="15" name="Text 12"/>
-          <p:cNvSpPr txBox="1"/>
-          <p:nvPr/>
-        </p:nvSpPr>
-        <p:spPr>
-          <a:xfrm>
-            <a:off x="4567428" y="2627376"/>
-            <a:ext cx="3054096" cy="274320"/>
-          </a:xfrm>
-          <a:prstGeom prst="rect">
-            <a:avLst/>
-          </a:prstGeom>
-          <a:noFill/>
-          <a:ln/>
-        </p:spPr>
-        <p:txBody>
-          <a:bodyPr wrap="square" lIns="0" tIns="0" rIns="0" bIns="0" rtlCol="0" anchor="ctr"/>
-          <a:lstStyle/>
-          <a:p>
-            <a:pPr algn="l" indent="0" marL="0">
-              <a:buNone/>
-            </a:pPr>
-            <a:r>
-              <a:rPr lang="en-US" sz="1300" b="1" dirty="0">
+          <p:cNvPr id="38" name="Text 35"/>
+          <p:cNvSpPr txBox="1"/>
+          <p:nvPr/>
+        </p:nvSpPr>
+        <p:spPr>
+          <a:xfrm>
+            <a:off x="6327648" y="1847088"/>
+            <a:ext cx="320040" cy="329184"/>
+          </a:xfrm>
+          <a:prstGeom prst="rect">
+            <a:avLst/>
+          </a:prstGeom>
+          <a:noFill/>
+          <a:ln/>
+        </p:spPr>
+        <p:txBody>
+          <a:bodyPr wrap="square" lIns="0" tIns="0" rIns="0" bIns="0" rtlCol="0" anchor="ctr"/>
+          <a:lstStyle/>
+          <a:p>
+            <a:pPr algn="l" indent="0" marL="0">
+              <a:buNone/>
+            </a:pPr>
+            <a:r>
+              <a:rPr lang="en-US" sz="1600" dirty="0">
+                <a:solidFill>
+                  <a:srgbClr val="5EEAD4"/>
+                </a:solidFill>
+                <a:latin typeface="Arial" pitchFamily="34" charset="0"/>
+                <a:ea typeface="Arial" pitchFamily="34" charset="-122"/>
+                <a:cs typeface="Arial" pitchFamily="34" charset="-120"/>
+              </a:rPr>
+              <a:t>↗</a:t>
+            </a:r>
+            <a:endParaRPr lang="en-US" sz="1600" dirty="0"/>
+          </a:p>
+        </p:txBody>
+      </p:sp>
+      <p:sp>
+        <p:nvSpPr>
+          <p:cNvPr id="39" name="Text 36"/>
+          <p:cNvSpPr txBox="1"/>
+          <p:nvPr/>
+        </p:nvSpPr>
+        <p:spPr>
+          <a:xfrm>
+            <a:off x="6638544" y="1828800"/>
+            <a:ext cx="2084832" cy="365760"/>
+          </a:xfrm>
+          <a:prstGeom prst="rect">
+            <a:avLst/>
+          </a:prstGeom>
+          <a:noFill/>
+          <a:ln/>
+        </p:spPr>
+        <p:txBody>
+          <a:bodyPr wrap="square" lIns="0" tIns="0" rIns="0" bIns="0" rtlCol="0" anchor="ctr"/>
+          <a:lstStyle/>
+          <a:p>
+            <a:pPr algn="l" indent="0" marL="0">
+              <a:buNone/>
+            </a:pPr>
+            <a:r>
+              <a:rPr lang="en-US" sz="1150" b="1" dirty="0">
                 <a:solidFill>
                   <a:srgbClr val="EAF1FB"/>
                 </a:solidFill>
@@ -5520,38 +6651,77 @@
                 <a:ea typeface="Arial" pitchFamily="34" charset="-122"/>
                 <a:cs typeface="Arial" pitchFamily="34" charset="-120"/>
               </a:rPr>
-              <a:t>septiembre a diciembre</a:t>
-            </a:r>
-            <a:endParaRPr lang="en-US" sz="1300" dirty="0"/>
-          </a:p>
-        </p:txBody>
-      </p:sp>
-      <p:sp>
-        <p:nvSpPr>
-          <p:cNvPr id="16" name="Text 13"/>
-          <p:cNvSpPr txBox="1"/>
-          <p:nvPr/>
-        </p:nvSpPr>
-        <p:spPr>
-          <a:xfrm>
-            <a:off x="4567428" y="2901696"/>
-            <a:ext cx="3054096" cy="1021080"/>
-          </a:xfrm>
-          <a:prstGeom prst="rect">
-            <a:avLst/>
-          </a:prstGeom>
-          <a:noFill/>
-          <a:ln/>
-        </p:spPr>
-        <p:txBody>
-          <a:bodyPr wrap="square" lIns="0" tIns="0" rIns="0" bIns="0" rtlCol="0" anchor="t"/>
-          <a:lstStyle/>
-          <a:p>
-            <a:pPr algn="l" indent="0" marL="0">
-              <a:buNone/>
-            </a:pPr>
-            <a:r>
-              <a:rPr lang="en-US" sz="1250" dirty="0">
+              <a:t>Rendimiento diario por pabellón</a:t>
+            </a:r>
+            <a:endParaRPr lang="en-US" sz="1150" dirty="0"/>
+          </a:p>
+        </p:txBody>
+      </p:sp>
+      <p:sp>
+        <p:nvSpPr>
+          <p:cNvPr id="40" name="Text 37"/>
+          <p:cNvSpPr txBox="1"/>
+          <p:nvPr/>
+        </p:nvSpPr>
+        <p:spPr>
+          <a:xfrm>
+            <a:off x="6327648" y="2194560"/>
+            <a:ext cx="1463040" cy="548640"/>
+          </a:xfrm>
+          <a:prstGeom prst="rect">
+            <a:avLst/>
+          </a:prstGeom>
+          <a:noFill/>
+          <a:ln/>
+        </p:spPr>
+        <p:txBody>
+          <a:bodyPr wrap="square" lIns="0" tIns="0" rIns="0" bIns="0" rtlCol="0" anchor="ctr"/>
+          <a:lstStyle/>
+          <a:p>
+            <a:pPr algn="l" indent="0" marL="0">
+              <a:buNone/>
+            </a:pPr>
+            <a:r>
+              <a:rPr lang="en-US" sz="3200" b="1" dirty="0">
+                <a:solidFill>
+                  <a:srgbClr val="FFFFFF"/>
+                </a:solidFill>
+                <a:latin typeface="Arial" pitchFamily="34" charset="0"/>
+                <a:ea typeface="Arial" pitchFamily="34" charset="-122"/>
+                <a:cs typeface="Arial" pitchFamily="34" charset="-120"/>
+              </a:rPr>
+              <a:t>7,3</a:t>
+            </a:r>
+            <a:endParaRPr lang="en-US" sz="3200" dirty="0"/>
+          </a:p>
+        </p:txBody>
+      </p:sp>
+      <p:sp>
+        <p:nvSpPr>
+          <p:cNvPr id="41" name="Text 38"/>
+          <p:cNvSpPr txBox="1"/>
+          <p:nvPr/>
+        </p:nvSpPr>
+        <p:spPr>
+          <a:xfrm>
+            <a:off x="7196328" y="2304288"/>
+            <a:ext cx="1097280" cy="365760"/>
+          </a:xfrm>
+          <a:prstGeom prst="rect">
+            <a:avLst/>
+          </a:prstGeom>
+          <a:noFill/>
+          <a:ln/>
+        </p:spPr>
+        <p:txBody>
+          <a:bodyPr wrap="square" lIns="0" tIns="0" rIns="0" bIns="0" rtlCol="0" anchor="ctr"/>
+          <a:lstStyle/>
+          <a:p>
+            <a:pPr algn="l" indent="0" marL="0">
+              <a:buNone/>
+            </a:pPr>
+            <a:r>
+              <a:rPr lang="en-US" sz="1200" b="1" dirty="0">
                 <a:solidFill>
                   <a:srgbClr val="94AACC"/>
                 </a:solidFill>
@@ -5559,26 +6729,347 @@
                 <a:ea typeface="Arial" pitchFamily="34" charset="-122"/>
                 <a:cs typeface="Arial" pitchFamily="34" charset="-120"/>
               </a:rPr>
-              <a:t>si se sostiene · si sube a 4 % · si vuelve 2025</a:t>
-            </a:r>
-            <a:endParaRPr lang="en-US" sz="1250" dirty="0"/>
-          </a:p>
-        </p:txBody>
-      </p:sp>
-      <p:sp>
-        <p:nvSpPr>
-          <p:cNvPr id="17" name="Shape 14"/>
+              <a:t>cir/pab</a:t>
+            </a:r>
+            <a:endParaRPr lang="en-US" sz="1200" dirty="0"/>
+          </a:p>
+        </p:txBody>
+      </p:sp>
+      <p:sp>
+        <p:nvSpPr>
+          <p:cNvPr id="42" name="Text 39"/>
+          <p:cNvSpPr txBox="1"/>
+          <p:nvPr/>
+        </p:nvSpPr>
+        <p:spPr>
+          <a:xfrm>
+            <a:off x="6327648" y="2788920"/>
+            <a:ext cx="1600200" cy="274320"/>
+          </a:xfrm>
+          <a:prstGeom prst="rect">
+            <a:avLst/>
+          </a:prstGeom>
+          <a:noFill/>
+          <a:ln/>
+        </p:spPr>
+        <p:txBody>
+          <a:bodyPr wrap="square" lIns="0" tIns="0" rIns="0" bIns="0" rtlCol="0" anchor="ctr"/>
+          <a:lstStyle/>
+          <a:p>
+            <a:pPr algn="l" indent="0" marL="0">
+              <a:buNone/>
+            </a:pPr>
+            <a:r>
+              <a:rPr lang="en-US" sz="1100" dirty="0">
+                <a:solidFill>
+                  <a:srgbClr val="BCCDE8"/>
+                </a:solidFill>
+                <a:latin typeface="Arial" pitchFamily="34" charset="0"/>
+                <a:ea typeface="Arial" pitchFamily="34" charset="-122"/>
+                <a:cs typeface="Arial" pitchFamily="34" charset="-120"/>
+              </a:rPr>
+              <a:t>Vs. período anterior</a:t>
+            </a:r>
+            <a:endParaRPr lang="en-US" sz="1100" dirty="0"/>
+          </a:p>
+        </p:txBody>
+      </p:sp>
+      <p:sp>
+        <p:nvSpPr>
+          <p:cNvPr id="43" name="Shape 40"/>
           <p:cNvSpPr/>
           <p:nvPr/>
         </p:nvSpPr>
         <p:spPr>
           <a:xfrm>
-            <a:off x="8074152" y="1828800"/>
-            <a:ext cx="3566160" cy="2148840"/>
+            <a:off x="7790688" y="2788920"/>
+            <a:ext cx="886968" cy="274320"/>
           </a:xfrm>
           <a:prstGeom prst="roundRect">
             <a:avLst>
-              <a:gd name="adj" fmla="val 3404"/>
+              <a:gd name="adj" fmla="val 26667"/>
+            </a:avLst>
+          </a:prstGeom>
+          <a:solidFill>
+            <a:srgbClr val="34D399">
+              <a:alpha val="18000"/>
+            </a:srgbClr>
+          </a:solidFill>
+          <a:ln w="9525">
+            <a:solidFill>
+              <a:srgbClr val="34D399"/>
+            </a:solidFill>
+            <a:prstDash val="solid"/>
+          </a:ln>
+        </p:spPr>
+      </p:sp>
+      <p:sp>
+        <p:nvSpPr>
+          <p:cNvPr id="44" name="Text 41"/>
+          <p:cNvSpPr txBox="1"/>
+          <p:nvPr/>
+        </p:nvSpPr>
+        <p:spPr>
+          <a:xfrm>
+            <a:off x="7790688" y="2788920"/>
+            <a:ext cx="886968" cy="274320"/>
+          </a:xfrm>
+          <a:prstGeom prst="rect">
+            <a:avLst/>
+          </a:prstGeom>
+          <a:noFill/>
+          <a:ln/>
+        </p:spPr>
+        <p:txBody>
+          <a:bodyPr wrap="square" lIns="0" tIns="0" rIns="0" bIns="0" rtlCol="0" anchor="ctr"/>
+          <a:lstStyle/>
+          <a:p>
+            <a:pPr algn="ctr" indent="0" marL="0">
+              <a:buNone/>
+            </a:pPr>
+            <a:r>
+              <a:rPr lang="en-US" sz="1150" b="1" dirty="0">
+                <a:solidFill>
+                  <a:srgbClr val="34D399"/>
+                </a:solidFill>
+                <a:latin typeface="Arial" pitchFamily="34" charset="0"/>
+                <a:ea typeface="Arial" pitchFamily="34" charset="-122"/>
+                <a:cs typeface="Arial" pitchFamily="34" charset="-120"/>
+              </a:rPr>
+              <a:t>▲ 78,0 %</a:t>
+            </a:r>
+            <a:endParaRPr lang="en-US" sz="1150" dirty="0"/>
+          </a:p>
+        </p:txBody>
+      </p:sp>
+      <p:sp>
+        <p:nvSpPr>
+          <p:cNvPr id="45" name="Text 42"/>
+          <p:cNvSpPr txBox="1"/>
+          <p:nvPr/>
+        </p:nvSpPr>
+        <p:spPr>
+          <a:xfrm>
+            <a:off x="6327648" y="3081528"/>
+            <a:ext cx="1600200" cy="274320"/>
+          </a:xfrm>
+          <a:prstGeom prst="rect">
+            <a:avLst/>
+          </a:prstGeom>
+          <a:noFill/>
+          <a:ln/>
+        </p:spPr>
+        <p:txBody>
+          <a:bodyPr wrap="square" lIns="0" tIns="0" rIns="0" bIns="0" rtlCol="0" anchor="ctr"/>
+          <a:lstStyle/>
+          <a:p>
+            <a:pPr algn="l" indent="0" marL="0">
+              <a:buNone/>
+            </a:pPr>
+            <a:r>
+              <a:rPr lang="en-US" sz="1100" dirty="0">
+                <a:solidFill>
+                  <a:srgbClr val="BCCDE8"/>
+                </a:solidFill>
+                <a:latin typeface="Arial" pitchFamily="34" charset="0"/>
+                <a:ea typeface="Arial" pitchFamily="34" charset="-122"/>
+                <a:cs typeface="Arial" pitchFamily="34" charset="-120"/>
+              </a:rPr>
+              <a:t>Proyección a 3 meses</a:t>
+            </a:r>
+            <a:endParaRPr lang="en-US" sz="1100" dirty="0"/>
+          </a:p>
+        </p:txBody>
+      </p:sp>
+      <p:sp>
+        <p:nvSpPr>
+          <p:cNvPr id="46" name="Shape 43"/>
+          <p:cNvSpPr/>
+          <p:nvPr/>
+        </p:nvSpPr>
+        <p:spPr>
+          <a:xfrm>
+            <a:off x="7790688" y="3081528"/>
+            <a:ext cx="886968" cy="274320"/>
+          </a:xfrm>
+          <a:prstGeom prst="roundRect">
+            <a:avLst>
+              <a:gd name="adj" fmla="val 26667"/>
+            </a:avLst>
+          </a:prstGeom>
+          <a:solidFill>
+            <a:srgbClr val="94AACC">
+              <a:alpha val="18000"/>
+            </a:srgbClr>
+          </a:solidFill>
+          <a:ln w="9525">
+            <a:solidFill>
+              <a:srgbClr val="94AACC"/>
+            </a:solidFill>
+            <a:prstDash val="solid"/>
+          </a:ln>
+        </p:spPr>
+      </p:sp>
+      <p:sp>
+        <p:nvSpPr>
+          <p:cNvPr id="47" name="Text 44"/>
+          <p:cNvSpPr txBox="1"/>
+          <p:nvPr/>
+        </p:nvSpPr>
+        <p:spPr>
+          <a:xfrm>
+            <a:off x="7790688" y="3081528"/>
+            <a:ext cx="886968" cy="274320"/>
+          </a:xfrm>
+          <a:prstGeom prst="rect">
+            <a:avLst/>
+          </a:prstGeom>
+          <a:noFill/>
+          <a:ln/>
+        </p:spPr>
+        <p:txBody>
+          <a:bodyPr wrap="square" lIns="0" tIns="0" rIns="0" bIns="0" rtlCol="0" anchor="ctr"/>
+          <a:lstStyle/>
+          <a:p>
+            <a:pPr algn="ctr" indent="0" marL="0">
+              <a:buNone/>
+            </a:pPr>
+            <a:r>
+              <a:rPr lang="en-US" sz="1150" b="1" dirty="0">
+                <a:solidFill>
+                  <a:srgbClr val="94AACC"/>
+                </a:solidFill>
+                <a:latin typeface="Arial" pitchFamily="34" charset="0"/>
+                <a:ea typeface="Arial" pitchFamily="34" charset="-122"/>
+                <a:cs typeface="Arial" pitchFamily="34" charset="-120"/>
+              </a:rPr>
+              <a:t>= 0,0 %</a:t>
+            </a:r>
+            <a:endParaRPr lang="en-US" sz="1150" dirty="0"/>
+          </a:p>
+        </p:txBody>
+      </p:sp>
+      <p:sp>
+        <p:nvSpPr>
+          <p:cNvPr id="48" name="Text 45"/>
+          <p:cNvSpPr txBox="1"/>
+          <p:nvPr/>
+        </p:nvSpPr>
+        <p:spPr>
+          <a:xfrm>
+            <a:off x="6327648" y="3374136"/>
+            <a:ext cx="1600200" cy="274320"/>
+          </a:xfrm>
+          <a:prstGeom prst="rect">
+            <a:avLst/>
+          </a:prstGeom>
+          <a:noFill/>
+          <a:ln/>
+        </p:spPr>
+        <p:txBody>
+          <a:bodyPr wrap="square" lIns="0" tIns="0" rIns="0" bIns="0" rtlCol="0" anchor="ctr"/>
+          <a:lstStyle/>
+          <a:p>
+            <a:pPr algn="l" indent="0" marL="0">
+              <a:buNone/>
+            </a:pPr>
+            <a:r>
+              <a:rPr lang="en-US" sz="1100" dirty="0">
+                <a:solidFill>
+                  <a:srgbClr val="BCCDE8"/>
+                </a:solidFill>
+                <a:latin typeface="Arial" pitchFamily="34" charset="0"/>
+                <a:ea typeface="Arial" pitchFamily="34" charset="-122"/>
+                <a:cs typeface="Arial" pitchFamily="34" charset="-120"/>
+              </a:rPr>
+              <a:t>Meta 6 cir/pab</a:t>
+            </a:r>
+            <a:endParaRPr lang="en-US" sz="1100" dirty="0"/>
+          </a:p>
+        </p:txBody>
+      </p:sp>
+      <p:sp>
+        <p:nvSpPr>
+          <p:cNvPr id="49" name="Shape 46"/>
+          <p:cNvSpPr/>
+          <p:nvPr/>
+        </p:nvSpPr>
+        <p:spPr>
+          <a:xfrm>
+            <a:off x="7790688" y="3374136"/>
+            <a:ext cx="886968" cy="274320"/>
+          </a:xfrm>
+          <a:prstGeom prst="roundRect">
+            <a:avLst>
+              <a:gd name="adj" fmla="val 26667"/>
+            </a:avLst>
+          </a:prstGeom>
+          <a:solidFill>
+            <a:srgbClr val="34D399">
+              <a:alpha val="18000"/>
+            </a:srgbClr>
+          </a:solidFill>
+          <a:ln w="9525">
+            <a:solidFill>
+              <a:srgbClr val="34D399"/>
+            </a:solidFill>
+            <a:prstDash val="solid"/>
+          </a:ln>
+        </p:spPr>
+      </p:sp>
+      <p:sp>
+        <p:nvSpPr>
+          <p:cNvPr id="50" name="Text 47"/>
+          <p:cNvSpPr txBox="1"/>
+          <p:nvPr/>
+        </p:nvSpPr>
+        <p:spPr>
+          <a:xfrm>
+            <a:off x="7790688" y="3374136"/>
+            <a:ext cx="886968" cy="274320"/>
+          </a:xfrm>
+          <a:prstGeom prst="rect">
+            <a:avLst/>
+          </a:prstGeom>
+          <a:noFill/>
+          <a:ln/>
+        </p:spPr>
+        <p:txBody>
+          <a:bodyPr wrap="square" lIns="0" tIns="0" rIns="0" bIns="0" rtlCol="0" anchor="ctr"/>
+          <a:lstStyle/>
+          <a:p>
+            <a:pPr algn="ctr" indent="0" marL="0">
+              <a:buNone/>
+            </a:pPr>
+            <a:r>
+              <a:rPr lang="en-US" sz="1150" b="1" dirty="0">
+                <a:solidFill>
+                  <a:srgbClr val="34D399"/>
+                </a:solidFill>
+                <a:latin typeface="Arial" pitchFamily="34" charset="0"/>
+                <a:ea typeface="Arial" pitchFamily="34" charset="-122"/>
+                <a:cs typeface="Arial" pitchFamily="34" charset="-120"/>
+              </a:rPr>
+              <a:t>✓ OK</a:t>
+            </a:r>
+            <a:endParaRPr lang="en-US" sz="1150" dirty="0"/>
+          </a:p>
+        </p:txBody>
+      </p:sp>
+      <p:sp>
+        <p:nvSpPr>
+          <p:cNvPr id="51" name="Shape 48"/>
+          <p:cNvSpPr/>
+          <p:nvPr/>
+        </p:nvSpPr>
+        <p:spPr>
+          <a:xfrm>
+            <a:off x="8970264" y="1737360"/>
+            <a:ext cx="2679192" cy="1938528"/>
+          </a:xfrm>
+          <a:prstGeom prst="roundRect">
+            <a:avLst>
+              <a:gd name="adj" fmla="val 3774"/>
             </a:avLst>
           </a:prstGeom>
           <a:solidFill>
@@ -5594,69 +7085,69 @@
       </p:sp>
       <p:sp>
         <p:nvSpPr>
-          <p:cNvPr id="18" name="Text 15"/>
-          <p:cNvSpPr txBox="1"/>
-          <p:nvPr/>
-        </p:nvSpPr>
-        <p:spPr>
-          <a:xfrm>
-            <a:off x="8330184" y="1956816"/>
-            <a:ext cx="3054096" cy="670560"/>
-          </a:xfrm>
-          <a:prstGeom prst="rect">
-            <a:avLst/>
-          </a:prstGeom>
-          <a:noFill/>
-          <a:ln/>
-        </p:spPr>
-        <p:txBody>
-          <a:bodyPr wrap="square" lIns="0" tIns="0" rIns="0" bIns="0" rtlCol="0" anchor="ctr"/>
-          <a:lstStyle/>
-          <a:p>
-            <a:pPr algn="l" indent="0" marL="0">
-              <a:buNone/>
-            </a:pPr>
-            <a:r>
-              <a:rPr lang="en-US" sz="4400" b="1" dirty="0">
-                <a:solidFill>
-                  <a:srgbClr val="34D399"/>
-                </a:solidFill>
-                <a:latin typeface="Arial" pitchFamily="34" charset="0"/>
-                <a:ea typeface="Arial" pitchFamily="34" charset="-122"/>
-                <a:cs typeface="Arial" pitchFamily="34" charset="-120"/>
-              </a:rPr>
-              <a:t>66 vs 505</a:t>
-            </a:r>
-            <a:endParaRPr lang="en-US" sz="4400" dirty="0"/>
-          </a:p>
-        </p:txBody>
-      </p:sp>
-      <p:sp>
-        <p:nvSpPr>
-          <p:cNvPr id="19" name="Text 16"/>
-          <p:cNvSpPr txBox="1"/>
-          <p:nvPr/>
-        </p:nvSpPr>
-        <p:spPr>
-          <a:xfrm>
-            <a:off x="8330184" y="2627376"/>
-            <a:ext cx="3054096" cy="274320"/>
-          </a:xfrm>
-          <a:prstGeom prst="rect">
-            <a:avLst/>
-          </a:prstGeom>
-          <a:noFill/>
-          <a:ln/>
-        </p:spPr>
-        <p:txBody>
-          <a:bodyPr wrap="square" lIns="0" tIns="0" rIns="0" bIns="0" rtlCol="0" anchor="ctr"/>
-          <a:lstStyle/>
-          <a:p>
-            <a:pPr algn="l" indent="0" marL="0">
-              <a:buNone/>
-            </a:pPr>
-            <a:r>
-              <a:rPr lang="en-US" sz="1300" b="1" dirty="0">
+          <p:cNvPr id="52" name="Text 49"/>
+          <p:cNvSpPr txBox="1"/>
+          <p:nvPr/>
+        </p:nvSpPr>
+        <p:spPr>
+          <a:xfrm>
+            <a:off x="9134856" y="1847088"/>
+            <a:ext cx="320040" cy="329184"/>
+          </a:xfrm>
+          <a:prstGeom prst="rect">
+            <a:avLst/>
+          </a:prstGeom>
+          <a:noFill/>
+          <a:ln/>
+        </p:spPr>
+        <p:txBody>
+          <a:bodyPr wrap="square" lIns="0" tIns="0" rIns="0" bIns="0" rtlCol="0" anchor="ctr"/>
+          <a:lstStyle/>
+          <a:p>
+            <a:pPr algn="l" indent="0" marL="0">
+              <a:buNone/>
+            </a:pPr>
+            <a:r>
+              <a:rPr lang="en-US" sz="1600" dirty="0">
+                <a:solidFill>
+                  <a:srgbClr val="5EEAD4"/>
+                </a:solidFill>
+                <a:latin typeface="Arial" pitchFamily="34" charset="0"/>
+                <a:ea typeface="Arial" pitchFamily="34" charset="-122"/>
+                <a:cs typeface="Arial" pitchFamily="34" charset="-120"/>
+              </a:rPr>
+              <a:t>◷</a:t>
+            </a:r>
+            <a:endParaRPr lang="en-US" sz="1600" dirty="0"/>
+          </a:p>
+        </p:txBody>
+      </p:sp>
+      <p:sp>
+        <p:nvSpPr>
+          <p:cNvPr id="53" name="Text 50"/>
+          <p:cNvSpPr txBox="1"/>
+          <p:nvPr/>
+        </p:nvSpPr>
+        <p:spPr>
+          <a:xfrm>
+            <a:off x="9445752" y="1828800"/>
+            <a:ext cx="2084832" cy="365760"/>
+          </a:xfrm>
+          <a:prstGeom prst="rect">
+            <a:avLst/>
+          </a:prstGeom>
+          <a:noFill/>
+          <a:ln/>
+        </p:spPr>
+        <p:txBody>
+          <a:bodyPr wrap="square" lIns="0" tIns="0" rIns="0" bIns="0" rtlCol="0" anchor="ctr"/>
+          <a:lstStyle/>
+          <a:p>
+            <a:pPr algn="l" indent="0" marL="0">
+              <a:buNone/>
+            </a:pPr>
+            <a:r>
+              <a:rPr lang="en-US" sz="1150" b="1" dirty="0">
                 <a:solidFill>
                   <a:srgbClr val="EAF1FB"/>
                 </a:solidFill>
@@ -5664,38 +7155,77 @@
                 <a:ea typeface="Arial" pitchFamily="34" charset="-122"/>
                 <a:cs typeface="Arial" pitchFamily="34" charset="-120"/>
               </a:rPr>
-              <a:t>al año en el HPMM (7 pabellones)</a:t>
-            </a:r>
-            <a:endParaRPr lang="en-US" sz="1300" dirty="0"/>
-          </a:p>
-        </p:txBody>
-      </p:sp>
-      <p:sp>
-        <p:nvSpPr>
-          <p:cNvPr id="20" name="Text 17"/>
-          <p:cNvSpPr txBox="1"/>
-          <p:nvPr/>
-        </p:nvSpPr>
-        <p:spPr>
-          <a:xfrm>
-            <a:off x="8330184" y="2901696"/>
-            <a:ext cx="3054096" cy="1021080"/>
-          </a:xfrm>
-          <a:prstGeom prst="rect">
-            <a:avLst/>
-          </a:prstGeom>
-          <a:noFill/>
-          <a:ln/>
-        </p:spPr>
-        <p:txBody>
-          <a:bodyPr wrap="square" lIns="0" tIns="0" rIns="0" bIns="0" rtlCol="0" anchor="t"/>
-          <a:lstStyle/>
-          <a:p>
-            <a:pPr algn="l" indent="0" marL="0">
-              <a:buNone/>
-            </a:pPr>
-            <a:r>
-              <a:rPr lang="en-US" sz="1250" dirty="0">
+              <a:t>Retraso primera hora</a:t>
+            </a:r>
+            <a:endParaRPr lang="en-US" sz="1150" dirty="0"/>
+          </a:p>
+        </p:txBody>
+      </p:sp>
+      <p:sp>
+        <p:nvSpPr>
+          <p:cNvPr id="54" name="Text 51"/>
+          <p:cNvSpPr txBox="1"/>
+          <p:nvPr/>
+        </p:nvSpPr>
+        <p:spPr>
+          <a:xfrm>
+            <a:off x="9134856" y="2194560"/>
+            <a:ext cx="1463040" cy="548640"/>
+          </a:xfrm>
+          <a:prstGeom prst="rect">
+            <a:avLst/>
+          </a:prstGeom>
+          <a:noFill/>
+          <a:ln/>
+        </p:spPr>
+        <p:txBody>
+          <a:bodyPr wrap="square" lIns="0" tIns="0" rIns="0" bIns="0" rtlCol="0" anchor="ctr"/>
+          <a:lstStyle/>
+          <a:p>
+            <a:pPr algn="l" indent="0" marL="0">
+              <a:buNone/>
+            </a:pPr>
+            <a:r>
+              <a:rPr lang="en-US" sz="3200" b="1" dirty="0">
+                <a:solidFill>
+                  <a:srgbClr val="FFFFFF"/>
+                </a:solidFill>
+                <a:latin typeface="Arial" pitchFamily="34" charset="0"/>
+                <a:ea typeface="Arial" pitchFamily="34" charset="-122"/>
+                <a:cs typeface="Arial" pitchFamily="34" charset="-120"/>
+              </a:rPr>
+              <a:t>12</a:t>
+            </a:r>
+            <a:endParaRPr lang="en-US" sz="3200" dirty="0"/>
+          </a:p>
+        </p:txBody>
+      </p:sp>
+      <p:sp>
+        <p:nvSpPr>
+          <p:cNvPr id="55" name="Text 52"/>
+          <p:cNvSpPr txBox="1"/>
+          <p:nvPr/>
+        </p:nvSpPr>
+        <p:spPr>
+          <a:xfrm>
+            <a:off x="10003536" y="2304288"/>
+            <a:ext cx="1097280" cy="365760"/>
+          </a:xfrm>
+          <a:prstGeom prst="rect">
+            <a:avLst/>
+          </a:prstGeom>
+          <a:noFill/>
+          <a:ln/>
+        </p:spPr>
+        <p:txBody>
+          <a:bodyPr wrap="square" lIns="0" tIns="0" rIns="0" bIns="0" rtlCol="0" anchor="ctr"/>
+          <a:lstStyle/>
+          <a:p>
+            <a:pPr algn="l" indent="0" marL="0">
+              <a:buNone/>
+            </a:pPr>
+            <a:r>
+              <a:rPr lang="en-US" sz="1200" b="1" dirty="0">
                 <a:solidFill>
                   <a:srgbClr val="94AACC"/>
                 </a:solidFill>
@@ -5703,26 +7233,1859 @@
                 <a:ea typeface="Arial" pitchFamily="34" charset="-122"/>
                 <a:cs typeface="Arial" pitchFamily="34" charset="-120"/>
               </a:rPr>
-              <a:t>régimen actual vs tasa 2025 · 439 pacientes de diferencia</a:t>
-            </a:r>
-            <a:endParaRPr lang="en-US" sz="1250" dirty="0"/>
-          </a:p>
-        </p:txBody>
-      </p:sp>
-      <p:sp>
-        <p:nvSpPr>
-          <p:cNvPr id="21" name="Shape 18"/>
+              <a:t>min</a:t>
+            </a:r>
+            <a:endParaRPr lang="en-US" sz="1200" dirty="0"/>
+          </a:p>
+        </p:txBody>
+      </p:sp>
+      <p:sp>
+        <p:nvSpPr>
+          <p:cNvPr id="56" name="Text 53"/>
+          <p:cNvSpPr txBox="1"/>
+          <p:nvPr/>
+        </p:nvSpPr>
+        <p:spPr>
+          <a:xfrm>
+            <a:off x="9134856" y="2788920"/>
+            <a:ext cx="1600200" cy="274320"/>
+          </a:xfrm>
+          <a:prstGeom prst="rect">
+            <a:avLst/>
+          </a:prstGeom>
+          <a:noFill/>
+          <a:ln/>
+        </p:spPr>
+        <p:txBody>
+          <a:bodyPr wrap="square" lIns="0" tIns="0" rIns="0" bIns="0" rtlCol="0" anchor="ctr"/>
+          <a:lstStyle/>
+          <a:p>
+            <a:pPr algn="l" indent="0" marL="0">
+              <a:buNone/>
+            </a:pPr>
+            <a:r>
+              <a:rPr lang="en-US" sz="1100" dirty="0">
+                <a:solidFill>
+                  <a:srgbClr val="BCCDE8"/>
+                </a:solidFill>
+                <a:latin typeface="Arial" pitchFamily="34" charset="0"/>
+                <a:ea typeface="Arial" pitchFamily="34" charset="-122"/>
+                <a:cs typeface="Arial" pitchFamily="34" charset="-120"/>
+              </a:rPr>
+              <a:t>Vs. período anterior</a:t>
+            </a:r>
+            <a:endParaRPr lang="en-US" sz="1100" dirty="0"/>
+          </a:p>
+        </p:txBody>
+      </p:sp>
+      <p:sp>
+        <p:nvSpPr>
+          <p:cNvPr id="57" name="Shape 54"/>
           <p:cNvSpPr/>
           <p:nvPr/>
         </p:nvSpPr>
         <p:spPr>
           <a:xfrm>
-            <a:off x="548640" y="4206240"/>
-            <a:ext cx="11091672" cy="1463040"/>
+            <a:off x="10597896" y="2788920"/>
+            <a:ext cx="886968" cy="274320"/>
           </a:xfrm>
           <a:prstGeom prst="roundRect">
             <a:avLst>
-              <a:gd name="adj" fmla="val 5000"/>
+              <a:gd name="adj" fmla="val 26667"/>
+            </a:avLst>
+          </a:prstGeom>
+          <a:solidFill>
+            <a:srgbClr val="34D399">
+              <a:alpha val="18000"/>
+            </a:srgbClr>
+          </a:solidFill>
+          <a:ln w="9525">
+            <a:solidFill>
+              <a:srgbClr val="34D399"/>
+            </a:solidFill>
+            <a:prstDash val="solid"/>
+          </a:ln>
+        </p:spPr>
+      </p:sp>
+      <p:sp>
+        <p:nvSpPr>
+          <p:cNvPr id="58" name="Text 55"/>
+          <p:cNvSpPr txBox="1"/>
+          <p:nvPr/>
+        </p:nvSpPr>
+        <p:spPr>
+          <a:xfrm>
+            <a:off x="10597896" y="2788920"/>
+            <a:ext cx="886968" cy="274320"/>
+          </a:xfrm>
+          <a:prstGeom prst="rect">
+            <a:avLst/>
+          </a:prstGeom>
+          <a:noFill/>
+          <a:ln/>
+        </p:spPr>
+        <p:txBody>
+          <a:bodyPr wrap="square" lIns="0" tIns="0" rIns="0" bIns="0" rtlCol="0" anchor="ctr"/>
+          <a:lstStyle/>
+          <a:p>
+            <a:pPr algn="ctr" indent="0" marL="0">
+              <a:buNone/>
+            </a:pPr>
+            <a:r>
+              <a:rPr lang="en-US" sz="1150" b="1" dirty="0">
+                <a:solidFill>
+                  <a:srgbClr val="34D399"/>
+                </a:solidFill>
+                <a:latin typeface="Arial" pitchFamily="34" charset="0"/>
+                <a:ea typeface="Arial" pitchFamily="34" charset="-122"/>
+                <a:cs typeface="Arial" pitchFamily="34" charset="-120"/>
+              </a:rPr>
+              <a:t>▼ 53,2 %</a:t>
+            </a:r>
+            <a:endParaRPr lang="en-US" sz="1150" dirty="0"/>
+          </a:p>
+        </p:txBody>
+      </p:sp>
+      <p:sp>
+        <p:nvSpPr>
+          <p:cNvPr id="59" name="Text 56"/>
+          <p:cNvSpPr txBox="1"/>
+          <p:nvPr/>
+        </p:nvSpPr>
+        <p:spPr>
+          <a:xfrm>
+            <a:off x="9134856" y="3081528"/>
+            <a:ext cx="1600200" cy="274320"/>
+          </a:xfrm>
+          <a:prstGeom prst="rect">
+            <a:avLst/>
+          </a:prstGeom>
+          <a:noFill/>
+          <a:ln/>
+        </p:spPr>
+        <p:txBody>
+          <a:bodyPr wrap="square" lIns="0" tIns="0" rIns="0" bIns="0" rtlCol="0" anchor="ctr"/>
+          <a:lstStyle/>
+          <a:p>
+            <a:pPr algn="l" indent="0" marL="0">
+              <a:buNone/>
+            </a:pPr>
+            <a:r>
+              <a:rPr lang="en-US" sz="1100" dirty="0">
+                <a:solidFill>
+                  <a:srgbClr val="BCCDE8"/>
+                </a:solidFill>
+                <a:latin typeface="Arial" pitchFamily="34" charset="0"/>
+                <a:ea typeface="Arial" pitchFamily="34" charset="-122"/>
+                <a:cs typeface="Arial" pitchFamily="34" charset="-120"/>
+              </a:rPr>
+              <a:t>Proyección a 3 meses</a:t>
+            </a:r>
+            <a:endParaRPr lang="en-US" sz="1100" dirty="0"/>
+          </a:p>
+        </p:txBody>
+      </p:sp>
+      <p:sp>
+        <p:nvSpPr>
+          <p:cNvPr id="60" name="Shape 57"/>
+          <p:cNvSpPr/>
+          <p:nvPr/>
+        </p:nvSpPr>
+        <p:spPr>
+          <a:xfrm>
+            <a:off x="10597896" y="3081528"/>
+            <a:ext cx="886968" cy="274320"/>
+          </a:xfrm>
+          <a:prstGeom prst="roundRect">
+            <a:avLst>
+              <a:gd name="adj" fmla="val 26667"/>
+            </a:avLst>
+          </a:prstGeom>
+          <a:solidFill>
+            <a:srgbClr val="F26B6B">
+              <a:alpha val="18000"/>
+            </a:srgbClr>
+          </a:solidFill>
+          <a:ln w="9525">
+            <a:solidFill>
+              <a:srgbClr val="F26B6B"/>
+            </a:solidFill>
+            <a:prstDash val="solid"/>
+          </a:ln>
+        </p:spPr>
+      </p:sp>
+      <p:sp>
+        <p:nvSpPr>
+          <p:cNvPr id="61" name="Text 58"/>
+          <p:cNvSpPr txBox="1"/>
+          <p:nvPr/>
+        </p:nvSpPr>
+        <p:spPr>
+          <a:xfrm>
+            <a:off x="10597896" y="3081528"/>
+            <a:ext cx="886968" cy="274320"/>
+          </a:xfrm>
+          <a:prstGeom prst="rect">
+            <a:avLst/>
+          </a:prstGeom>
+          <a:noFill/>
+          <a:ln/>
+        </p:spPr>
+        <p:txBody>
+          <a:bodyPr wrap="square" lIns="0" tIns="0" rIns="0" bIns="0" rtlCol="0" anchor="ctr"/>
+          <a:lstStyle/>
+          <a:p>
+            <a:pPr algn="ctr" indent="0" marL="0">
+              <a:buNone/>
+            </a:pPr>
+            <a:r>
+              <a:rPr lang="en-US" sz="1150" b="1" dirty="0">
+                <a:solidFill>
+                  <a:srgbClr val="F26B6B"/>
+                </a:solidFill>
+                <a:latin typeface="Arial" pitchFamily="34" charset="0"/>
+                <a:ea typeface="Arial" pitchFamily="34" charset="-122"/>
+                <a:cs typeface="Arial" pitchFamily="34" charset="-120"/>
+              </a:rPr>
+              <a:t>▲ 1,7 %</a:t>
+            </a:r>
+            <a:endParaRPr lang="en-US" sz="1150" dirty="0"/>
+          </a:p>
+        </p:txBody>
+      </p:sp>
+      <p:sp>
+        <p:nvSpPr>
+          <p:cNvPr id="62" name="Text 59"/>
+          <p:cNvSpPr txBox="1"/>
+          <p:nvPr/>
+        </p:nvSpPr>
+        <p:spPr>
+          <a:xfrm>
+            <a:off x="9134856" y="3374136"/>
+            <a:ext cx="1600200" cy="274320"/>
+          </a:xfrm>
+          <a:prstGeom prst="rect">
+            <a:avLst/>
+          </a:prstGeom>
+          <a:noFill/>
+          <a:ln/>
+        </p:spPr>
+        <p:txBody>
+          <a:bodyPr wrap="square" lIns="0" tIns="0" rIns="0" bIns="0" rtlCol="0" anchor="ctr"/>
+          <a:lstStyle/>
+          <a:p>
+            <a:pPr algn="l" indent="0" marL="0">
+              <a:buNone/>
+            </a:pPr>
+            <a:r>
+              <a:rPr lang="en-US" sz="1100" dirty="0">
+                <a:solidFill>
+                  <a:srgbClr val="BCCDE8"/>
+                </a:solidFill>
+                <a:latin typeface="Arial" pitchFamily="34" charset="0"/>
+                <a:ea typeface="Arial" pitchFamily="34" charset="-122"/>
+                <a:cs typeface="Arial" pitchFamily="34" charset="-120"/>
+              </a:rPr>
+              <a:t>Meta 30 min</a:t>
+            </a:r>
+            <a:endParaRPr lang="en-US" sz="1100" dirty="0"/>
+          </a:p>
+        </p:txBody>
+      </p:sp>
+      <p:sp>
+        <p:nvSpPr>
+          <p:cNvPr id="63" name="Shape 60"/>
+          <p:cNvSpPr/>
+          <p:nvPr/>
+        </p:nvSpPr>
+        <p:spPr>
+          <a:xfrm>
+            <a:off x="10597896" y="3374136"/>
+            <a:ext cx="886968" cy="274320"/>
+          </a:xfrm>
+          <a:prstGeom prst="roundRect">
+            <a:avLst>
+              <a:gd name="adj" fmla="val 26667"/>
+            </a:avLst>
+          </a:prstGeom>
+          <a:solidFill>
+            <a:srgbClr val="34D399">
+              <a:alpha val="18000"/>
+            </a:srgbClr>
+          </a:solidFill>
+          <a:ln w="9525">
+            <a:solidFill>
+              <a:srgbClr val="34D399"/>
+            </a:solidFill>
+            <a:prstDash val="solid"/>
+          </a:ln>
+        </p:spPr>
+      </p:sp>
+      <p:sp>
+        <p:nvSpPr>
+          <p:cNvPr id="64" name="Text 61"/>
+          <p:cNvSpPr txBox="1"/>
+          <p:nvPr/>
+        </p:nvSpPr>
+        <p:spPr>
+          <a:xfrm>
+            <a:off x="10597896" y="3374136"/>
+            <a:ext cx="886968" cy="274320"/>
+          </a:xfrm>
+          <a:prstGeom prst="rect">
+            <a:avLst/>
+          </a:prstGeom>
+          <a:noFill/>
+          <a:ln/>
+        </p:spPr>
+        <p:txBody>
+          <a:bodyPr wrap="square" lIns="0" tIns="0" rIns="0" bIns="0" rtlCol="0" anchor="ctr"/>
+          <a:lstStyle/>
+          <a:p>
+            <a:pPr algn="ctr" indent="0" marL="0">
+              <a:buNone/>
+            </a:pPr>
+            <a:r>
+              <a:rPr lang="en-US" sz="1150" b="1" dirty="0">
+                <a:solidFill>
+                  <a:srgbClr val="34D399"/>
+                </a:solidFill>
+                <a:latin typeface="Arial" pitchFamily="34" charset="0"/>
+                <a:ea typeface="Arial" pitchFamily="34" charset="-122"/>
+                <a:cs typeface="Arial" pitchFamily="34" charset="-120"/>
+              </a:rPr>
+              <a:t>✓ OK</a:t>
+            </a:r>
+            <a:endParaRPr lang="en-US" sz="1150" dirty="0"/>
+          </a:p>
+        </p:txBody>
+      </p:sp>
+      <p:sp>
+        <p:nvSpPr>
+          <p:cNvPr id="65" name="Shape 62"/>
+          <p:cNvSpPr/>
+          <p:nvPr/>
+        </p:nvSpPr>
+        <p:spPr>
+          <a:xfrm>
+            <a:off x="548640" y="3822192"/>
+            <a:ext cx="2679192" cy="1938528"/>
+          </a:xfrm>
+          <a:prstGeom prst="roundRect">
+            <a:avLst>
+              <a:gd name="adj" fmla="val 3774"/>
+            </a:avLst>
+          </a:prstGeom>
+          <a:solidFill>
+            <a:srgbClr val="0F1930"/>
+          </a:solidFill>
+          <a:ln w="9525">
+            <a:solidFill>
+              <a:srgbClr val="22304A"/>
+            </a:solidFill>
+            <a:prstDash val="solid"/>
+          </a:ln>
+        </p:spPr>
+      </p:sp>
+      <p:sp>
+        <p:nvSpPr>
+          <p:cNvPr id="66" name="Text 63"/>
+          <p:cNvSpPr txBox="1"/>
+          <p:nvPr/>
+        </p:nvSpPr>
+        <p:spPr>
+          <a:xfrm>
+            <a:off x="713232" y="3931920"/>
+            <a:ext cx="320040" cy="329184"/>
+          </a:xfrm>
+          <a:prstGeom prst="rect">
+            <a:avLst/>
+          </a:prstGeom>
+          <a:noFill/>
+          <a:ln/>
+        </p:spPr>
+        <p:txBody>
+          <a:bodyPr wrap="square" lIns="0" tIns="0" rIns="0" bIns="0" rtlCol="0" anchor="ctr"/>
+          <a:lstStyle/>
+          <a:p>
+            <a:pPr algn="l" indent="0" marL="0">
+              <a:buNone/>
+            </a:pPr>
+            <a:r>
+              <a:rPr lang="en-US" sz="1600" dirty="0">
+                <a:solidFill>
+                  <a:srgbClr val="5EEAD4"/>
+                </a:solidFill>
+                <a:latin typeface="Arial" pitchFamily="34" charset="0"/>
+                <a:ea typeface="Arial" pitchFamily="34" charset="-122"/>
+                <a:cs typeface="Arial" pitchFamily="34" charset="-120"/>
+              </a:rPr>
+              <a:t>↻</a:t>
+            </a:r>
+            <a:endParaRPr lang="en-US" sz="1600" dirty="0"/>
+          </a:p>
+        </p:txBody>
+      </p:sp>
+      <p:sp>
+        <p:nvSpPr>
+          <p:cNvPr id="67" name="Text 64"/>
+          <p:cNvSpPr txBox="1"/>
+          <p:nvPr/>
+        </p:nvSpPr>
+        <p:spPr>
+          <a:xfrm>
+            <a:off x="1024128" y="3913632"/>
+            <a:ext cx="2084832" cy="365760"/>
+          </a:xfrm>
+          <a:prstGeom prst="rect">
+            <a:avLst/>
+          </a:prstGeom>
+          <a:noFill/>
+          <a:ln/>
+        </p:spPr>
+        <p:txBody>
+          <a:bodyPr wrap="square" lIns="0" tIns="0" rIns="0" bIns="0" rtlCol="0" anchor="ctr"/>
+          <a:lstStyle/>
+          <a:p>
+            <a:pPr algn="l" indent="0" marL="0">
+              <a:buNone/>
+            </a:pPr>
+            <a:r>
+              <a:rPr lang="en-US" sz="1150" b="1" dirty="0">
+                <a:solidFill>
+                  <a:srgbClr val="EAF1FB"/>
+                </a:solidFill>
+                <a:latin typeface="Arial" pitchFamily="34" charset="0"/>
+                <a:ea typeface="Arial" pitchFamily="34" charset="-122"/>
+                <a:cs typeface="Arial" pitchFamily="34" charset="-120"/>
+              </a:rPr>
+              <a:t>Tiempo de recambio (promedio)</a:t>
+            </a:r>
+            <a:endParaRPr lang="en-US" sz="1150" dirty="0"/>
+          </a:p>
+        </p:txBody>
+      </p:sp>
+      <p:sp>
+        <p:nvSpPr>
+          <p:cNvPr id="68" name="Text 65"/>
+          <p:cNvSpPr txBox="1"/>
+          <p:nvPr/>
+        </p:nvSpPr>
+        <p:spPr>
+          <a:xfrm>
+            <a:off x="713232" y="4279392"/>
+            <a:ext cx="1463040" cy="548640"/>
+          </a:xfrm>
+          <a:prstGeom prst="rect">
+            <a:avLst/>
+          </a:prstGeom>
+          <a:noFill/>
+          <a:ln/>
+        </p:spPr>
+        <p:txBody>
+          <a:bodyPr wrap="square" lIns="0" tIns="0" rIns="0" bIns="0" rtlCol="0" anchor="ctr"/>
+          <a:lstStyle/>
+          <a:p>
+            <a:pPr algn="l" indent="0" marL="0">
+              <a:buNone/>
+            </a:pPr>
+            <a:r>
+              <a:rPr lang="en-US" sz="3200" b="1" dirty="0">
+                <a:solidFill>
+                  <a:srgbClr val="FFFFFF"/>
+                </a:solidFill>
+                <a:latin typeface="Arial" pitchFamily="34" charset="0"/>
+                <a:ea typeface="Arial" pitchFamily="34" charset="-122"/>
+                <a:cs typeface="Arial" pitchFamily="34" charset="-120"/>
+              </a:rPr>
+              <a:t>14</a:t>
+            </a:r>
+            <a:endParaRPr lang="en-US" sz="3200" dirty="0"/>
+          </a:p>
+        </p:txBody>
+      </p:sp>
+      <p:sp>
+        <p:nvSpPr>
+          <p:cNvPr id="69" name="Text 66"/>
+          <p:cNvSpPr txBox="1"/>
+          <p:nvPr/>
+        </p:nvSpPr>
+        <p:spPr>
+          <a:xfrm>
+            <a:off x="1581912" y="4389120"/>
+            <a:ext cx="1097280" cy="365760"/>
+          </a:xfrm>
+          <a:prstGeom prst="rect">
+            <a:avLst/>
+          </a:prstGeom>
+          <a:noFill/>
+          <a:ln/>
+        </p:spPr>
+        <p:txBody>
+          <a:bodyPr wrap="square" lIns="0" tIns="0" rIns="0" bIns="0" rtlCol="0" anchor="ctr"/>
+          <a:lstStyle/>
+          <a:p>
+            <a:pPr algn="l" indent="0" marL="0">
+              <a:buNone/>
+            </a:pPr>
+            <a:r>
+              <a:rPr lang="en-US" sz="1200" b="1" dirty="0">
+                <a:solidFill>
+                  <a:srgbClr val="94AACC"/>
+                </a:solidFill>
+                <a:latin typeface="Arial" pitchFamily="34" charset="0"/>
+                <a:ea typeface="Arial" pitchFamily="34" charset="-122"/>
+                <a:cs typeface="Arial" pitchFamily="34" charset="-120"/>
+              </a:rPr>
+              <a:t>min</a:t>
+            </a:r>
+            <a:endParaRPr lang="en-US" sz="1200" dirty="0"/>
+          </a:p>
+        </p:txBody>
+      </p:sp>
+      <p:sp>
+        <p:nvSpPr>
+          <p:cNvPr id="70" name="Text 67"/>
+          <p:cNvSpPr txBox="1"/>
+          <p:nvPr/>
+        </p:nvSpPr>
+        <p:spPr>
+          <a:xfrm>
+            <a:off x="713232" y="4873752"/>
+            <a:ext cx="1600200" cy="274320"/>
+          </a:xfrm>
+          <a:prstGeom prst="rect">
+            <a:avLst/>
+          </a:prstGeom>
+          <a:noFill/>
+          <a:ln/>
+        </p:spPr>
+        <p:txBody>
+          <a:bodyPr wrap="square" lIns="0" tIns="0" rIns="0" bIns="0" rtlCol="0" anchor="ctr"/>
+          <a:lstStyle/>
+          <a:p>
+            <a:pPr algn="l" indent="0" marL="0">
+              <a:buNone/>
+            </a:pPr>
+            <a:r>
+              <a:rPr lang="en-US" sz="1100" dirty="0">
+                <a:solidFill>
+                  <a:srgbClr val="BCCDE8"/>
+                </a:solidFill>
+                <a:latin typeface="Arial" pitchFamily="34" charset="0"/>
+                <a:ea typeface="Arial" pitchFamily="34" charset="-122"/>
+                <a:cs typeface="Arial" pitchFamily="34" charset="-120"/>
+              </a:rPr>
+              <a:t>Vs. período anterior</a:t>
+            </a:r>
+            <a:endParaRPr lang="en-US" sz="1100" dirty="0"/>
+          </a:p>
+        </p:txBody>
+      </p:sp>
+      <p:sp>
+        <p:nvSpPr>
+          <p:cNvPr id="71" name="Shape 68"/>
+          <p:cNvSpPr/>
+          <p:nvPr/>
+        </p:nvSpPr>
+        <p:spPr>
+          <a:xfrm>
+            <a:off x="2176272" y="4873752"/>
+            <a:ext cx="886968" cy="274320"/>
+          </a:xfrm>
+          <a:prstGeom prst="roundRect">
+            <a:avLst>
+              <a:gd name="adj" fmla="val 26667"/>
+            </a:avLst>
+          </a:prstGeom>
+          <a:solidFill>
+            <a:srgbClr val="34D399">
+              <a:alpha val="18000"/>
+            </a:srgbClr>
+          </a:solidFill>
+          <a:ln w="9525">
+            <a:solidFill>
+              <a:srgbClr val="34D399"/>
+            </a:solidFill>
+            <a:prstDash val="solid"/>
+          </a:ln>
+        </p:spPr>
+      </p:sp>
+      <p:sp>
+        <p:nvSpPr>
+          <p:cNvPr id="72" name="Text 69"/>
+          <p:cNvSpPr txBox="1"/>
+          <p:nvPr/>
+        </p:nvSpPr>
+        <p:spPr>
+          <a:xfrm>
+            <a:off x="2176272" y="4873752"/>
+            <a:ext cx="886968" cy="274320"/>
+          </a:xfrm>
+          <a:prstGeom prst="rect">
+            <a:avLst/>
+          </a:prstGeom>
+          <a:noFill/>
+          <a:ln/>
+        </p:spPr>
+        <p:txBody>
+          <a:bodyPr wrap="square" lIns="0" tIns="0" rIns="0" bIns="0" rtlCol="0" anchor="ctr"/>
+          <a:lstStyle/>
+          <a:p>
+            <a:pPr algn="ctr" indent="0" marL="0">
+              <a:buNone/>
+            </a:pPr>
+            <a:r>
+              <a:rPr lang="en-US" sz="1150" b="1" dirty="0">
+                <a:solidFill>
+                  <a:srgbClr val="34D399"/>
+                </a:solidFill>
+                <a:latin typeface="Arial" pitchFamily="34" charset="0"/>
+                <a:ea typeface="Arial" pitchFamily="34" charset="-122"/>
+                <a:cs typeface="Arial" pitchFamily="34" charset="-120"/>
+              </a:rPr>
+              <a:t>▼ 58,8 %</a:t>
+            </a:r>
+            <a:endParaRPr lang="en-US" sz="1150" dirty="0"/>
+          </a:p>
+        </p:txBody>
+      </p:sp>
+      <p:sp>
+        <p:nvSpPr>
+          <p:cNvPr id="73" name="Text 70"/>
+          <p:cNvSpPr txBox="1"/>
+          <p:nvPr/>
+        </p:nvSpPr>
+        <p:spPr>
+          <a:xfrm>
+            <a:off x="713232" y="5166360"/>
+            <a:ext cx="1600200" cy="274320"/>
+          </a:xfrm>
+          <a:prstGeom prst="rect">
+            <a:avLst/>
+          </a:prstGeom>
+          <a:noFill/>
+          <a:ln/>
+        </p:spPr>
+        <p:txBody>
+          <a:bodyPr wrap="square" lIns="0" tIns="0" rIns="0" bIns="0" rtlCol="0" anchor="ctr"/>
+          <a:lstStyle/>
+          <a:p>
+            <a:pPr algn="l" indent="0" marL="0">
+              <a:buNone/>
+            </a:pPr>
+            <a:r>
+              <a:rPr lang="en-US" sz="1100" dirty="0">
+                <a:solidFill>
+                  <a:srgbClr val="BCCDE8"/>
+                </a:solidFill>
+                <a:latin typeface="Arial" pitchFamily="34" charset="0"/>
+                <a:ea typeface="Arial" pitchFamily="34" charset="-122"/>
+                <a:cs typeface="Arial" pitchFamily="34" charset="-120"/>
+              </a:rPr>
+              <a:t>Proyección a 3 meses</a:t>
+            </a:r>
+            <a:endParaRPr lang="en-US" sz="1100" dirty="0"/>
+          </a:p>
+        </p:txBody>
+      </p:sp>
+      <p:sp>
+        <p:nvSpPr>
+          <p:cNvPr id="74" name="Shape 71"/>
+          <p:cNvSpPr/>
+          <p:nvPr/>
+        </p:nvSpPr>
+        <p:spPr>
+          <a:xfrm>
+            <a:off x="2176272" y="5166360"/>
+            <a:ext cx="886968" cy="274320"/>
+          </a:xfrm>
+          <a:prstGeom prst="roundRect">
+            <a:avLst>
+              <a:gd name="adj" fmla="val 26667"/>
+            </a:avLst>
+          </a:prstGeom>
+          <a:solidFill>
+            <a:srgbClr val="F26B6B">
+              <a:alpha val="18000"/>
+            </a:srgbClr>
+          </a:solidFill>
+          <a:ln w="9525">
+            <a:solidFill>
+              <a:srgbClr val="F26B6B"/>
+            </a:solidFill>
+            <a:prstDash val="solid"/>
+          </a:ln>
+        </p:spPr>
+      </p:sp>
+      <p:sp>
+        <p:nvSpPr>
+          <p:cNvPr id="75" name="Text 72"/>
+          <p:cNvSpPr txBox="1"/>
+          <p:nvPr/>
+        </p:nvSpPr>
+        <p:spPr>
+          <a:xfrm>
+            <a:off x="2176272" y="5166360"/>
+            <a:ext cx="886968" cy="274320"/>
+          </a:xfrm>
+          <a:prstGeom prst="rect">
+            <a:avLst/>
+          </a:prstGeom>
+          <a:noFill/>
+          <a:ln/>
+        </p:spPr>
+        <p:txBody>
+          <a:bodyPr wrap="square" lIns="0" tIns="0" rIns="0" bIns="0" rtlCol="0" anchor="ctr"/>
+          <a:lstStyle/>
+          <a:p>
+            <a:pPr algn="ctr" indent="0" marL="0">
+              <a:buNone/>
+            </a:pPr>
+            <a:r>
+              <a:rPr lang="en-US" sz="1150" b="1" dirty="0">
+                <a:solidFill>
+                  <a:srgbClr val="F26B6B"/>
+                </a:solidFill>
+                <a:latin typeface="Arial" pitchFamily="34" charset="0"/>
+                <a:ea typeface="Arial" pitchFamily="34" charset="-122"/>
+                <a:cs typeface="Arial" pitchFamily="34" charset="-120"/>
+              </a:rPr>
+              <a:t>▲ 1,4 %</a:t>
+            </a:r>
+            <a:endParaRPr lang="en-US" sz="1150" dirty="0"/>
+          </a:p>
+        </p:txBody>
+      </p:sp>
+      <p:sp>
+        <p:nvSpPr>
+          <p:cNvPr id="76" name="Text 73"/>
+          <p:cNvSpPr txBox="1"/>
+          <p:nvPr/>
+        </p:nvSpPr>
+        <p:spPr>
+          <a:xfrm>
+            <a:off x="713232" y="5458968"/>
+            <a:ext cx="1600200" cy="274320"/>
+          </a:xfrm>
+          <a:prstGeom prst="rect">
+            <a:avLst/>
+          </a:prstGeom>
+          <a:noFill/>
+          <a:ln/>
+        </p:spPr>
+        <p:txBody>
+          <a:bodyPr wrap="square" lIns="0" tIns="0" rIns="0" bIns="0" rtlCol="0" anchor="ctr"/>
+          <a:lstStyle/>
+          <a:p>
+            <a:pPr algn="l" indent="0" marL="0">
+              <a:buNone/>
+            </a:pPr>
+            <a:r>
+              <a:rPr lang="en-US" sz="1100" dirty="0">
+                <a:solidFill>
+                  <a:srgbClr val="BCCDE8"/>
+                </a:solidFill>
+                <a:latin typeface="Arial" pitchFamily="34" charset="0"/>
+                <a:ea typeface="Arial" pitchFamily="34" charset="-122"/>
+                <a:cs typeface="Arial" pitchFamily="34" charset="-120"/>
+              </a:rPr>
+              <a:t>Meta 15 min</a:t>
+            </a:r>
+            <a:endParaRPr lang="en-US" sz="1100" dirty="0"/>
+          </a:p>
+        </p:txBody>
+      </p:sp>
+      <p:sp>
+        <p:nvSpPr>
+          <p:cNvPr id="77" name="Shape 74"/>
+          <p:cNvSpPr/>
+          <p:nvPr/>
+        </p:nvSpPr>
+        <p:spPr>
+          <a:xfrm>
+            <a:off x="2176272" y="5458968"/>
+            <a:ext cx="886968" cy="274320"/>
+          </a:xfrm>
+          <a:prstGeom prst="roundRect">
+            <a:avLst>
+              <a:gd name="adj" fmla="val 26667"/>
+            </a:avLst>
+          </a:prstGeom>
+          <a:solidFill>
+            <a:srgbClr val="34D399">
+              <a:alpha val="18000"/>
+            </a:srgbClr>
+          </a:solidFill>
+          <a:ln w="9525">
+            <a:solidFill>
+              <a:srgbClr val="34D399"/>
+            </a:solidFill>
+            <a:prstDash val="solid"/>
+          </a:ln>
+        </p:spPr>
+      </p:sp>
+      <p:sp>
+        <p:nvSpPr>
+          <p:cNvPr id="78" name="Text 75"/>
+          <p:cNvSpPr txBox="1"/>
+          <p:nvPr/>
+        </p:nvSpPr>
+        <p:spPr>
+          <a:xfrm>
+            <a:off x="2176272" y="5458968"/>
+            <a:ext cx="886968" cy="274320"/>
+          </a:xfrm>
+          <a:prstGeom prst="rect">
+            <a:avLst/>
+          </a:prstGeom>
+          <a:noFill/>
+          <a:ln/>
+        </p:spPr>
+        <p:txBody>
+          <a:bodyPr wrap="square" lIns="0" tIns="0" rIns="0" bIns="0" rtlCol="0" anchor="ctr"/>
+          <a:lstStyle/>
+          <a:p>
+            <a:pPr algn="ctr" indent="0" marL="0">
+              <a:buNone/>
+            </a:pPr>
+            <a:r>
+              <a:rPr lang="en-US" sz="1150" b="1" dirty="0">
+                <a:solidFill>
+                  <a:srgbClr val="34D399"/>
+                </a:solidFill>
+                <a:latin typeface="Arial" pitchFamily="34" charset="0"/>
+                <a:ea typeface="Arial" pitchFamily="34" charset="-122"/>
+                <a:cs typeface="Arial" pitchFamily="34" charset="-120"/>
+              </a:rPr>
+              <a:t>✓ OK</a:t>
+            </a:r>
+            <a:endParaRPr lang="en-US" sz="1150" dirty="0"/>
+          </a:p>
+        </p:txBody>
+      </p:sp>
+      <p:sp>
+        <p:nvSpPr>
+          <p:cNvPr id="79" name="Shape 76"/>
+          <p:cNvSpPr/>
+          <p:nvPr/>
+        </p:nvSpPr>
+        <p:spPr>
+          <a:xfrm>
+            <a:off x="3355848" y="3822192"/>
+            <a:ext cx="2679192" cy="1938528"/>
+          </a:xfrm>
+          <a:prstGeom prst="roundRect">
+            <a:avLst>
+              <a:gd name="adj" fmla="val 3774"/>
+            </a:avLst>
+          </a:prstGeom>
+          <a:solidFill>
+            <a:srgbClr val="0F1930"/>
+          </a:solidFill>
+          <a:ln w="9525">
+            <a:solidFill>
+              <a:srgbClr val="22304A"/>
+            </a:solidFill>
+            <a:prstDash val="solid"/>
+          </a:ln>
+        </p:spPr>
+      </p:sp>
+      <p:sp>
+        <p:nvSpPr>
+          <p:cNvPr id="80" name="Text 77"/>
+          <p:cNvSpPr txBox="1"/>
+          <p:nvPr/>
+        </p:nvSpPr>
+        <p:spPr>
+          <a:xfrm>
+            <a:off x="3520440" y="3931920"/>
+            <a:ext cx="320040" cy="329184"/>
+          </a:xfrm>
+          <a:prstGeom prst="rect">
+            <a:avLst/>
+          </a:prstGeom>
+          <a:noFill/>
+          <a:ln/>
+        </p:spPr>
+        <p:txBody>
+          <a:bodyPr wrap="square" lIns="0" tIns="0" rIns="0" bIns="0" rtlCol="0" anchor="ctr"/>
+          <a:lstStyle/>
+          <a:p>
+            <a:pPr algn="l" indent="0" marL="0">
+              <a:buNone/>
+            </a:pPr>
+            <a:r>
+              <a:rPr lang="en-US" sz="1600" dirty="0">
+                <a:solidFill>
+                  <a:srgbClr val="5EEAD4"/>
+                </a:solidFill>
+                <a:latin typeface="Arial" pitchFamily="34" charset="0"/>
+                <a:ea typeface="Arial" pitchFamily="34" charset="-122"/>
+                <a:cs typeface="Arial" pitchFamily="34" charset="-120"/>
+              </a:rPr>
+              <a:t>▦</a:t>
+            </a:r>
+            <a:endParaRPr lang="en-US" sz="1600" dirty="0"/>
+          </a:p>
+        </p:txBody>
+      </p:sp>
+      <p:sp>
+        <p:nvSpPr>
+          <p:cNvPr id="81" name="Text 78"/>
+          <p:cNvSpPr txBox="1"/>
+          <p:nvPr/>
+        </p:nvSpPr>
+        <p:spPr>
+          <a:xfrm>
+            <a:off x="3831336" y="3913632"/>
+            <a:ext cx="2084832" cy="365760"/>
+          </a:xfrm>
+          <a:prstGeom prst="rect">
+            <a:avLst/>
+          </a:prstGeom>
+          <a:noFill/>
+          <a:ln/>
+        </p:spPr>
+        <p:txBody>
+          <a:bodyPr wrap="square" lIns="0" tIns="0" rIns="0" bIns="0" rtlCol="0" anchor="ctr"/>
+          <a:lstStyle/>
+          <a:p>
+            <a:pPr algn="l" indent="0" marL="0">
+              <a:buNone/>
+            </a:pPr>
+            <a:r>
+              <a:rPr lang="en-US" sz="1150" b="1" dirty="0">
+                <a:solidFill>
+                  <a:srgbClr val="EAF1FB"/>
+                </a:solidFill>
+                <a:latin typeface="Arial" pitchFamily="34" charset="0"/>
+                <a:ea typeface="Arial" pitchFamily="34" charset="-122"/>
+                <a:cs typeface="Arial" pitchFamily="34" charset="-120"/>
+              </a:rPr>
+              <a:t>Subprogramación diaria</a:t>
+            </a:r>
+            <a:endParaRPr lang="en-US" sz="1150" dirty="0"/>
+          </a:p>
+        </p:txBody>
+      </p:sp>
+      <p:sp>
+        <p:nvSpPr>
+          <p:cNvPr id="82" name="Text 79"/>
+          <p:cNvSpPr txBox="1"/>
+          <p:nvPr/>
+        </p:nvSpPr>
+        <p:spPr>
+          <a:xfrm>
+            <a:off x="3520440" y="4279392"/>
+            <a:ext cx="1463040" cy="548640"/>
+          </a:xfrm>
+          <a:prstGeom prst="rect">
+            <a:avLst/>
+          </a:prstGeom>
+          <a:noFill/>
+          <a:ln/>
+        </p:spPr>
+        <p:txBody>
+          <a:bodyPr wrap="square" lIns="0" tIns="0" rIns="0" bIns="0" rtlCol="0" anchor="ctr"/>
+          <a:lstStyle/>
+          <a:p>
+            <a:pPr algn="l" indent="0" marL="0">
+              <a:buNone/>
+            </a:pPr>
+            <a:r>
+              <a:rPr lang="en-US" sz="3200" b="1" dirty="0">
+                <a:solidFill>
+                  <a:srgbClr val="FFFFFF"/>
+                </a:solidFill>
+                <a:latin typeface="Arial" pitchFamily="34" charset="0"/>
+                <a:ea typeface="Arial" pitchFamily="34" charset="-122"/>
+                <a:cs typeface="Arial" pitchFamily="34" charset="-120"/>
+              </a:rPr>
+              <a:t>0,3</a:t>
+            </a:r>
+            <a:endParaRPr lang="en-US" sz="3200" dirty="0"/>
+          </a:p>
+        </p:txBody>
+      </p:sp>
+      <p:sp>
+        <p:nvSpPr>
+          <p:cNvPr id="83" name="Text 80"/>
+          <p:cNvSpPr txBox="1"/>
+          <p:nvPr/>
+        </p:nvSpPr>
+        <p:spPr>
+          <a:xfrm>
+            <a:off x="4389120" y="4389120"/>
+            <a:ext cx="1097280" cy="365760"/>
+          </a:xfrm>
+          <a:prstGeom prst="rect">
+            <a:avLst/>
+          </a:prstGeom>
+          <a:noFill/>
+          <a:ln/>
+        </p:spPr>
+        <p:txBody>
+          <a:bodyPr wrap="square" lIns="0" tIns="0" rIns="0" bIns="0" rtlCol="0" anchor="ctr"/>
+          <a:lstStyle/>
+          <a:p>
+            <a:pPr algn="l" indent="0" marL="0">
+              <a:buNone/>
+            </a:pPr>
+            <a:r>
+              <a:rPr lang="en-US" sz="1200" b="1" dirty="0">
+                <a:solidFill>
+                  <a:srgbClr val="94AACC"/>
+                </a:solidFill>
+                <a:latin typeface="Arial" pitchFamily="34" charset="0"/>
+                <a:ea typeface="Arial" pitchFamily="34" charset="-122"/>
+                <a:cs typeface="Arial" pitchFamily="34" charset="-120"/>
+              </a:rPr>
+              <a:t>hrs</a:t>
+            </a:r>
+            <a:endParaRPr lang="en-US" sz="1200" dirty="0"/>
+          </a:p>
+        </p:txBody>
+      </p:sp>
+      <p:sp>
+        <p:nvSpPr>
+          <p:cNvPr id="84" name="Text 81"/>
+          <p:cNvSpPr txBox="1"/>
+          <p:nvPr/>
+        </p:nvSpPr>
+        <p:spPr>
+          <a:xfrm>
+            <a:off x="3520440" y="4873752"/>
+            <a:ext cx="1600200" cy="274320"/>
+          </a:xfrm>
+          <a:prstGeom prst="rect">
+            <a:avLst/>
+          </a:prstGeom>
+          <a:noFill/>
+          <a:ln/>
+        </p:spPr>
+        <p:txBody>
+          <a:bodyPr wrap="square" lIns="0" tIns="0" rIns="0" bIns="0" rtlCol="0" anchor="ctr"/>
+          <a:lstStyle/>
+          <a:p>
+            <a:pPr algn="l" indent="0" marL="0">
+              <a:buNone/>
+            </a:pPr>
+            <a:r>
+              <a:rPr lang="en-US" sz="1100" dirty="0">
+                <a:solidFill>
+                  <a:srgbClr val="BCCDE8"/>
+                </a:solidFill>
+                <a:latin typeface="Arial" pitchFamily="34" charset="0"/>
+                <a:ea typeface="Arial" pitchFamily="34" charset="-122"/>
+                <a:cs typeface="Arial" pitchFamily="34" charset="-120"/>
+              </a:rPr>
+              <a:t>Vs. período anterior</a:t>
+            </a:r>
+            <a:endParaRPr lang="en-US" sz="1100" dirty="0"/>
+          </a:p>
+        </p:txBody>
+      </p:sp>
+      <p:sp>
+        <p:nvSpPr>
+          <p:cNvPr id="85" name="Shape 82"/>
+          <p:cNvSpPr/>
+          <p:nvPr/>
+        </p:nvSpPr>
+        <p:spPr>
+          <a:xfrm>
+            <a:off x="4983480" y="4873752"/>
+            <a:ext cx="886968" cy="274320"/>
+          </a:xfrm>
+          <a:prstGeom prst="roundRect">
+            <a:avLst>
+              <a:gd name="adj" fmla="val 26667"/>
+            </a:avLst>
+          </a:prstGeom>
+          <a:solidFill>
+            <a:srgbClr val="34D399">
+              <a:alpha val="18000"/>
+            </a:srgbClr>
+          </a:solidFill>
+          <a:ln w="9525">
+            <a:solidFill>
+              <a:srgbClr val="34D399"/>
+            </a:solidFill>
+            <a:prstDash val="solid"/>
+          </a:ln>
+        </p:spPr>
+      </p:sp>
+      <p:sp>
+        <p:nvSpPr>
+          <p:cNvPr id="86" name="Text 83"/>
+          <p:cNvSpPr txBox="1"/>
+          <p:nvPr/>
+        </p:nvSpPr>
+        <p:spPr>
+          <a:xfrm>
+            <a:off x="4983480" y="4873752"/>
+            <a:ext cx="886968" cy="274320"/>
+          </a:xfrm>
+          <a:prstGeom prst="rect">
+            <a:avLst/>
+          </a:prstGeom>
+          <a:noFill/>
+          <a:ln/>
+        </p:spPr>
+        <p:txBody>
+          <a:bodyPr wrap="square" lIns="0" tIns="0" rIns="0" bIns="0" rtlCol="0" anchor="ctr"/>
+          <a:lstStyle/>
+          <a:p>
+            <a:pPr algn="ctr" indent="0" marL="0">
+              <a:buNone/>
+            </a:pPr>
+            <a:r>
+              <a:rPr lang="en-US" sz="1150" b="1" dirty="0">
+                <a:solidFill>
+                  <a:srgbClr val="34D399"/>
+                </a:solidFill>
+                <a:latin typeface="Arial" pitchFamily="34" charset="0"/>
+                <a:ea typeface="Arial" pitchFamily="34" charset="-122"/>
+                <a:cs typeface="Arial" pitchFamily="34" charset="-120"/>
+              </a:rPr>
+              <a:t>▼ 40,0 %</a:t>
+            </a:r>
+            <a:endParaRPr lang="en-US" sz="1150" dirty="0"/>
+          </a:p>
+        </p:txBody>
+      </p:sp>
+      <p:sp>
+        <p:nvSpPr>
+          <p:cNvPr id="87" name="Text 84"/>
+          <p:cNvSpPr txBox="1"/>
+          <p:nvPr/>
+        </p:nvSpPr>
+        <p:spPr>
+          <a:xfrm>
+            <a:off x="3520440" y="5166360"/>
+            <a:ext cx="1600200" cy="274320"/>
+          </a:xfrm>
+          <a:prstGeom prst="rect">
+            <a:avLst/>
+          </a:prstGeom>
+          <a:noFill/>
+          <a:ln/>
+        </p:spPr>
+        <p:txBody>
+          <a:bodyPr wrap="square" lIns="0" tIns="0" rIns="0" bIns="0" rtlCol="0" anchor="ctr"/>
+          <a:lstStyle/>
+          <a:p>
+            <a:pPr algn="l" indent="0" marL="0">
+              <a:buNone/>
+            </a:pPr>
+            <a:r>
+              <a:rPr lang="en-US" sz="1100" dirty="0">
+                <a:solidFill>
+                  <a:srgbClr val="BCCDE8"/>
+                </a:solidFill>
+                <a:latin typeface="Arial" pitchFamily="34" charset="0"/>
+                <a:ea typeface="Arial" pitchFamily="34" charset="-122"/>
+                <a:cs typeface="Arial" pitchFamily="34" charset="-120"/>
+              </a:rPr>
+              <a:t>Proyección a 3 meses</a:t>
+            </a:r>
+            <a:endParaRPr lang="en-US" sz="1100" dirty="0"/>
+          </a:p>
+        </p:txBody>
+      </p:sp>
+      <p:sp>
+        <p:nvSpPr>
+          <p:cNvPr id="88" name="Shape 85"/>
+          <p:cNvSpPr/>
+          <p:nvPr/>
+        </p:nvSpPr>
+        <p:spPr>
+          <a:xfrm>
+            <a:off x="4983480" y="5166360"/>
+            <a:ext cx="886968" cy="274320"/>
+          </a:xfrm>
+          <a:prstGeom prst="roundRect">
+            <a:avLst>
+              <a:gd name="adj" fmla="val 26667"/>
+            </a:avLst>
+          </a:prstGeom>
+          <a:solidFill>
+            <a:srgbClr val="94AACC">
+              <a:alpha val="18000"/>
+            </a:srgbClr>
+          </a:solidFill>
+          <a:ln w="9525">
+            <a:solidFill>
+              <a:srgbClr val="94AACC"/>
+            </a:solidFill>
+            <a:prstDash val="solid"/>
+          </a:ln>
+        </p:spPr>
+      </p:sp>
+      <p:sp>
+        <p:nvSpPr>
+          <p:cNvPr id="89" name="Text 86"/>
+          <p:cNvSpPr txBox="1"/>
+          <p:nvPr/>
+        </p:nvSpPr>
+        <p:spPr>
+          <a:xfrm>
+            <a:off x="4983480" y="5166360"/>
+            <a:ext cx="886968" cy="274320"/>
+          </a:xfrm>
+          <a:prstGeom prst="rect">
+            <a:avLst/>
+          </a:prstGeom>
+          <a:noFill/>
+          <a:ln/>
+        </p:spPr>
+        <p:txBody>
+          <a:bodyPr wrap="square" lIns="0" tIns="0" rIns="0" bIns="0" rtlCol="0" anchor="ctr"/>
+          <a:lstStyle/>
+          <a:p>
+            <a:pPr algn="ctr" indent="0" marL="0">
+              <a:buNone/>
+            </a:pPr>
+            <a:r>
+              <a:rPr lang="en-US" sz="1150" b="1" dirty="0">
+                <a:solidFill>
+                  <a:srgbClr val="94AACC"/>
+                </a:solidFill>
+                <a:latin typeface="Arial" pitchFamily="34" charset="0"/>
+                <a:ea typeface="Arial" pitchFamily="34" charset="-122"/>
+                <a:cs typeface="Arial" pitchFamily="34" charset="-120"/>
+              </a:rPr>
+              <a:t>= 0,0 %</a:t>
+            </a:r>
+            <a:endParaRPr lang="en-US" sz="1150" dirty="0"/>
+          </a:p>
+        </p:txBody>
+      </p:sp>
+      <p:sp>
+        <p:nvSpPr>
+          <p:cNvPr id="90" name="Text 87"/>
+          <p:cNvSpPr txBox="1"/>
+          <p:nvPr/>
+        </p:nvSpPr>
+        <p:spPr>
+          <a:xfrm>
+            <a:off x="3520440" y="5458968"/>
+            <a:ext cx="1600200" cy="274320"/>
+          </a:xfrm>
+          <a:prstGeom prst="rect">
+            <a:avLst/>
+          </a:prstGeom>
+          <a:noFill/>
+          <a:ln/>
+        </p:spPr>
+        <p:txBody>
+          <a:bodyPr wrap="square" lIns="0" tIns="0" rIns="0" bIns="0" rtlCol="0" anchor="ctr"/>
+          <a:lstStyle/>
+          <a:p>
+            <a:pPr algn="l" indent="0" marL="0">
+              <a:buNone/>
+            </a:pPr>
+            <a:r>
+              <a:rPr lang="en-US" sz="1100" dirty="0">
+                <a:solidFill>
+                  <a:srgbClr val="BCCDE8"/>
+                </a:solidFill>
+                <a:latin typeface="Arial" pitchFamily="34" charset="0"/>
+                <a:ea typeface="Arial" pitchFamily="34" charset="-122"/>
+                <a:cs typeface="Arial" pitchFamily="34" charset="-120"/>
+              </a:rPr>
+              <a:t>Meta 0,5 hrs</a:t>
+            </a:r>
+            <a:endParaRPr lang="en-US" sz="1100" dirty="0"/>
+          </a:p>
+        </p:txBody>
+      </p:sp>
+      <p:sp>
+        <p:nvSpPr>
+          <p:cNvPr id="91" name="Shape 88"/>
+          <p:cNvSpPr/>
+          <p:nvPr/>
+        </p:nvSpPr>
+        <p:spPr>
+          <a:xfrm>
+            <a:off x="4983480" y="5458968"/>
+            <a:ext cx="886968" cy="274320"/>
+          </a:xfrm>
+          <a:prstGeom prst="roundRect">
+            <a:avLst>
+              <a:gd name="adj" fmla="val 26667"/>
+            </a:avLst>
+          </a:prstGeom>
+          <a:solidFill>
+            <a:srgbClr val="34D399">
+              <a:alpha val="18000"/>
+            </a:srgbClr>
+          </a:solidFill>
+          <a:ln w="9525">
+            <a:solidFill>
+              <a:srgbClr val="34D399"/>
+            </a:solidFill>
+            <a:prstDash val="solid"/>
+          </a:ln>
+        </p:spPr>
+      </p:sp>
+      <p:sp>
+        <p:nvSpPr>
+          <p:cNvPr id="92" name="Text 89"/>
+          <p:cNvSpPr txBox="1"/>
+          <p:nvPr/>
+        </p:nvSpPr>
+        <p:spPr>
+          <a:xfrm>
+            <a:off x="4983480" y="5458968"/>
+            <a:ext cx="886968" cy="274320"/>
+          </a:xfrm>
+          <a:prstGeom prst="rect">
+            <a:avLst/>
+          </a:prstGeom>
+          <a:noFill/>
+          <a:ln/>
+        </p:spPr>
+        <p:txBody>
+          <a:bodyPr wrap="square" lIns="0" tIns="0" rIns="0" bIns="0" rtlCol="0" anchor="ctr"/>
+          <a:lstStyle/>
+          <a:p>
+            <a:pPr algn="ctr" indent="0" marL="0">
+              <a:buNone/>
+            </a:pPr>
+            <a:r>
+              <a:rPr lang="en-US" sz="1150" b="1" dirty="0">
+                <a:solidFill>
+                  <a:srgbClr val="34D399"/>
+                </a:solidFill>
+                <a:latin typeface="Arial" pitchFamily="34" charset="0"/>
+                <a:ea typeface="Arial" pitchFamily="34" charset="-122"/>
+                <a:cs typeface="Arial" pitchFamily="34" charset="-120"/>
+              </a:rPr>
+              <a:t>✓ OK</a:t>
+            </a:r>
+            <a:endParaRPr lang="en-US" sz="1150" dirty="0"/>
+          </a:p>
+        </p:txBody>
+      </p:sp>
+      <p:sp>
+        <p:nvSpPr>
+          <p:cNvPr id="93" name="Shape 90"/>
+          <p:cNvSpPr/>
+          <p:nvPr/>
+        </p:nvSpPr>
+        <p:spPr>
+          <a:xfrm>
+            <a:off x="6163056" y="3822192"/>
+            <a:ext cx="2679192" cy="1938528"/>
+          </a:xfrm>
+          <a:prstGeom prst="roundRect">
+            <a:avLst>
+              <a:gd name="adj" fmla="val 3774"/>
+            </a:avLst>
+          </a:prstGeom>
+          <a:solidFill>
+            <a:srgbClr val="0F1930"/>
+          </a:solidFill>
+          <a:ln w="9525">
+            <a:solidFill>
+              <a:srgbClr val="22304A"/>
+            </a:solidFill>
+            <a:prstDash val="solid"/>
+          </a:ln>
+        </p:spPr>
+      </p:sp>
+      <p:sp>
+        <p:nvSpPr>
+          <p:cNvPr id="94" name="Text 91"/>
+          <p:cNvSpPr txBox="1"/>
+          <p:nvPr/>
+        </p:nvSpPr>
+        <p:spPr>
+          <a:xfrm>
+            <a:off x="6327648" y="3931920"/>
+            <a:ext cx="320040" cy="329184"/>
+          </a:xfrm>
+          <a:prstGeom prst="rect">
+            <a:avLst/>
+          </a:prstGeom>
+          <a:noFill/>
+          <a:ln/>
+        </p:spPr>
+        <p:txBody>
+          <a:bodyPr wrap="square" lIns="0" tIns="0" rIns="0" bIns="0" rtlCol="0" anchor="ctr"/>
+          <a:lstStyle/>
+          <a:p>
+            <a:pPr algn="l" indent="0" marL="0">
+              <a:buNone/>
+            </a:pPr>
+            <a:r>
+              <a:rPr lang="en-US" sz="1600" dirty="0">
+                <a:solidFill>
+                  <a:srgbClr val="5EEAD4"/>
+                </a:solidFill>
+                <a:latin typeface="Arial" pitchFamily="34" charset="0"/>
+                <a:ea typeface="Arial" pitchFamily="34" charset="-122"/>
+                <a:cs typeface="Arial" pitchFamily="34" charset="-120"/>
+              </a:rPr>
+              <a:t>☺</a:t>
+            </a:r>
+            <a:endParaRPr lang="en-US" sz="1600" dirty="0"/>
+          </a:p>
+        </p:txBody>
+      </p:sp>
+      <p:sp>
+        <p:nvSpPr>
+          <p:cNvPr id="95" name="Text 92"/>
+          <p:cNvSpPr txBox="1"/>
+          <p:nvPr/>
+        </p:nvSpPr>
+        <p:spPr>
+          <a:xfrm>
+            <a:off x="6638544" y="3913632"/>
+            <a:ext cx="2084832" cy="365760"/>
+          </a:xfrm>
+          <a:prstGeom prst="rect">
+            <a:avLst/>
+          </a:prstGeom>
+          <a:noFill/>
+          <a:ln/>
+        </p:spPr>
+        <p:txBody>
+          <a:bodyPr wrap="square" lIns="0" tIns="0" rIns="0" bIns="0" rtlCol="0" anchor="ctr"/>
+          <a:lstStyle/>
+          <a:p>
+            <a:pPr algn="l" indent="0" marL="0">
+              <a:buNone/>
+            </a:pPr>
+            <a:r>
+              <a:rPr lang="en-US" sz="1150" b="1" dirty="0">
+                <a:solidFill>
+                  <a:srgbClr val="EAF1FB"/>
+                </a:solidFill>
+                <a:latin typeface="Arial" pitchFamily="34" charset="0"/>
+                <a:ea typeface="Arial" pitchFamily="34" charset="-122"/>
+                <a:cs typeface="Arial" pitchFamily="34" charset="-120"/>
+              </a:rPr>
+              <a:t>Pacientes LE no GES</a:t>
+            </a:r>
+            <a:endParaRPr lang="en-US" sz="1150" dirty="0"/>
+          </a:p>
+        </p:txBody>
+      </p:sp>
+      <p:sp>
+        <p:nvSpPr>
+          <p:cNvPr id="96" name="Text 93"/>
+          <p:cNvSpPr txBox="1"/>
+          <p:nvPr/>
+        </p:nvSpPr>
+        <p:spPr>
+          <a:xfrm>
+            <a:off x="6327648" y="4279392"/>
+            <a:ext cx="1463040" cy="548640"/>
+          </a:xfrm>
+          <a:prstGeom prst="rect">
+            <a:avLst/>
+          </a:prstGeom>
+          <a:noFill/>
+          <a:ln/>
+        </p:spPr>
+        <p:txBody>
+          <a:bodyPr wrap="square" lIns="0" tIns="0" rIns="0" bIns="0" rtlCol="0" anchor="ctr"/>
+          <a:lstStyle/>
+          <a:p>
+            <a:pPr algn="l" indent="0" marL="0">
+              <a:buNone/>
+            </a:pPr>
+            <a:r>
+              <a:rPr lang="en-US" sz="3200" b="1" dirty="0">
+                <a:solidFill>
+                  <a:srgbClr val="FFFFFF"/>
+                </a:solidFill>
+                <a:latin typeface="Arial" pitchFamily="34" charset="0"/>
+                <a:ea typeface="Arial" pitchFamily="34" charset="-122"/>
+                <a:cs typeface="Arial" pitchFamily="34" charset="-120"/>
+              </a:rPr>
+              <a:t>42,3</a:t>
+            </a:r>
+            <a:endParaRPr lang="en-US" sz="3200" dirty="0"/>
+          </a:p>
+        </p:txBody>
+      </p:sp>
+      <p:sp>
+        <p:nvSpPr>
+          <p:cNvPr id="97" name="Text 94"/>
+          <p:cNvSpPr txBox="1"/>
+          <p:nvPr/>
+        </p:nvSpPr>
+        <p:spPr>
+          <a:xfrm>
+            <a:off x="7470648" y="4389120"/>
+            <a:ext cx="1097280" cy="365760"/>
+          </a:xfrm>
+          <a:prstGeom prst="rect">
+            <a:avLst/>
+          </a:prstGeom>
+          <a:noFill/>
+          <a:ln/>
+        </p:spPr>
+        <p:txBody>
+          <a:bodyPr wrap="square" lIns="0" tIns="0" rIns="0" bIns="0" rtlCol="0" anchor="ctr"/>
+          <a:lstStyle/>
+          <a:p>
+            <a:pPr algn="l" indent="0" marL="0">
+              <a:buNone/>
+            </a:pPr>
+            <a:r>
+              <a:rPr lang="en-US" sz="1200" b="1" dirty="0">
+                <a:solidFill>
+                  <a:srgbClr val="94AACC"/>
+                </a:solidFill>
+                <a:latin typeface="Arial" pitchFamily="34" charset="0"/>
+                <a:ea typeface="Arial" pitchFamily="34" charset="-122"/>
+                <a:cs typeface="Arial" pitchFamily="34" charset="-120"/>
+              </a:rPr>
+              <a:t>%</a:t>
+            </a:r>
+            <a:endParaRPr lang="en-US" sz="1200" dirty="0"/>
+          </a:p>
+        </p:txBody>
+      </p:sp>
+      <p:sp>
+        <p:nvSpPr>
+          <p:cNvPr id="98" name="Text 95"/>
+          <p:cNvSpPr txBox="1"/>
+          <p:nvPr/>
+        </p:nvSpPr>
+        <p:spPr>
+          <a:xfrm>
+            <a:off x="6327648" y="4873752"/>
+            <a:ext cx="1600200" cy="274320"/>
+          </a:xfrm>
+          <a:prstGeom prst="rect">
+            <a:avLst/>
+          </a:prstGeom>
+          <a:noFill/>
+          <a:ln/>
+        </p:spPr>
+        <p:txBody>
+          <a:bodyPr wrap="square" lIns="0" tIns="0" rIns="0" bIns="0" rtlCol="0" anchor="ctr"/>
+          <a:lstStyle/>
+          <a:p>
+            <a:pPr algn="l" indent="0" marL="0">
+              <a:buNone/>
+            </a:pPr>
+            <a:r>
+              <a:rPr lang="en-US" sz="1100" dirty="0">
+                <a:solidFill>
+                  <a:srgbClr val="BCCDE8"/>
+                </a:solidFill>
+                <a:latin typeface="Arial" pitchFamily="34" charset="0"/>
+                <a:ea typeface="Arial" pitchFamily="34" charset="-122"/>
+                <a:cs typeface="Arial" pitchFamily="34" charset="-120"/>
+              </a:rPr>
+              <a:t>Vs. período anterior</a:t>
+            </a:r>
+            <a:endParaRPr lang="en-US" sz="1100" dirty="0"/>
+          </a:p>
+        </p:txBody>
+      </p:sp>
+      <p:sp>
+        <p:nvSpPr>
+          <p:cNvPr id="99" name="Shape 96"/>
+          <p:cNvSpPr/>
+          <p:nvPr/>
+        </p:nvSpPr>
+        <p:spPr>
+          <a:xfrm>
+            <a:off x="7790688" y="4873752"/>
+            <a:ext cx="886968" cy="274320"/>
+          </a:xfrm>
+          <a:prstGeom prst="roundRect">
+            <a:avLst>
+              <a:gd name="adj" fmla="val 26667"/>
+            </a:avLst>
+          </a:prstGeom>
+          <a:solidFill>
+            <a:srgbClr val="34D399">
+              <a:alpha val="18000"/>
+            </a:srgbClr>
+          </a:solidFill>
+          <a:ln w="9525">
+            <a:solidFill>
+              <a:srgbClr val="34D399"/>
+            </a:solidFill>
+            <a:prstDash val="solid"/>
+          </a:ln>
+        </p:spPr>
+      </p:sp>
+      <p:sp>
+        <p:nvSpPr>
+          <p:cNvPr id="100" name="Text 97"/>
+          <p:cNvSpPr txBox="1"/>
+          <p:nvPr/>
+        </p:nvSpPr>
+        <p:spPr>
+          <a:xfrm>
+            <a:off x="7790688" y="4873752"/>
+            <a:ext cx="886968" cy="274320"/>
+          </a:xfrm>
+          <a:prstGeom prst="rect">
+            <a:avLst/>
+          </a:prstGeom>
+          <a:noFill/>
+          <a:ln/>
+        </p:spPr>
+        <p:txBody>
+          <a:bodyPr wrap="square" lIns="0" tIns="0" rIns="0" bIns="0" rtlCol="0" anchor="ctr"/>
+          <a:lstStyle/>
+          <a:p>
+            <a:pPr algn="ctr" indent="0" marL="0">
+              <a:buNone/>
+            </a:pPr>
+            <a:r>
+              <a:rPr lang="en-US" sz="1150" b="1" dirty="0">
+                <a:solidFill>
+                  <a:srgbClr val="34D399"/>
+                </a:solidFill>
+                <a:latin typeface="Arial" pitchFamily="34" charset="0"/>
+                <a:ea typeface="Arial" pitchFamily="34" charset="-122"/>
+                <a:cs typeface="Arial" pitchFamily="34" charset="-120"/>
+              </a:rPr>
+              <a:t>▼ 33,1 %</a:t>
+            </a:r>
+            <a:endParaRPr lang="en-US" sz="1150" dirty="0"/>
+          </a:p>
+        </p:txBody>
+      </p:sp>
+      <p:sp>
+        <p:nvSpPr>
+          <p:cNvPr id="101" name="Text 98"/>
+          <p:cNvSpPr txBox="1"/>
+          <p:nvPr/>
+        </p:nvSpPr>
+        <p:spPr>
+          <a:xfrm>
+            <a:off x="6327648" y="5166360"/>
+            <a:ext cx="1600200" cy="274320"/>
+          </a:xfrm>
+          <a:prstGeom prst="rect">
+            <a:avLst/>
+          </a:prstGeom>
+          <a:noFill/>
+          <a:ln/>
+        </p:spPr>
+        <p:txBody>
+          <a:bodyPr wrap="square" lIns="0" tIns="0" rIns="0" bIns="0" rtlCol="0" anchor="ctr"/>
+          <a:lstStyle/>
+          <a:p>
+            <a:pPr algn="l" indent="0" marL="0">
+              <a:buNone/>
+            </a:pPr>
+            <a:r>
+              <a:rPr lang="en-US" sz="1100" dirty="0">
+                <a:solidFill>
+                  <a:srgbClr val="BCCDE8"/>
+                </a:solidFill>
+                <a:latin typeface="Arial" pitchFamily="34" charset="0"/>
+                <a:ea typeface="Arial" pitchFamily="34" charset="-122"/>
+                <a:cs typeface="Arial" pitchFamily="34" charset="-120"/>
+              </a:rPr>
+              <a:t>Proyección a 3 meses</a:t>
+            </a:r>
+            <a:endParaRPr lang="en-US" sz="1100" dirty="0"/>
+          </a:p>
+        </p:txBody>
+      </p:sp>
+      <p:sp>
+        <p:nvSpPr>
+          <p:cNvPr id="102" name="Shape 99"/>
+          <p:cNvSpPr/>
+          <p:nvPr/>
+        </p:nvSpPr>
+        <p:spPr>
+          <a:xfrm>
+            <a:off x="7790688" y="5166360"/>
+            <a:ext cx="886968" cy="274320"/>
+          </a:xfrm>
+          <a:prstGeom prst="roundRect">
+            <a:avLst>
+              <a:gd name="adj" fmla="val 26667"/>
+            </a:avLst>
+          </a:prstGeom>
+          <a:solidFill>
+            <a:srgbClr val="94AACC">
+              <a:alpha val="18000"/>
+            </a:srgbClr>
+          </a:solidFill>
+          <a:ln w="9525">
+            <a:solidFill>
+              <a:srgbClr val="94AACC"/>
+            </a:solidFill>
+            <a:prstDash val="solid"/>
+          </a:ln>
+        </p:spPr>
+      </p:sp>
+      <p:sp>
+        <p:nvSpPr>
+          <p:cNvPr id="103" name="Text 100"/>
+          <p:cNvSpPr txBox="1"/>
+          <p:nvPr/>
+        </p:nvSpPr>
+        <p:spPr>
+          <a:xfrm>
+            <a:off x="7790688" y="5166360"/>
+            <a:ext cx="886968" cy="274320"/>
+          </a:xfrm>
+          <a:prstGeom prst="rect">
+            <a:avLst/>
+          </a:prstGeom>
+          <a:noFill/>
+          <a:ln/>
+        </p:spPr>
+        <p:txBody>
+          <a:bodyPr wrap="square" lIns="0" tIns="0" rIns="0" bIns="0" rtlCol="0" anchor="ctr"/>
+          <a:lstStyle/>
+          <a:p>
+            <a:pPr algn="ctr" indent="0" marL="0">
+              <a:buNone/>
+            </a:pPr>
+            <a:r>
+              <a:rPr lang="en-US" sz="1150" b="1" dirty="0">
+                <a:solidFill>
+                  <a:srgbClr val="94AACC"/>
+                </a:solidFill>
+                <a:latin typeface="Arial" pitchFamily="34" charset="0"/>
+                <a:ea typeface="Arial" pitchFamily="34" charset="-122"/>
+                <a:cs typeface="Arial" pitchFamily="34" charset="-120"/>
+              </a:rPr>
+              <a:t>= 0,0 %</a:t>
+            </a:r>
+            <a:endParaRPr lang="en-US" sz="1150" dirty="0"/>
+          </a:p>
+        </p:txBody>
+      </p:sp>
+      <p:sp>
+        <p:nvSpPr>
+          <p:cNvPr id="104" name="Text 101"/>
+          <p:cNvSpPr txBox="1"/>
+          <p:nvPr/>
+        </p:nvSpPr>
+        <p:spPr>
+          <a:xfrm>
+            <a:off x="6327648" y="5458968"/>
+            <a:ext cx="1600200" cy="274320"/>
+          </a:xfrm>
+          <a:prstGeom prst="rect">
+            <a:avLst/>
+          </a:prstGeom>
+          <a:noFill/>
+          <a:ln/>
+        </p:spPr>
+        <p:txBody>
+          <a:bodyPr wrap="square" lIns="0" tIns="0" rIns="0" bIns="0" rtlCol="0" anchor="ctr"/>
+          <a:lstStyle/>
+          <a:p>
+            <a:pPr algn="l" indent="0" marL="0">
+              <a:buNone/>
+            </a:pPr>
+            <a:r>
+              <a:rPr lang="en-US" sz="1100" dirty="0">
+                <a:solidFill>
+                  <a:srgbClr val="BCCDE8"/>
+                </a:solidFill>
+                <a:latin typeface="Arial" pitchFamily="34" charset="0"/>
+                <a:ea typeface="Arial" pitchFamily="34" charset="-122"/>
+                <a:cs typeface="Arial" pitchFamily="34" charset="-120"/>
+              </a:rPr>
+              <a:t>Meta 50 %</a:t>
+            </a:r>
+            <a:endParaRPr lang="en-US" sz="1100" dirty="0"/>
+          </a:p>
+        </p:txBody>
+      </p:sp>
+      <p:sp>
+        <p:nvSpPr>
+          <p:cNvPr id="105" name="Shape 102"/>
+          <p:cNvSpPr/>
+          <p:nvPr/>
+        </p:nvSpPr>
+        <p:spPr>
+          <a:xfrm>
+            <a:off x="7790688" y="5458968"/>
+            <a:ext cx="886968" cy="274320"/>
+          </a:xfrm>
+          <a:prstGeom prst="roundRect">
+            <a:avLst>
+              <a:gd name="adj" fmla="val 26667"/>
+            </a:avLst>
+          </a:prstGeom>
+          <a:solidFill>
+            <a:srgbClr val="34D399">
+              <a:alpha val="18000"/>
+            </a:srgbClr>
+          </a:solidFill>
+          <a:ln w="9525">
+            <a:solidFill>
+              <a:srgbClr val="34D399"/>
+            </a:solidFill>
+            <a:prstDash val="solid"/>
+          </a:ln>
+        </p:spPr>
+      </p:sp>
+      <p:sp>
+        <p:nvSpPr>
+          <p:cNvPr id="106" name="Text 103"/>
+          <p:cNvSpPr txBox="1"/>
+          <p:nvPr/>
+        </p:nvSpPr>
+        <p:spPr>
+          <a:xfrm>
+            <a:off x="7790688" y="5458968"/>
+            <a:ext cx="886968" cy="274320"/>
+          </a:xfrm>
+          <a:prstGeom prst="rect">
+            <a:avLst/>
+          </a:prstGeom>
+          <a:noFill/>
+          <a:ln/>
+        </p:spPr>
+        <p:txBody>
+          <a:bodyPr wrap="square" lIns="0" tIns="0" rIns="0" bIns="0" rtlCol="0" anchor="ctr"/>
+          <a:lstStyle/>
+          <a:p>
+            <a:pPr algn="ctr" indent="0" marL="0">
+              <a:buNone/>
+            </a:pPr>
+            <a:r>
+              <a:rPr lang="en-US" sz="1150" b="1" dirty="0">
+                <a:solidFill>
+                  <a:srgbClr val="34D399"/>
+                </a:solidFill>
+                <a:latin typeface="Arial" pitchFamily="34" charset="0"/>
+                <a:ea typeface="Arial" pitchFamily="34" charset="-122"/>
+                <a:cs typeface="Arial" pitchFamily="34" charset="-120"/>
+              </a:rPr>
+              <a:t>✓ OK</a:t>
+            </a:r>
+            <a:endParaRPr lang="en-US" sz="1150" dirty="0"/>
+          </a:p>
+        </p:txBody>
+      </p:sp>
+      <p:sp>
+        <p:nvSpPr>
+          <p:cNvPr id="107" name="Shape 104"/>
+          <p:cNvSpPr/>
+          <p:nvPr/>
+        </p:nvSpPr>
+        <p:spPr>
+          <a:xfrm>
+            <a:off x="8970264" y="3822192"/>
+            <a:ext cx="2679192" cy="1938528"/>
+          </a:xfrm>
+          <a:prstGeom prst="roundRect">
+            <a:avLst>
+              <a:gd name="adj" fmla="val 3774"/>
             </a:avLst>
           </a:prstGeom>
           <a:solidFill>
@@ -5738,30 +9101,30 @@
       </p:sp>
       <p:sp>
         <p:nvSpPr>
-          <p:cNvPr id="22" name="Text 19"/>
-          <p:cNvSpPr txBox="1"/>
-          <p:nvPr/>
-        </p:nvSpPr>
-        <p:spPr>
-          <a:xfrm>
-            <a:off x="868680" y="4315968"/>
-            <a:ext cx="10451592" cy="548640"/>
-          </a:xfrm>
-          <a:prstGeom prst="rect">
-            <a:avLst/>
-          </a:prstGeom>
-          <a:noFill/>
-          <a:ln/>
-        </p:spPr>
-        <p:txBody>
-          <a:bodyPr wrap="square" lIns="0" tIns="0" rIns="0" bIns="0" rtlCol="0" anchor="ctr"/>
-          <a:lstStyle/>
-          <a:p>
-            <a:pPr algn="l" indent="0" marL="0">
-              <a:buNone/>
-            </a:pPr>
-            <a:r>
-              <a:rPr lang="en-US" sz="1800" b="1" dirty="0">
+          <p:cNvPr id="108" name="Text 105"/>
+          <p:cNvSpPr txBox="1"/>
+          <p:nvPr/>
+        </p:nvSpPr>
+        <p:spPr>
+          <a:xfrm>
+            <a:off x="9134856" y="3931920"/>
+            <a:ext cx="2350008" cy="274320"/>
+          </a:xfrm>
+          <a:prstGeom prst="rect">
+            <a:avLst/>
+          </a:prstGeom>
+          <a:noFill/>
+          <a:ln/>
+        </p:spPr>
+        <p:txBody>
+          <a:bodyPr wrap="square" lIns="0" tIns="0" rIns="0" bIns="0" rtlCol="0" anchor="ctr"/>
+          <a:lstStyle/>
+          <a:p>
+            <a:pPr algn="l" indent="0" marL="0">
+              <a:buNone/>
+            </a:pPr>
+            <a:r>
+              <a:rPr lang="en-US" sz="1050" b="1" spc="200" kern="0" dirty="0">
                 <a:solidFill>
                   <a:srgbClr val="5EEAD4"/>
                 </a:solidFill>
@@ -5769,22 +9132,22 @@
                 <a:ea typeface="Arial" pitchFamily="34" charset="-122"/>
                 <a:cs typeface="Arial" pitchFamily="34" charset="-120"/>
               </a:rPr>
-              <a:t>El traslado al Marga Marga multiplica por 2,3 la exposición: amplifica la tasa que llevemos</a:t>
-            </a:r>
-            <a:endParaRPr lang="en-US" sz="1800" dirty="0"/>
-          </a:p>
-        </p:txBody>
-      </p:sp>
-      <p:sp>
-        <p:nvSpPr>
-          <p:cNvPr id="23" name="Text 20"/>
-          <p:cNvSpPr txBox="1"/>
-          <p:nvPr/>
-        </p:nvSpPr>
-        <p:spPr>
-          <a:xfrm>
-            <a:off x="868680" y="4892040"/>
-            <a:ext cx="10451592" cy="640080"/>
+              <a:t>LECTURA</a:t>
+            </a:r>
+            <a:endParaRPr lang="en-US" sz="1050" dirty="0"/>
+          </a:p>
+        </p:txBody>
+      </p:sp>
+      <p:sp>
+        <p:nvSpPr>
+          <p:cNvPr id="109" name="Text 106"/>
+          <p:cNvSpPr txBox="1"/>
+          <p:nvPr/>
+        </p:nvSpPr>
+        <p:spPr>
+          <a:xfrm>
+            <a:off x="9134856" y="4206240"/>
+            <a:ext cx="2350008" cy="1481328"/>
           </a:xfrm>
           <a:prstGeom prst="rect">
             <a:avLst/>
@@ -5800,7 +9163,21 @@
               <a:buNone/>
             </a:pPr>
             <a:r>
-              <a:rPr lang="en-US" sz="1500" dirty="0">
+              <a:rPr lang="en-US" sz="1050" b="1" dirty="0">
+                <a:solidFill>
+                  <a:srgbClr val="FFFFFF"/>
+                </a:solidFill>
+                <a:latin typeface="Arial" pitchFamily="34" charset="0"/>
+                <a:ea typeface="Arial" pitchFamily="34" charset="-122"/>
+                <a:cs typeface="Arial" pitchFamily="34" charset="-120"/>
+              </a:rPr>
+              <a:t>Recambio 14 min </a:t>
+            </a:r>
+            <a:pPr algn="l" indent="0" marL="0">
+              <a:buNone/>
+            </a:pPr>
+            <a:r>
+              <a:rPr lang="en-US" sz="1050" dirty="0">
                 <a:solidFill>
                   <a:srgbClr val="BCCDE8"/>
                 </a:solidFill>
@@ -5808,15 +9185,73 @@
                 <a:ea typeface="Arial" pitchFamily="34" charset="-122"/>
                 <a:cs typeface="Arial" pitchFamily="34" charset="-120"/>
               </a:rPr>
-              <a:t>Sostener el régimen depende de lo que se institucionalice antes del traslado: causal completa, lunes blindado, dotación y camas de rescate.</a:t>
-            </a:r>
-            <a:endParaRPr lang="en-US" sz="1500" dirty="0"/>
-          </a:p>
-        </p:txBody>
-      </p:sp>
-      <p:sp>
-        <p:nvSpPr>
-          <p:cNvPr id="24" name="Text 21"/>
+              <a:t>vs 22,6 de media en el export: distinta fórmula, misma dirección (bajan los largos).
+</a:t>
+            </a:r>
+            <a:pPr algn="l" indent="0" marL="0">
+              <a:buNone/>
+            </a:pPr>
+            <a:r>
+              <a:rPr lang="en-US" sz="1050" b="1" dirty="0">
+                <a:solidFill>
+                  <a:srgbClr val="FFFFFF"/>
+                </a:solidFill>
+                <a:latin typeface="Arial" pitchFamily="34" charset="0"/>
+                <a:ea typeface="Arial" pitchFamily="34" charset="-122"/>
+                <a:cs typeface="Arial" pitchFamily="34" charset="-120"/>
+              </a:rPr>
+              <a:t>Meta de 60 cir/día </a:t>
+            </a:r>
+            <a:pPr algn="l" indent="0" marL="0">
+              <a:buNone/>
+            </a:pPr>
+            <a:r>
+              <a:rPr lang="en-US" sz="1050" dirty="0">
+                <a:solidFill>
+                  <a:srgbClr val="BCCDE8"/>
+                </a:solidFill>
+                <a:latin typeface="Arial" pitchFamily="34" charset="0"/>
+                <a:ea typeface="Arial" pitchFamily="34" charset="-122"/>
+                <a:cs typeface="Arial" pitchFamily="34" charset="-120"/>
+              </a:rPr>
+              <a:t>no es alcanzable con 3 pabellones: corregir el parámetro.
+</a:t>
+            </a:r>
+            <a:pPr algn="l" indent="0" marL="0">
+              <a:buNone/>
+            </a:pPr>
+            <a:r>
+              <a:rPr lang="en-US" sz="1050" b="1" dirty="0">
+                <a:solidFill>
+                  <a:srgbClr val="FFFFFF"/>
+                </a:solidFill>
+                <a:latin typeface="Arial" pitchFamily="34" charset="0"/>
+                <a:ea typeface="Arial" pitchFamily="34" charset="-122"/>
+                <a:cs typeface="Arial" pitchFamily="34" charset="-120"/>
+              </a:rPr>
+              <a:t>Proyección 0,0 % </a:t>
+            </a:r>
+            <a:pPr algn="l" indent="0" marL="0">
+              <a:buNone/>
+            </a:pPr>
+            <a:r>
+              <a:rPr lang="en-US" sz="1050" dirty="0">
+                <a:solidFill>
+                  <a:srgbClr val="BCCDE8"/>
+                </a:solidFill>
+                <a:latin typeface="Arial" pitchFamily="34" charset="0"/>
+                <a:ea typeface="Arial" pitchFamily="34" charset="-122"/>
+                <a:cs typeface="Arial" pitchFamily="34" charset="-120"/>
+              </a:rPr>
+              <a:t>= el módulo aún no tiene serie.</a:t>
+            </a:r>
+            <a:endParaRPr lang="en-US" sz="1050" dirty="0"/>
+          </a:p>
+        </p:txBody>
+      </p:sp>
+      <p:sp>
+        <p:nvSpPr>
+          <p:cNvPr id="110" name="Text 107"/>
           <p:cNvSpPr txBox="1"/>
           <p:nvPr/>
         </p:nvSpPr>
@@ -5847,7 +9282,7 @@
                 <a:ea typeface="Arial" pitchFamily="34" charset="-122"/>
                 <a:cs typeface="Arial" pitchFamily="34" charset="-120"/>
               </a:rPr>
-              <a:t>Escenarios binomiales con el volumen de cada período; no incorporan estacionalidad ni cambio de mezcla.</a:t>
+              <a:t>Sin la tasa de suspensión del escritorio (7,5 %): usa otro numerador y otra cohorte que el indicador del comité (1,32 %). Captura del escritorio, septiembre 2026.</a:t>
             </a:r>
             <a:endParaRPr lang="en-US" sz="1200" dirty="0"/>
           </a:p>
@@ -5986,7 +9421,7 @@
                 <a:ea typeface="Arial" pitchFamily="34" charset="-122"/>
                 <a:cs typeface="Arial" pitchFamily="34" charset="-120"/>
               </a:rPr>
-              <a:t>12  ·  SEPTIEMBRE</a:t>
+              <a:t>12  ·  HORARIO CONTINUO · CUÁNTO</a:t>
             </a:r>
             <a:endParaRPr lang="en-US" sz="1200" dirty="0"/>
           </a:p>
@@ -6025,7 +9460,7 @@
                 <a:ea typeface="Arial" pitchFamily="34" charset="-122"/>
                 <a:cs typeface="Arial" pitchFamily="34" charset="-120"/>
               </a:rPr>
-              <a:t>Cinco decisiones para septiembre</a:t>
+              <a:t>Horario continuo: entre 11 y 17 cirugías más al mes</a:t>
             </a:r>
             <a:endParaRPr lang="en-US" sz="3200" dirty="0"/>
           </a:p>
@@ -6064,7 +9499,7 @@
                 <a:ea typeface="Arial" pitchFamily="34" charset="-122"/>
                 <a:cs typeface="Arial" pitchFamily="34" charset="-120"/>
               </a:rPr>
-              <a:t>13  /  14</a:t>
+              <a:t>13  /  17</a:t>
             </a:r>
             <a:endParaRPr lang="en-US" sz="1000" dirty="0"/>
           </a:p>
@@ -6111,18 +9546,672 @@
       </p:sp>
       <p:sp>
         <p:nvSpPr>
-          <p:cNvPr id="9" name="Shape 6"/>
+          <p:cNvPr id="9" name="Text 6"/>
+          <p:cNvSpPr txBox="1"/>
+          <p:nvPr/>
+        </p:nvSpPr>
+        <p:spPr>
+          <a:xfrm>
+            <a:off x="548640" y="1691640"/>
+            <a:ext cx="7315200" cy="274320"/>
+          </a:xfrm>
+          <a:prstGeom prst="rect">
+            <a:avLst/>
+          </a:prstGeom>
+          <a:noFill/>
+          <a:ln/>
+        </p:spPr>
+        <p:txBody>
+          <a:bodyPr wrap="square" lIns="0" tIns="0" rIns="0" bIns="0" rtlCol="0" anchor="ctr"/>
+          <a:lstStyle/>
+          <a:p>
+            <a:pPr algn="l" indent="0" marL="0">
+              <a:buNone/>
+            </a:pPr>
+            <a:r>
+              <a:rPr lang="en-US" sz="1100" b="1" spc="200" kern="0" dirty="0">
+                <a:solidFill>
+                  <a:srgbClr val="BCCDE8"/>
+                </a:solidFill>
+                <a:latin typeface="Arial" pitchFamily="34" charset="0"/>
+                <a:ea typeface="Arial" pitchFamily="34" charset="-122"/>
+                <a:cs typeface="Arial" pitchFamily="34" charset="-120"/>
+              </a:rPr>
+              <a:t>LO QUE MIDE AGOSTO EN LA FRANJA 12:30–14:00</a:t>
+            </a:r>
+            <a:endParaRPr lang="en-US" sz="1100" dirty="0"/>
+          </a:p>
+        </p:txBody>
+      </p:sp>
+      <p:sp>
+        <p:nvSpPr>
+          <p:cNvPr id="10" name="Shape 7"/>
           <p:cNvSpPr/>
           <p:nvPr/>
         </p:nvSpPr>
         <p:spPr>
           <a:xfrm>
-            <a:off x="548640" y="1783080"/>
-            <a:ext cx="11091672" cy="749808"/>
+            <a:off x="548640" y="1965960"/>
+            <a:ext cx="3566160" cy="1417320"/>
           </a:xfrm>
           <a:prstGeom prst="roundRect">
             <a:avLst>
-              <a:gd name="adj" fmla="val 9756"/>
+              <a:gd name="adj" fmla="val 5161"/>
+            </a:avLst>
+          </a:prstGeom>
+          <a:solidFill>
+            <a:srgbClr val="0F1930"/>
+          </a:solidFill>
+          <a:ln w="9525">
+            <a:solidFill>
+              <a:srgbClr val="22304A"/>
+            </a:solidFill>
+            <a:prstDash val="solid"/>
+          </a:ln>
+        </p:spPr>
+      </p:sp>
+      <p:sp>
+        <p:nvSpPr>
+          <p:cNvPr id="11" name="Text 8"/>
+          <p:cNvSpPr txBox="1"/>
+          <p:nvPr/>
+        </p:nvSpPr>
+        <p:spPr>
+          <a:xfrm>
+            <a:off x="804672" y="2093976"/>
+            <a:ext cx="3054096" cy="518160"/>
+          </a:xfrm>
+          <a:prstGeom prst="rect">
+            <a:avLst/>
+          </a:prstGeom>
+          <a:noFill/>
+          <a:ln/>
+        </p:spPr>
+        <p:txBody>
+          <a:bodyPr wrap="square" lIns="0" tIns="0" rIns="0" bIns="0" rtlCol="0" anchor="ctr"/>
+          <a:lstStyle/>
+          <a:p>
+            <a:pPr algn="l" indent="0" marL="0">
+              <a:buNone/>
+            </a:pPr>
+            <a:r>
+              <a:rPr lang="en-US" sz="3400" b="1" dirty="0">
+                <a:solidFill>
+                  <a:srgbClr val="F5B342"/>
+                </a:solidFill>
+                <a:latin typeface="Arial" pitchFamily="34" charset="0"/>
+                <a:ea typeface="Arial" pitchFamily="34" charset="-122"/>
+                <a:cs typeface="Arial" pitchFamily="34" charset="-120"/>
+              </a:rPr>
+              <a:t>33 h 35</a:t>
+            </a:r>
+            <a:endParaRPr lang="en-US" sz="3400" dirty="0"/>
+          </a:p>
+        </p:txBody>
+      </p:sp>
+      <p:sp>
+        <p:nvSpPr>
+          <p:cNvPr id="12" name="Text 9"/>
+          <p:cNvSpPr txBox="1"/>
+          <p:nvPr/>
+        </p:nvSpPr>
+        <p:spPr>
+          <a:xfrm>
+            <a:off x="804672" y="2612136"/>
+            <a:ext cx="3054096" cy="274320"/>
+          </a:xfrm>
+          <a:prstGeom prst="rect">
+            <a:avLst/>
+          </a:prstGeom>
+          <a:noFill/>
+          <a:ln/>
+        </p:spPr>
+        <p:txBody>
+          <a:bodyPr wrap="square" lIns="0" tIns="0" rIns="0" bIns="0" rtlCol="0" anchor="ctr"/>
+          <a:lstStyle/>
+          <a:p>
+            <a:pPr algn="l" indent="0" marL="0">
+              <a:buNone/>
+            </a:pPr>
+            <a:r>
+              <a:rPr lang="en-US" sz="1300" b="1" dirty="0">
+                <a:solidFill>
+                  <a:srgbClr val="EAF1FB"/>
+                </a:solidFill>
+                <a:latin typeface="Arial" pitchFamily="34" charset="0"/>
+                <a:ea typeface="Arial" pitchFamily="34" charset="-122"/>
+                <a:cs typeface="Arial" pitchFamily="34" charset="-120"/>
+              </a:rPr>
+              <a:t>de pausas entre pacientes en la franja</a:t>
+            </a:r>
+            <a:endParaRPr lang="en-US" sz="1300" dirty="0"/>
+          </a:p>
+        </p:txBody>
+      </p:sp>
+      <p:sp>
+        <p:nvSpPr>
+          <p:cNvPr id="13" name="Text 10"/>
+          <p:cNvSpPr txBox="1"/>
+          <p:nvPr/>
+        </p:nvSpPr>
+        <p:spPr>
+          <a:xfrm>
+            <a:off x="804672" y="2886456"/>
+            <a:ext cx="3054096" cy="441960"/>
+          </a:xfrm>
+          <a:prstGeom prst="rect">
+            <a:avLst/>
+          </a:prstGeom>
+          <a:noFill/>
+          <a:ln/>
+        </p:spPr>
+        <p:txBody>
+          <a:bodyPr wrap="square" lIns="0" tIns="0" rIns="0" bIns="0" rtlCol="0" anchor="t"/>
+          <a:lstStyle/>
+          <a:p>
+            <a:pPr algn="l" indent="0" marL="0">
+              <a:buNone/>
+            </a:pPr>
+            <a:r>
+              <a:rPr lang="en-US" sz="1250" dirty="0">
+                <a:solidFill>
+                  <a:srgbClr val="94AACC"/>
+                </a:solidFill>
+                <a:latin typeface="Arial" pitchFamily="34" charset="0"/>
+                <a:ea typeface="Arial" pitchFamily="34" charset="-122"/>
+                <a:cs typeface="Arial" pitchFamily="34" charset="-120"/>
+              </a:rPr>
+              <a:t>40 de 141 recambios · 39 pabellón-días</a:t>
+            </a:r>
+            <a:endParaRPr lang="en-US" sz="1250" dirty="0"/>
+          </a:p>
+        </p:txBody>
+      </p:sp>
+      <p:sp>
+        <p:nvSpPr>
+          <p:cNvPr id="14" name="Shape 11"/>
+          <p:cNvSpPr/>
+          <p:nvPr/>
+        </p:nvSpPr>
+        <p:spPr>
+          <a:xfrm>
+            <a:off x="4311396" y="1965960"/>
+            <a:ext cx="3566160" cy="1417320"/>
+          </a:xfrm>
+          <a:prstGeom prst="roundRect">
+            <a:avLst>
+              <a:gd name="adj" fmla="val 5161"/>
+            </a:avLst>
+          </a:prstGeom>
+          <a:solidFill>
+            <a:srgbClr val="0F1930"/>
+          </a:solidFill>
+          <a:ln w="9525">
+            <a:solidFill>
+              <a:srgbClr val="22304A"/>
+            </a:solidFill>
+            <a:prstDash val="solid"/>
+          </a:ln>
+        </p:spPr>
+      </p:sp>
+      <p:sp>
+        <p:nvSpPr>
+          <p:cNvPr id="15" name="Text 12"/>
+          <p:cNvSpPr txBox="1"/>
+          <p:nvPr/>
+        </p:nvSpPr>
+        <p:spPr>
+          <a:xfrm>
+            <a:off x="4567428" y="2093976"/>
+            <a:ext cx="3054096" cy="518160"/>
+          </a:xfrm>
+          <a:prstGeom prst="rect">
+            <a:avLst/>
+          </a:prstGeom>
+          <a:noFill/>
+          <a:ln/>
+        </p:spPr>
+        <p:txBody>
+          <a:bodyPr wrap="square" lIns="0" tIns="0" rIns="0" bIns="0" rtlCol="0" anchor="ctr"/>
+          <a:lstStyle/>
+          <a:p>
+            <a:pPr algn="l" indent="0" marL="0">
+              <a:buNone/>
+            </a:pPr>
+            <a:r>
+              <a:rPr lang="en-US" sz="3400" b="1" dirty="0">
+                <a:solidFill>
+                  <a:srgbClr val="F5B342"/>
+                </a:solidFill>
+                <a:latin typeface="Arial" pitchFamily="34" charset="0"/>
+                <a:ea typeface="Arial" pitchFamily="34" charset="-122"/>
+                <a:cs typeface="Arial" pitchFamily="34" charset="-120"/>
+              </a:rPr>
+              <a:t>16 jornadas</a:t>
+            </a:r>
+            <a:endParaRPr lang="en-US" sz="3400" dirty="0"/>
+          </a:p>
+        </p:txBody>
+      </p:sp>
+      <p:sp>
+        <p:nvSpPr>
+          <p:cNvPr id="16" name="Text 13"/>
+          <p:cNvSpPr txBox="1"/>
+          <p:nvPr/>
+        </p:nvSpPr>
+        <p:spPr>
+          <a:xfrm>
+            <a:off x="4567428" y="2612136"/>
+            <a:ext cx="3054096" cy="274320"/>
+          </a:xfrm>
+          <a:prstGeom prst="rect">
+            <a:avLst/>
+          </a:prstGeom>
+          <a:noFill/>
+          <a:ln/>
+        </p:spPr>
+        <p:txBody>
+          <a:bodyPr wrap="square" lIns="0" tIns="0" rIns="0" bIns="0" rtlCol="0" anchor="ctr"/>
+          <a:lstStyle/>
+          <a:p>
+            <a:pPr algn="l" indent="0" marL="0">
+              <a:buNone/>
+            </a:pPr>
+            <a:r>
+              <a:rPr lang="en-US" sz="1300" b="1" dirty="0">
+                <a:solidFill>
+                  <a:srgbClr val="EAF1FB"/>
+                </a:solidFill>
+                <a:latin typeface="Arial" pitchFamily="34" charset="0"/>
+                <a:ea typeface="Arial" pitchFamily="34" charset="-122"/>
+                <a:cs typeface="Arial" pitchFamily="34" charset="-120"/>
+              </a:rPr>
+              <a:t>con bloque libre continuo ≥ 60 min</a:t>
+            </a:r>
+            <a:endParaRPr lang="en-US" sz="1300" dirty="0"/>
+          </a:p>
+        </p:txBody>
+      </p:sp>
+      <p:sp>
+        <p:nvSpPr>
+          <p:cNvPr id="17" name="Text 14"/>
+          <p:cNvSpPr txBox="1"/>
+          <p:nvPr/>
+        </p:nvSpPr>
+        <p:spPr>
+          <a:xfrm>
+            <a:off x="4567428" y="2886456"/>
+            <a:ext cx="3054096" cy="441960"/>
+          </a:xfrm>
+          <a:prstGeom prst="rect">
+            <a:avLst/>
+          </a:prstGeom>
+          <a:noFill/>
+          <a:ln/>
+        </p:spPr>
+        <p:txBody>
+          <a:bodyPr wrap="square" lIns="0" tIns="0" rIns="0" bIns="0" rtlCol="0" anchor="t"/>
+          <a:lstStyle/>
+          <a:p>
+            <a:pPr algn="l" indent="0" marL="0">
+              <a:buNone/>
+            </a:pPr>
+            <a:r>
+              <a:rPr lang="en-US" sz="1250" dirty="0">
+                <a:solidFill>
+                  <a:srgbClr val="94AACC"/>
+                </a:solidFill>
+                <a:latin typeface="Arial" pitchFamily="34" charset="0"/>
+                <a:ea typeface="Arial" pitchFamily="34" charset="-122"/>
+                <a:cs typeface="Arial" pitchFamily="34" charset="-120"/>
+              </a:rPr>
+              <a:t>en 12 fechas · de ≥ 90 min: solo 2</a:t>
+            </a:r>
+            <a:endParaRPr lang="en-US" sz="1250" dirty="0"/>
+          </a:p>
+        </p:txBody>
+      </p:sp>
+      <p:sp>
+        <p:nvSpPr>
+          <p:cNvPr id="18" name="Shape 15"/>
+          <p:cNvSpPr/>
+          <p:nvPr/>
+        </p:nvSpPr>
+        <p:spPr>
+          <a:xfrm>
+            <a:off x="8074152" y="1965960"/>
+            <a:ext cx="3566160" cy="1417320"/>
+          </a:xfrm>
+          <a:prstGeom prst="roundRect">
+            <a:avLst>
+              <a:gd name="adj" fmla="val 5161"/>
+            </a:avLst>
+          </a:prstGeom>
+          <a:solidFill>
+            <a:srgbClr val="0F1930"/>
+          </a:solidFill>
+          <a:ln w="9525">
+            <a:solidFill>
+              <a:srgbClr val="22304A"/>
+            </a:solidFill>
+            <a:prstDash val="solid"/>
+          </a:ln>
+        </p:spPr>
+      </p:sp>
+      <p:sp>
+        <p:nvSpPr>
+          <p:cNvPr id="19" name="Text 16"/>
+          <p:cNvSpPr txBox="1"/>
+          <p:nvPr/>
+        </p:nvSpPr>
+        <p:spPr>
+          <a:xfrm>
+            <a:off x="8330184" y="2093976"/>
+            <a:ext cx="3054096" cy="518160"/>
+          </a:xfrm>
+          <a:prstGeom prst="rect">
+            <a:avLst/>
+          </a:prstGeom>
+          <a:noFill/>
+          <a:ln/>
+        </p:spPr>
+        <p:txBody>
+          <a:bodyPr wrap="square" lIns="0" tIns="0" rIns="0" bIns="0" rtlCol="0" anchor="ctr"/>
+          <a:lstStyle/>
+          <a:p>
+            <a:pPr algn="l" indent="0" marL="0">
+              <a:buNone/>
+            </a:pPr>
+            <a:r>
+              <a:rPr lang="en-US" sz="3400" b="1" dirty="0">
+                <a:solidFill>
+                  <a:srgbClr val="5EEAD4"/>
+                </a:solidFill>
+                <a:latin typeface="Arial" pitchFamily="34" charset="0"/>
+                <a:ea typeface="Arial" pitchFamily="34" charset="-122"/>
+                <a:cs typeface="Arial" pitchFamily="34" charset="-120"/>
+              </a:rPr>
+              <a:t>2 h por caso</a:t>
+            </a:r>
+            <a:endParaRPr lang="en-US" sz="3400" dirty="0"/>
+          </a:p>
+        </p:txBody>
+      </p:sp>
+      <p:sp>
+        <p:nvSpPr>
+          <p:cNvPr id="20" name="Text 17"/>
+          <p:cNvSpPr txBox="1"/>
+          <p:nvPr/>
+        </p:nvSpPr>
+        <p:spPr>
+          <a:xfrm>
+            <a:off x="8330184" y="2612136"/>
+            <a:ext cx="3054096" cy="274320"/>
+          </a:xfrm>
+          <a:prstGeom prst="rect">
+            <a:avLst/>
+          </a:prstGeom>
+          <a:noFill/>
+          <a:ln/>
+        </p:spPr>
+        <p:txBody>
+          <a:bodyPr wrap="square" lIns="0" tIns="0" rIns="0" bIns="0" rtlCol="0" anchor="ctr"/>
+          <a:lstStyle/>
+          <a:p>
+            <a:pPr algn="l" indent="0" marL="0">
+              <a:buNone/>
+            </a:pPr>
+            <a:r>
+              <a:rPr lang="en-US" sz="1300" b="1" dirty="0">
+                <a:solidFill>
+                  <a:srgbClr val="EAF1FB"/>
+                </a:solidFill>
+                <a:latin typeface="Arial" pitchFamily="34" charset="0"/>
+                <a:ea typeface="Arial" pitchFamily="34" charset="-122"/>
+                <a:cs typeface="Arial" pitchFamily="34" charset="-120"/>
+              </a:rPr>
+              <a:t>100 min de quirófano + 18 de recambio</a:t>
+            </a:r>
+            <a:endParaRPr lang="en-US" sz="1300" dirty="0"/>
+          </a:p>
+        </p:txBody>
+      </p:sp>
+      <p:sp>
+        <p:nvSpPr>
+          <p:cNvPr id="21" name="Text 18"/>
+          <p:cNvSpPr txBox="1"/>
+          <p:nvPr/>
+        </p:nvSpPr>
+        <p:spPr>
+          <a:xfrm>
+            <a:off x="8330184" y="2886456"/>
+            <a:ext cx="3054096" cy="441960"/>
+          </a:xfrm>
+          <a:prstGeom prst="rect">
+            <a:avLst/>
+          </a:prstGeom>
+          <a:noFill/>
+          <a:ln/>
+        </p:spPr>
+        <p:txBody>
+          <a:bodyPr wrap="square" lIns="0" tIns="0" rIns="0" bIns="0" rtlCol="0" anchor="t"/>
+          <a:lstStyle/>
+          <a:p>
+            <a:pPr algn="l" indent="0" marL="0">
+              <a:buNone/>
+            </a:pPr>
+            <a:r>
+              <a:rPr lang="en-US" sz="1250" dirty="0">
+                <a:solidFill>
+                  <a:srgbClr val="94AACC"/>
+                </a:solidFill>
+                <a:latin typeface="Arial" pitchFamily="34" charset="0"/>
+                <a:ea typeface="Arial" pitchFamily="34" charset="-122"/>
+                <a:cs typeface="Arial" pitchFamily="34" charset="-120"/>
+              </a:rPr>
+              <a:t>caso corto: ≈ 1 h 20</a:t>
+            </a:r>
+            <a:endParaRPr lang="en-US" sz="1250" dirty="0"/>
+          </a:p>
+        </p:txBody>
+      </p:sp>
+      <p:sp>
+        <p:nvSpPr>
+          <p:cNvPr id="22" name="Text 19"/>
+          <p:cNvSpPr txBox="1"/>
+          <p:nvPr/>
+        </p:nvSpPr>
+        <p:spPr>
+          <a:xfrm>
+            <a:off x="548640" y="3566160"/>
+            <a:ext cx="8229600" cy="274320"/>
+          </a:xfrm>
+          <a:prstGeom prst="rect">
+            <a:avLst/>
+          </a:prstGeom>
+          <a:noFill/>
+          <a:ln/>
+        </p:spPr>
+        <p:txBody>
+          <a:bodyPr wrap="square" lIns="0" tIns="0" rIns="0" bIns="0" rtlCol="0" anchor="ctr"/>
+          <a:lstStyle/>
+          <a:p>
+            <a:pPr algn="l" indent="0" marL="0">
+              <a:buNone/>
+            </a:pPr>
+            <a:r>
+              <a:rPr lang="en-US" sz="1100" b="1" spc="200" kern="0" dirty="0">
+                <a:solidFill>
+                  <a:srgbClr val="BCCDE8"/>
+                </a:solidFill>
+                <a:latin typeface="Arial" pitchFamily="34" charset="0"/>
+                <a:ea typeface="Arial" pitchFamily="34" charset="-122"/>
+                <a:cs typeface="Arial" pitchFamily="34" charset="-120"/>
+              </a:rPr>
+              <a:t>CUÁNTOS PACIENTES MÁS, SI HAY GENTE PARA ESE HORARIO · POR MES</a:t>
+            </a:r>
+            <a:endParaRPr lang="en-US" sz="1100" dirty="0"/>
+          </a:p>
+        </p:txBody>
+      </p:sp>
+      <p:sp>
+        <p:nvSpPr>
+          <p:cNvPr id="23" name="Shape 20"/>
+          <p:cNvSpPr/>
+          <p:nvPr/>
+        </p:nvSpPr>
+        <p:spPr>
+          <a:xfrm>
+            <a:off x="548640" y="3840480"/>
+            <a:ext cx="3566160" cy="1783080"/>
+          </a:xfrm>
+          <a:prstGeom prst="roundRect">
+            <a:avLst>
+              <a:gd name="adj" fmla="val 4103"/>
+            </a:avLst>
+          </a:prstGeom>
+          <a:solidFill>
+            <a:srgbClr val="0F1930"/>
+          </a:solidFill>
+          <a:ln w="9525">
+            <a:solidFill>
+              <a:srgbClr val="22304A"/>
+            </a:solidFill>
+            <a:prstDash val="solid"/>
+          </a:ln>
+        </p:spPr>
+      </p:sp>
+      <p:sp>
+        <p:nvSpPr>
+          <p:cNvPr id="24" name="Text 21"/>
+          <p:cNvSpPr txBox="1"/>
+          <p:nvPr/>
+        </p:nvSpPr>
+        <p:spPr>
+          <a:xfrm>
+            <a:off x="804672" y="3968496"/>
+            <a:ext cx="3054096" cy="609600"/>
+          </a:xfrm>
+          <a:prstGeom prst="rect">
+            <a:avLst/>
+          </a:prstGeom>
+          <a:noFill/>
+          <a:ln/>
+        </p:spPr>
+        <p:txBody>
+          <a:bodyPr wrap="square" lIns="0" tIns="0" rIns="0" bIns="0" rtlCol="0" anchor="ctr"/>
+          <a:lstStyle/>
+          <a:p>
+            <a:pPr algn="l" indent="0" marL="0">
+              <a:buNone/>
+            </a:pPr>
+            <a:r>
+              <a:rPr lang="en-US" sz="4000" b="1" dirty="0">
+                <a:solidFill>
+                  <a:srgbClr val="EAF1FB"/>
+                </a:solidFill>
+                <a:latin typeface="Arial" pitchFamily="34" charset="0"/>
+                <a:ea typeface="Arial" pitchFamily="34" charset="-122"/>
+                <a:cs typeface="Arial" pitchFamily="34" charset="-120"/>
+              </a:rPr>
+              <a:t>16</a:t>
+            </a:r>
+            <a:endParaRPr lang="en-US" sz="4000" dirty="0"/>
+          </a:p>
+        </p:txBody>
+      </p:sp>
+      <p:sp>
+        <p:nvSpPr>
+          <p:cNvPr id="25" name="Text 22"/>
+          <p:cNvSpPr txBox="1"/>
+          <p:nvPr/>
+        </p:nvSpPr>
+        <p:spPr>
+          <a:xfrm>
+            <a:off x="804672" y="4578096"/>
+            <a:ext cx="3054096" cy="274320"/>
+          </a:xfrm>
+          <a:prstGeom prst="rect">
+            <a:avLst/>
+          </a:prstGeom>
+          <a:noFill/>
+          <a:ln/>
+        </p:spPr>
+        <p:txBody>
+          <a:bodyPr wrap="square" lIns="0" tIns="0" rIns="0" bIns="0" rtlCol="0" anchor="ctr"/>
+          <a:lstStyle/>
+          <a:p>
+            <a:pPr algn="l" indent="0" marL="0">
+              <a:buNone/>
+            </a:pPr>
+            <a:r>
+              <a:rPr lang="en-US" sz="1300" b="1" dirty="0">
+                <a:solidFill>
+                  <a:srgbClr val="EAF1FB"/>
+                </a:solidFill>
+                <a:latin typeface="Arial" pitchFamily="34" charset="0"/>
+                <a:ea typeface="Arial" pitchFamily="34" charset="-122"/>
+                <a:cs typeface="Arial" pitchFamily="34" charset="-120"/>
+              </a:rPr>
+              <a:t>conservador</a:t>
+            </a:r>
+            <a:endParaRPr lang="en-US" sz="1300" dirty="0"/>
+          </a:p>
+        </p:txBody>
+      </p:sp>
+      <p:sp>
+        <p:nvSpPr>
+          <p:cNvPr id="26" name="Text 23"/>
+          <p:cNvSpPr txBox="1"/>
+          <p:nvPr/>
+        </p:nvSpPr>
+        <p:spPr>
+          <a:xfrm>
+            <a:off x="804672" y="4852416"/>
+            <a:ext cx="3054096" cy="716280"/>
+          </a:xfrm>
+          <a:prstGeom prst="rect">
+            <a:avLst/>
+          </a:prstGeom>
+          <a:noFill/>
+          <a:ln/>
+        </p:spPr>
+        <p:txBody>
+          <a:bodyPr wrap="square" lIns="0" tIns="0" rIns="0" bIns="0" rtlCol="0" anchor="t"/>
+          <a:lstStyle/>
+          <a:p>
+            <a:pPr algn="l" indent="0" marL="0">
+              <a:buNone/>
+            </a:pPr>
+            <a:r>
+              <a:rPr lang="en-US" sz="1250" dirty="0">
+                <a:solidFill>
+                  <a:srgbClr val="94AACC"/>
+                </a:solidFill>
+                <a:latin typeface="Arial" pitchFamily="34" charset="0"/>
+                <a:ea typeface="Arial" pitchFamily="34" charset="-122"/>
+                <a:cs typeface="Arial" pitchFamily="34" charset="-120"/>
+              </a:rPr>
+              <a:t>un caso corto en cada bloque libre observado de ≥ 60 min</a:t>
+            </a:r>
+            <a:endParaRPr lang="en-US" sz="1250" dirty="0"/>
+          </a:p>
+        </p:txBody>
+      </p:sp>
+      <p:sp>
+        <p:nvSpPr>
+          <p:cNvPr id="27" name="Shape 24"/>
+          <p:cNvSpPr/>
+          <p:nvPr/>
+        </p:nvSpPr>
+        <p:spPr>
+          <a:xfrm>
+            <a:off x="4311396" y="3840480"/>
+            <a:ext cx="3566160" cy="1783080"/>
+          </a:xfrm>
+          <a:prstGeom prst="roundRect">
+            <a:avLst>
+              <a:gd name="adj" fmla="val 4103"/>
             </a:avLst>
           </a:prstGeom>
           <a:solidFill>
@@ -6130,7 +10219,7 @@
           </a:solidFill>
           <a:ln w="19050">
             <a:solidFill>
-              <a:srgbClr val="F26B6B"/>
+              <a:srgbClr val="34D399"/>
             </a:solidFill>
             <a:prstDash val="solid"/>
           </a:ln>
@@ -6138,108 +10227,108 @@
       </p:sp>
       <p:sp>
         <p:nvSpPr>
-          <p:cNvPr id="10" name="Text 7"/>
-          <p:cNvSpPr txBox="1"/>
-          <p:nvPr/>
-        </p:nvSpPr>
-        <p:spPr>
-          <a:xfrm>
-            <a:off x="777240" y="1783080"/>
-            <a:ext cx="548640" cy="749808"/>
-          </a:xfrm>
-          <a:prstGeom prst="rect">
-            <a:avLst/>
-          </a:prstGeom>
-          <a:noFill/>
-          <a:ln/>
-        </p:spPr>
-        <p:txBody>
-          <a:bodyPr wrap="square" lIns="0" tIns="0" rIns="0" bIns="0" rtlCol="0" anchor="ctr"/>
-          <a:lstStyle/>
-          <a:p>
-            <a:pPr algn="l" indent="0" marL="0">
-              <a:buNone/>
-            </a:pPr>
-            <a:r>
-              <a:rPr lang="en-US" sz="3000" b="1" dirty="0">
-                <a:solidFill>
-                  <a:srgbClr val="F26B6B"/>
-                </a:solidFill>
-                <a:latin typeface="Arial" pitchFamily="34" charset="0"/>
-                <a:ea typeface="Arial" pitchFamily="34" charset="-122"/>
-                <a:cs typeface="Arial" pitchFamily="34" charset="-120"/>
-              </a:rPr>
-              <a:t>1</a:t>
-            </a:r>
-            <a:endParaRPr lang="en-US" sz="3000" dirty="0"/>
-          </a:p>
-        </p:txBody>
-      </p:sp>
-      <p:sp>
-        <p:nvSpPr>
-          <p:cNvPr id="11" name="Text 8"/>
-          <p:cNvSpPr txBox="1"/>
-          <p:nvPr/>
-        </p:nvSpPr>
-        <p:spPr>
-          <a:xfrm>
-            <a:off x="1417320" y="1856232"/>
-            <a:ext cx="7772400" cy="365760"/>
-          </a:xfrm>
-          <a:prstGeom prst="rect">
-            <a:avLst/>
-          </a:prstGeom>
-          <a:noFill/>
-          <a:ln/>
-        </p:spPr>
-        <p:txBody>
-          <a:bodyPr wrap="square" lIns="0" tIns="0" rIns="0" bIns="0" rtlCol="0" anchor="ctr"/>
-          <a:lstStyle/>
-          <a:p>
-            <a:pPr algn="l" indent="0" marL="0">
-              <a:buNone/>
-            </a:pPr>
-            <a:r>
-              <a:rPr lang="en-US" sz="1800" b="1" dirty="0">
-                <a:solidFill>
-                  <a:srgbClr val="FFFFFF"/>
-                </a:solidFill>
-                <a:latin typeface="Arial" pitchFamily="34" charset="0"/>
-                <a:ea typeface="Arial" pitchFamily="34" charset="-122"/>
-                <a:cs typeface="Arial" pitchFamily="34" charset="-120"/>
-              </a:rPr>
-              <a:t>Completar la causa de las 38 suspensiones</a:t>
-            </a:r>
-            <a:endParaRPr lang="en-US" sz="1800" dirty="0"/>
-          </a:p>
-        </p:txBody>
-      </p:sp>
-      <p:sp>
-        <p:nvSpPr>
-          <p:cNvPr id="12" name="Text 9"/>
-          <p:cNvSpPr txBox="1"/>
-          <p:nvPr/>
-        </p:nvSpPr>
-        <p:spPr>
-          <a:xfrm>
-            <a:off x="1417320" y="2203704"/>
-            <a:ext cx="9994392" cy="310896"/>
-          </a:xfrm>
-          <a:prstGeom prst="rect">
-            <a:avLst/>
-          </a:prstGeom>
-          <a:noFill/>
-          <a:ln/>
-        </p:spPr>
-        <p:txBody>
-          <a:bodyPr wrap="square" lIns="0" tIns="0" rIns="0" bIns="0" rtlCol="0" anchor="ctr"/>
-          <a:lstStyle/>
-          <a:p>
-            <a:pPr algn="l" indent="0" marL="0">
-              <a:buNone/>
-            </a:pPr>
-            <a:r>
-              <a:rPr lang="en-US" sz="1300" dirty="0">
+          <p:cNvPr id="28" name="Text 25"/>
+          <p:cNvSpPr txBox="1"/>
+          <p:nvPr/>
+        </p:nvSpPr>
+        <p:spPr>
+          <a:xfrm>
+            <a:off x="4567428" y="3968496"/>
+            <a:ext cx="3054096" cy="609600"/>
+          </a:xfrm>
+          <a:prstGeom prst="rect">
+            <a:avLst/>
+          </a:prstGeom>
+          <a:noFill/>
+          <a:ln/>
+        </p:spPr>
+        <p:txBody>
+          <a:bodyPr wrap="square" lIns="0" tIns="0" rIns="0" bIns="0" rtlCol="0" anchor="ctr"/>
+          <a:lstStyle/>
+          <a:p>
+            <a:pPr algn="l" indent="0" marL="0">
+              <a:buNone/>
+            </a:pPr>
+            <a:r>
+              <a:rPr lang="en-US" sz="4000" b="1" dirty="0">
+                <a:solidFill>
+                  <a:srgbClr val="34D399"/>
+                </a:solidFill>
+                <a:latin typeface="Arial" pitchFamily="34" charset="0"/>
+                <a:ea typeface="Arial" pitchFamily="34" charset="-122"/>
+                <a:cs typeface="Arial" pitchFamily="34" charset="-120"/>
+              </a:rPr>
+              <a:t>11 a 17</a:t>
+            </a:r>
+            <a:endParaRPr lang="en-US" sz="4000" dirty="0"/>
+          </a:p>
+        </p:txBody>
+      </p:sp>
+      <p:sp>
+        <p:nvSpPr>
+          <p:cNvPr id="29" name="Text 26"/>
+          <p:cNvSpPr txBox="1"/>
+          <p:nvPr/>
+        </p:nvSpPr>
+        <p:spPr>
+          <a:xfrm>
+            <a:off x="4567428" y="4578096"/>
+            <a:ext cx="3054096" cy="274320"/>
+          </a:xfrm>
+          <a:prstGeom prst="rect">
+            <a:avLst/>
+          </a:prstGeom>
+          <a:noFill/>
+          <a:ln/>
+        </p:spPr>
+        <p:txBody>
+          <a:bodyPr wrap="square" lIns="0" tIns="0" rIns="0" bIns="0" rtlCol="0" anchor="ctr"/>
+          <a:lstStyle/>
+          <a:p>
+            <a:pPr algn="l" indent="0" marL="0">
+              <a:buNone/>
+            </a:pPr>
+            <a:r>
+              <a:rPr lang="en-US" sz="1300" b="1" dirty="0">
+                <a:solidFill>
+                  <a:srgbClr val="EAF1FB"/>
+                </a:solidFill>
+                <a:latin typeface="Arial" pitchFamily="34" charset="0"/>
+                <a:ea typeface="Arial" pitchFamily="34" charset="-122"/>
+                <a:cs typeface="Arial" pitchFamily="34" charset="-120"/>
+              </a:rPr>
+              <a:t>medido</a:t>
+            </a:r>
+            <a:endParaRPr lang="en-US" sz="1300" dirty="0"/>
+          </a:p>
+        </p:txBody>
+      </p:sp>
+      <p:sp>
+        <p:nvSpPr>
+          <p:cNvPr id="30" name="Text 27"/>
+          <p:cNvSpPr txBox="1"/>
+          <p:nvPr/>
+        </p:nvSpPr>
+        <p:spPr>
+          <a:xfrm>
+            <a:off x="4567428" y="4852416"/>
+            <a:ext cx="3054096" cy="716280"/>
+          </a:xfrm>
+          <a:prstGeom prst="rect">
+            <a:avLst/>
+          </a:prstGeom>
+          <a:noFill/>
+          <a:ln/>
+        </p:spPr>
+        <p:txBody>
+          <a:bodyPr wrap="square" lIns="0" tIns="0" rIns="0" bIns="0" rtlCol="0" anchor="t"/>
+          <a:lstStyle/>
+          <a:p>
+            <a:pPr algn="l" indent="0" marL="0">
+              <a:buNone/>
+            </a:pPr>
+            <a:r>
+              <a:rPr lang="en-US" sz="1250" dirty="0">
                 <a:solidFill>
                   <a:srgbClr val="94AACC"/>
                 </a:solidFill>
@@ -6247,34 +10336,34 @@
                 <a:ea typeface="Arial" pitchFamily="34" charset="-122"/>
                 <a:cs typeface="Arial" pitchFamily="34" charset="-120"/>
               </a:rPr>
-              <a:t>por jornada en el fin de semana; "sin causa determinada" disponible</a:t>
-            </a:r>
-            <a:endParaRPr lang="en-US" sz="1300" dirty="0"/>
-          </a:p>
-        </p:txBody>
-      </p:sp>
-      <p:sp>
-        <p:nvSpPr>
-          <p:cNvPr id="13" name="Shape 10"/>
+              <a:t>21,6 h libres (pausas menos recambio normal): 11 casos típicos o 17 cortos · +5 a +8 % de la CME hábil</a:t>
+            </a:r>
+            <a:endParaRPr lang="en-US" sz="1250" dirty="0"/>
+          </a:p>
+        </p:txBody>
+      </p:sp>
+      <p:sp>
+        <p:nvSpPr>
+          <p:cNvPr id="31" name="Shape 28"/>
           <p:cNvSpPr/>
           <p:nvPr/>
         </p:nvSpPr>
         <p:spPr>
           <a:xfrm>
-            <a:off x="548640" y="2624328"/>
-            <a:ext cx="11091672" cy="749808"/>
+            <a:off x="8074152" y="3840480"/>
+            <a:ext cx="3566160" cy="1783080"/>
           </a:xfrm>
           <a:prstGeom prst="roundRect">
             <a:avLst>
-              <a:gd name="adj" fmla="val 9756"/>
+              <a:gd name="adj" fmla="val 4103"/>
             </a:avLst>
           </a:prstGeom>
           <a:solidFill>
             <a:srgbClr val="0F1930"/>
           </a:solidFill>
-          <a:ln w="19050">
+          <a:ln w="9525">
             <a:solidFill>
-              <a:srgbClr val="F26B6B"/>
+              <a:srgbClr val="22304A"/>
             </a:solidFill>
             <a:prstDash val="solid"/>
           </a:ln>
@@ -6282,108 +10371,30 @@
       </p:sp>
       <p:sp>
         <p:nvSpPr>
-          <p:cNvPr id="14" name="Text 11"/>
-          <p:cNvSpPr txBox="1"/>
-          <p:nvPr/>
-        </p:nvSpPr>
-        <p:spPr>
-          <a:xfrm>
-            <a:off x="777240" y="2624328"/>
-            <a:ext cx="548640" cy="749808"/>
-          </a:xfrm>
-          <a:prstGeom prst="rect">
-            <a:avLst/>
-          </a:prstGeom>
-          <a:noFill/>
-          <a:ln/>
-        </p:spPr>
-        <p:txBody>
-          <a:bodyPr wrap="square" lIns="0" tIns="0" rIns="0" bIns="0" rtlCol="0" anchor="ctr"/>
-          <a:lstStyle/>
-          <a:p>
-            <a:pPr algn="l" indent="0" marL="0">
-              <a:buNone/>
-            </a:pPr>
-            <a:r>
-              <a:rPr lang="en-US" sz="3000" b="1" dirty="0">
-                <a:solidFill>
-                  <a:srgbClr val="F26B6B"/>
-                </a:solidFill>
-                <a:latin typeface="Arial" pitchFamily="34" charset="0"/>
-                <a:ea typeface="Arial" pitchFamily="34" charset="-122"/>
-                <a:cs typeface="Arial" pitchFamily="34" charset="-120"/>
-              </a:rPr>
-              <a:t>2</a:t>
-            </a:r>
-            <a:endParaRPr lang="en-US" sz="3000" dirty="0"/>
-          </a:p>
-        </p:txBody>
-      </p:sp>
-      <p:sp>
-        <p:nvSpPr>
-          <p:cNvPr id="15" name="Text 12"/>
-          <p:cNvSpPr txBox="1"/>
-          <p:nvPr/>
-        </p:nvSpPr>
-        <p:spPr>
-          <a:xfrm>
-            <a:off x="1417320" y="2697480"/>
-            <a:ext cx="7772400" cy="365760"/>
-          </a:xfrm>
-          <a:prstGeom prst="rect">
-            <a:avLst/>
-          </a:prstGeom>
-          <a:noFill/>
-          <a:ln/>
-        </p:spPr>
-        <p:txBody>
-          <a:bodyPr wrap="square" lIns="0" tIns="0" rIns="0" bIns="0" rtlCol="0" anchor="ctr"/>
-          <a:lstStyle/>
-          <a:p>
-            <a:pPr algn="l" indent="0" marL="0">
-              <a:buNone/>
-            </a:pPr>
-            <a:r>
-              <a:rPr lang="en-US" sz="1800" b="1" dirty="0">
-                <a:solidFill>
-                  <a:srgbClr val="FFFFFF"/>
-                </a:solidFill>
-                <a:latin typeface="Arial" pitchFamily="34" charset="0"/>
-                <a:ea typeface="Arial" pitchFamily="34" charset="-122"/>
-                <a:cs typeface="Arial" pitchFamily="34" charset="-120"/>
-              </a:rPr>
-              <a:t>Blindar el lunes y recuperar el pabellón-día</a:t>
-            </a:r>
-            <a:endParaRPr lang="en-US" sz="1800" dirty="0"/>
-          </a:p>
-        </p:txBody>
-      </p:sp>
-      <p:sp>
-        <p:nvSpPr>
-          <p:cNvPr id="16" name="Text 13"/>
-          <p:cNvSpPr txBox="1"/>
-          <p:nvPr/>
-        </p:nvSpPr>
-        <p:spPr>
-          <a:xfrm>
-            <a:off x="1417320" y="3044952"/>
-            <a:ext cx="9994392" cy="310896"/>
-          </a:xfrm>
-          <a:prstGeom prst="rect">
-            <a:avLst/>
-          </a:prstGeom>
-          <a:noFill/>
-          <a:ln/>
-        </p:spPr>
-        <p:txBody>
-          <a:bodyPr wrap="square" lIns="0" tIns="0" rIns="0" bIns="0" rtlCol="0" anchor="ctr"/>
-          <a:lstStyle/>
-          <a:p>
-            <a:pPr algn="l" indent="0" marL="0">
-              <a:buNone/>
-            </a:pPr>
-            <a:r>
-              <a:rPr lang="en-US" sz="1300" dirty="0">
+          <p:cNvPr id="32" name="Text 29"/>
+          <p:cNvSpPr txBox="1"/>
+          <p:nvPr/>
+        </p:nvSpPr>
+        <p:spPr>
+          <a:xfrm>
+            <a:off x="8330184" y="3968496"/>
+            <a:ext cx="3054096" cy="609600"/>
+          </a:xfrm>
+          <a:prstGeom prst="rect">
+            <a:avLst/>
+          </a:prstGeom>
+          <a:noFill/>
+          <a:ln/>
+        </p:spPr>
+        <p:txBody>
+          <a:bodyPr wrap="square" lIns="0" tIns="0" rIns="0" bIns="0" rtlCol="0" anchor="ctr"/>
+          <a:lstStyle/>
+          <a:p>
+            <a:pPr algn="l" indent="0" marL="0">
+              <a:buNone/>
+            </a:pPr>
+            <a:r>
+              <a:rPr lang="en-US" sz="4000" b="1" dirty="0">
                 <a:solidFill>
                   <a:srgbClr val="94AACC"/>
                 </a:solidFill>
@@ -6391,7 +10402,46 @@
                 <a:ea typeface="Arial" pitchFamily="34" charset="-122"/>
                 <a:cs typeface="Arial" pitchFamily="34" charset="-120"/>
               </a:rPr>
-              <a:t>confirmación el viernes en la tarde · enfermería asegurada en Pabellón 2</a:t>
+              <a:t>hasta 38</a:t>
+            </a:r>
+            <a:endParaRPr lang="en-US" sz="4000" dirty="0"/>
+          </a:p>
+        </p:txBody>
+      </p:sp>
+      <p:sp>
+        <p:nvSpPr>
+          <p:cNvPr id="33" name="Text 30"/>
+          <p:cNvSpPr txBox="1"/>
+          <p:nvPr/>
+        </p:nvSpPr>
+        <p:spPr>
+          <a:xfrm>
+            <a:off x="8330184" y="4578096"/>
+            <a:ext cx="3054096" cy="274320"/>
+          </a:xfrm>
+          <a:prstGeom prst="rect">
+            <a:avLst/>
+          </a:prstGeom>
+          <a:noFill/>
+          <a:ln/>
+        </p:spPr>
+        <p:txBody>
+          <a:bodyPr wrap="square" lIns="0" tIns="0" rIns="0" bIns="0" rtlCol="0" anchor="ctr"/>
+          <a:lstStyle/>
+          <a:p>
+            <a:pPr algn="l" indent="0" marL="0">
+              <a:buNone/>
+            </a:pPr>
+            <a:r>
+              <a:rPr lang="en-US" sz="1300" b="1" dirty="0">
+                <a:solidFill>
+                  <a:srgbClr val="EAF1FB"/>
+                </a:solidFill>
+                <a:latin typeface="Arial" pitchFamily="34" charset="0"/>
+                <a:ea typeface="Arial" pitchFamily="34" charset="-122"/>
+                <a:cs typeface="Arial" pitchFamily="34" charset="-120"/>
+              </a:rPr>
+              <a:t>tope teórico</a:t>
             </a:r>
             <a:endParaRPr lang="en-US" sz="1300" dirty="0"/>
           </a:p>
@@ -6399,135 +10449,30 @@
       </p:sp>
       <p:sp>
         <p:nvSpPr>
-          <p:cNvPr id="17" name="Shape 14"/>
-          <p:cNvSpPr/>
-          <p:nvPr/>
-        </p:nvSpPr>
-        <p:spPr>
-          <a:xfrm>
-            <a:off x="548640" y="3465576"/>
-            <a:ext cx="11091672" cy="749808"/>
-          </a:xfrm>
-          <a:prstGeom prst="roundRect">
-            <a:avLst>
-              <a:gd name="adj" fmla="val 9756"/>
-            </a:avLst>
-          </a:prstGeom>
-          <a:solidFill>
-            <a:srgbClr val="0F1930"/>
-          </a:solidFill>
-          <a:ln w="19050">
-            <a:solidFill>
-              <a:srgbClr val="F5B342"/>
-            </a:solidFill>
-            <a:prstDash val="solid"/>
-          </a:ln>
-        </p:spPr>
-      </p:sp>
-      <p:sp>
-        <p:nvSpPr>
-          <p:cNvPr id="18" name="Text 15"/>
-          <p:cNvSpPr txBox="1"/>
-          <p:nvPr/>
-        </p:nvSpPr>
-        <p:spPr>
-          <a:xfrm>
-            <a:off x="777240" y="3465576"/>
-            <a:ext cx="548640" cy="749808"/>
-          </a:xfrm>
-          <a:prstGeom prst="rect">
-            <a:avLst/>
-          </a:prstGeom>
-          <a:noFill/>
-          <a:ln/>
-        </p:spPr>
-        <p:txBody>
-          <a:bodyPr wrap="square" lIns="0" tIns="0" rIns="0" bIns="0" rtlCol="0" anchor="ctr"/>
-          <a:lstStyle/>
-          <a:p>
-            <a:pPr algn="l" indent="0" marL="0">
-              <a:buNone/>
-            </a:pPr>
-            <a:r>
-              <a:rPr lang="en-US" sz="3000" b="1" dirty="0">
-                <a:solidFill>
-                  <a:srgbClr val="F5B342"/>
-                </a:solidFill>
-                <a:latin typeface="Arial" pitchFamily="34" charset="0"/>
-                <a:ea typeface="Arial" pitchFamily="34" charset="-122"/>
-                <a:cs typeface="Arial" pitchFamily="34" charset="-120"/>
-              </a:rPr>
-              <a:t>3</a:t>
-            </a:r>
-            <a:endParaRPr lang="en-US" sz="3000" dirty="0"/>
-          </a:p>
-        </p:txBody>
-      </p:sp>
-      <p:sp>
-        <p:nvSpPr>
-          <p:cNvPr id="19" name="Text 16"/>
-          <p:cNvSpPr txBox="1"/>
-          <p:nvPr/>
-        </p:nvSpPr>
-        <p:spPr>
-          <a:xfrm>
-            <a:off x="1417320" y="3538728"/>
-            <a:ext cx="7772400" cy="365760"/>
-          </a:xfrm>
-          <a:prstGeom prst="rect">
-            <a:avLst/>
-          </a:prstGeom>
-          <a:noFill/>
-          <a:ln/>
-        </p:spPr>
-        <p:txBody>
-          <a:bodyPr wrap="square" lIns="0" tIns="0" rIns="0" bIns="0" rtlCol="0" anchor="ctr"/>
-          <a:lstStyle/>
-          <a:p>
-            <a:pPr algn="l" indent="0" marL="0">
-              <a:buNone/>
-            </a:pPr>
-            <a:r>
-              <a:rPr lang="en-US" sz="1800" b="1" dirty="0">
-                <a:solidFill>
-                  <a:srgbClr val="FFFFFF"/>
-                </a:solidFill>
-                <a:latin typeface="Arial" pitchFamily="34" charset="0"/>
-                <a:ea typeface="Arial" pitchFamily="34" charset="-122"/>
-                <a:cs typeface="Arial" pitchFamily="34" charset="-120"/>
-              </a:rPr>
-              <a:t>Auditar el error de programación</a:t>
-            </a:r>
-            <a:endParaRPr lang="en-US" sz="1800" dirty="0"/>
-          </a:p>
-        </p:txBody>
-      </p:sp>
-      <p:sp>
-        <p:nvSpPr>
-          <p:cNvPr id="20" name="Text 17"/>
-          <p:cNvSpPr txBox="1"/>
-          <p:nvPr/>
-        </p:nvSpPr>
-        <p:spPr>
-          <a:xfrm>
-            <a:off x="1417320" y="3886200"/>
-            <a:ext cx="9994392" cy="310896"/>
-          </a:xfrm>
-          <a:prstGeom prst="rect">
-            <a:avLst/>
-          </a:prstGeom>
-          <a:noFill/>
-          <a:ln/>
-        </p:spPr>
-        <p:txBody>
-          <a:bodyPr wrap="square" lIns="0" tIns="0" rIns="0" bIns="0" rtlCol="0" anchor="ctr"/>
-          <a:lstStyle/>
-          <a:p>
-            <a:pPr algn="l" indent="0" marL="0">
-              <a:buNone/>
-            </a:pPr>
-            <a:r>
-              <a:rPr lang="en-US" sz="1300" dirty="0">
+          <p:cNvPr id="34" name="Text 31"/>
+          <p:cNvSpPr txBox="1"/>
+          <p:nvPr/>
+        </p:nvSpPr>
+        <p:spPr>
+          <a:xfrm>
+            <a:off x="8330184" y="4852416"/>
+            <a:ext cx="3054096" cy="716280"/>
+          </a:xfrm>
+          <a:prstGeom prst="rect">
+            <a:avLst/>
+          </a:prstGeom>
+          <a:noFill/>
+          <a:ln/>
+        </p:spPr>
+        <p:txBody>
+          <a:bodyPr wrap="square" lIns="0" tIns="0" rIns="0" bIns="0" rtlCol="0" anchor="t"/>
+          <a:lstStyle/>
+          <a:p>
+            <a:pPr algn="l" indent="0" marL="0">
+              <a:buNone/>
+            </a:pPr>
+            <a:r>
+              <a:rPr lang="en-US" sz="1250" dirty="0">
                 <a:solidFill>
                   <a:srgbClr val="94AACC"/>
                 </a:solidFill>
@@ -6535,143 +10480,38 @@
                 <a:ea typeface="Arial" pitchFamily="34" charset="-122"/>
                 <a:cs typeface="Arial" pitchFamily="34" charset="-120"/>
               </a:rPr>
-              <a:t>7 casos, 3 cirugías mayores directas · separar error de agenda de indicación o insumo</a:t>
-            </a:r>
-            <a:endParaRPr lang="en-US" sz="1300" dirty="0"/>
-          </a:p>
-        </p:txBody>
-      </p:sp>
-      <p:sp>
-        <p:nvSpPr>
-          <p:cNvPr id="21" name="Shape 18"/>
-          <p:cNvSpPr/>
-          <p:nvPr/>
-        </p:nvSpPr>
-        <p:spPr>
-          <a:xfrm>
-            <a:off x="548640" y="4306824"/>
-            <a:ext cx="11091672" cy="749808"/>
-          </a:xfrm>
-          <a:prstGeom prst="roundRect">
-            <a:avLst>
-              <a:gd name="adj" fmla="val 9756"/>
-            </a:avLst>
-          </a:prstGeom>
-          <a:solidFill>
-            <a:srgbClr val="0F1930"/>
-          </a:solidFill>
-          <a:ln w="19050">
-            <a:solidFill>
-              <a:srgbClr val="F5B342"/>
-            </a:solidFill>
-            <a:prstDash val="solid"/>
-          </a:ln>
-        </p:spPr>
-      </p:sp>
-      <p:sp>
-        <p:nvSpPr>
-          <p:cNvPr id="22" name="Text 19"/>
-          <p:cNvSpPr txBox="1"/>
-          <p:nvPr/>
-        </p:nvSpPr>
-        <p:spPr>
-          <a:xfrm>
-            <a:off x="777240" y="4306824"/>
-            <a:ext cx="548640" cy="749808"/>
-          </a:xfrm>
-          <a:prstGeom prst="rect">
-            <a:avLst/>
-          </a:prstGeom>
-          <a:noFill/>
-          <a:ln/>
-        </p:spPr>
-        <p:txBody>
-          <a:bodyPr wrap="square" lIns="0" tIns="0" rIns="0" bIns="0" rtlCol="0" anchor="ctr"/>
-          <a:lstStyle/>
-          <a:p>
-            <a:pPr algn="l" indent="0" marL="0">
-              <a:buNone/>
-            </a:pPr>
-            <a:r>
-              <a:rPr lang="en-US" sz="3000" b="1" dirty="0">
-                <a:solidFill>
-                  <a:srgbClr val="F5B342"/>
-                </a:solidFill>
-                <a:latin typeface="Arial" pitchFamily="34" charset="0"/>
-                <a:ea typeface="Arial" pitchFamily="34" charset="-122"/>
-                <a:cs typeface="Arial" pitchFamily="34" charset="-120"/>
-              </a:rPr>
-              <a:t>4</a:t>
-            </a:r>
-            <a:endParaRPr lang="en-US" sz="3000" dirty="0"/>
-          </a:p>
-        </p:txBody>
-      </p:sp>
-      <p:sp>
-        <p:nvSpPr>
-          <p:cNvPr id="23" name="Text 20"/>
-          <p:cNvSpPr txBox="1"/>
-          <p:nvPr/>
-        </p:nvSpPr>
-        <p:spPr>
-          <a:xfrm>
-            <a:off x="1417320" y="4379976"/>
-            <a:ext cx="7772400" cy="365760"/>
-          </a:xfrm>
-          <a:prstGeom prst="rect">
-            <a:avLst/>
-          </a:prstGeom>
-          <a:noFill/>
-          <a:ln/>
-        </p:spPr>
-        <p:txBody>
-          <a:bodyPr wrap="square" lIns="0" tIns="0" rIns="0" bIns="0" rtlCol="0" anchor="ctr"/>
-          <a:lstStyle/>
-          <a:p>
-            <a:pPr algn="l" indent="0" marL="0">
-              <a:buNone/>
-            </a:pPr>
-            <a:r>
-              <a:rPr lang="en-US" sz="1800" b="1" dirty="0">
-                <a:solidFill>
-                  <a:srgbClr val="FFFFFF"/>
-                </a:solidFill>
-                <a:latin typeface="Arial" pitchFamily="34" charset="0"/>
-                <a:ea typeface="Arial" pitchFamily="34" charset="-122"/>
-                <a:cs typeface="Arial" pitchFamily="34" charset="-120"/>
-              </a:rPr>
-              <a:t>Consentimiento y ayuno antes de la tabla</a:t>
-            </a:r>
-            <a:endParaRPr lang="en-US" sz="1800" dirty="0"/>
-          </a:p>
-        </p:txBody>
-      </p:sp>
-      <p:sp>
-        <p:nvSpPr>
-          <p:cNvPr id="24" name="Text 21"/>
-          <p:cNvSpPr txBox="1"/>
-          <p:nvPr/>
-        </p:nvSpPr>
-        <p:spPr>
-          <a:xfrm>
-            <a:off x="1417320" y="4727448"/>
-            <a:ext cx="9994392" cy="310896"/>
-          </a:xfrm>
-          <a:prstGeom prst="rect">
-            <a:avLst/>
-          </a:prstGeom>
-          <a:noFill/>
-          <a:ln/>
-        </p:spPr>
-        <p:txBody>
-          <a:bodyPr wrap="square" lIns="0" tIns="0" rIns="0" bIns="0" rtlCol="0" anchor="ctr"/>
-          <a:lstStyle/>
-          <a:p>
-            <a:pPr algn="l" indent="0" marL="0">
-              <a:buNone/>
-            </a:pPr>
-            <a:r>
-              <a:rPr lang="en-US" sz="1300" dirty="0">
+              <a:t>la franja completa en los 3 pabellones × 21 días (76,5 h); 48 con Pabellón 2 completo</a:t>
+            </a:r>
+            <a:endParaRPr lang="en-US" sz="1250" dirty="0"/>
+          </a:p>
+        </p:txBody>
+      </p:sp>
+      <p:sp>
+        <p:nvSpPr>
+          <p:cNvPr id="35" name="Text 32"/>
+          <p:cNvSpPr txBox="1"/>
+          <p:nvPr/>
+        </p:nvSpPr>
+        <p:spPr>
+          <a:xfrm>
+            <a:off x="548640" y="5943600"/>
+            <a:ext cx="11091672" cy="411480"/>
+          </a:xfrm>
+          <a:prstGeom prst="rect">
+            <a:avLst/>
+          </a:prstGeom>
+          <a:noFill/>
+          <a:ln/>
+        </p:spPr>
+        <p:txBody>
+          <a:bodyPr wrap="square" lIns="0" tIns="0" rIns="0" bIns="0" rtlCol="0" anchor="t"/>
+          <a:lstStyle/>
+          <a:p>
+            <a:pPr algn="l" indent="0" marL="0">
+              <a:buNone/>
+            </a:pPr>
+            <a:r>
+              <a:rPr lang="en-US" sz="1200" dirty="0">
                 <a:solidFill>
                   <a:srgbClr val="94AACC"/>
                 </a:solidFill>
@@ -6679,153 +10519,9 @@
                 <a:ea typeface="Arial" pitchFamily="34" charset="-122"/>
                 <a:cs typeface="Arial" pitchFamily="34" charset="-120"/>
               </a:rPr>
-              <a:t>medida del 31 de agosto: sin consentimiento firmado no hay tabla</a:t>
-            </a:r>
-            <a:endParaRPr lang="en-US" sz="1300" dirty="0"/>
-          </a:p>
-        </p:txBody>
-      </p:sp>
-      <p:sp>
-        <p:nvSpPr>
-          <p:cNvPr id="25" name="Shape 22"/>
-          <p:cNvSpPr/>
-          <p:nvPr/>
-        </p:nvSpPr>
-        <p:spPr>
-          <a:xfrm>
-            <a:off x="548640" y="5148072"/>
-            <a:ext cx="11091672" cy="749808"/>
-          </a:xfrm>
-          <a:prstGeom prst="roundRect">
-            <a:avLst>
-              <a:gd name="adj" fmla="val 9756"/>
-            </a:avLst>
-          </a:prstGeom>
-          <a:solidFill>
-            <a:srgbClr val="0F1930"/>
-          </a:solidFill>
-          <a:ln w="19050">
-            <a:solidFill>
-              <a:srgbClr val="2DD4BF"/>
-            </a:solidFill>
-            <a:prstDash val="solid"/>
-          </a:ln>
-        </p:spPr>
-      </p:sp>
-      <p:sp>
-        <p:nvSpPr>
-          <p:cNvPr id="26" name="Text 23"/>
-          <p:cNvSpPr txBox="1"/>
-          <p:nvPr/>
-        </p:nvSpPr>
-        <p:spPr>
-          <a:xfrm>
-            <a:off x="777240" y="5148072"/>
-            <a:ext cx="548640" cy="749808"/>
-          </a:xfrm>
-          <a:prstGeom prst="rect">
-            <a:avLst/>
-          </a:prstGeom>
-          <a:noFill/>
-          <a:ln/>
-        </p:spPr>
-        <p:txBody>
-          <a:bodyPr wrap="square" lIns="0" tIns="0" rIns="0" bIns="0" rtlCol="0" anchor="ctr"/>
-          <a:lstStyle/>
-          <a:p>
-            <a:pPr algn="l" indent="0" marL="0">
-              <a:buNone/>
-            </a:pPr>
-            <a:r>
-              <a:rPr lang="en-US" sz="3000" b="1" dirty="0">
-                <a:solidFill>
-                  <a:srgbClr val="2DD4BF"/>
-                </a:solidFill>
-                <a:latin typeface="Arial" pitchFamily="34" charset="0"/>
-                <a:ea typeface="Arial" pitchFamily="34" charset="-122"/>
-                <a:cs typeface="Arial" pitchFamily="34" charset="-120"/>
-              </a:rPr>
-              <a:t>5</a:t>
-            </a:r>
-            <a:endParaRPr lang="en-US" sz="3000" dirty="0"/>
-          </a:p>
-        </p:txBody>
-      </p:sp>
-      <p:sp>
-        <p:nvSpPr>
-          <p:cNvPr id="27" name="Text 24"/>
-          <p:cNvSpPr txBox="1"/>
-          <p:nvPr/>
-        </p:nvSpPr>
-        <p:spPr>
-          <a:xfrm>
-            <a:off x="1417320" y="5221224"/>
-            <a:ext cx="7772400" cy="365760"/>
-          </a:xfrm>
-          <a:prstGeom prst="rect">
-            <a:avLst/>
-          </a:prstGeom>
-          <a:noFill/>
-          <a:ln/>
-        </p:spPr>
-        <p:txBody>
-          <a:bodyPr wrap="square" lIns="0" tIns="0" rIns="0" bIns="0" rtlCol="0" anchor="ctr"/>
-          <a:lstStyle/>
-          <a:p>
-            <a:pPr algn="l" indent="0" marL="0">
-              <a:buNone/>
-            </a:pPr>
-            <a:r>
-              <a:rPr lang="en-US" sz="1800" b="1" dirty="0">
-                <a:solidFill>
-                  <a:srgbClr val="FFFFFF"/>
-                </a:solidFill>
-                <a:latin typeface="Arial" pitchFamily="34" charset="0"/>
-                <a:ea typeface="Arial" pitchFamily="34" charset="-122"/>
-                <a:cs typeface="Arial" pitchFamily="34" charset="-120"/>
-              </a:rPr>
-              <a:t>Registro operable y piloto de almuerzo</a:t>
-            </a:r>
-            <a:endParaRPr lang="en-US" sz="1800" dirty="0"/>
-          </a:p>
-        </p:txBody>
-      </p:sp>
-      <p:sp>
-        <p:nvSpPr>
-          <p:cNvPr id="28" name="Text 25"/>
-          <p:cNvSpPr txBox="1"/>
-          <p:nvPr/>
-        </p:nvSpPr>
-        <p:spPr>
-          <a:xfrm>
-            <a:off x="1417320" y="5568696"/>
-            <a:ext cx="9994392" cy="310896"/>
-          </a:xfrm>
-          <a:prstGeom prst="rect">
-            <a:avLst/>
-          </a:prstGeom>
-          <a:noFill/>
-          <a:ln/>
-        </p:spPr>
-        <p:txBody>
-          <a:bodyPr wrap="square" lIns="0" tIns="0" rIns="0" bIns="0" rtlCol="0" anchor="ctr"/>
-          <a:lstStyle/>
-          <a:p>
-            <a:pPr algn="l" indent="0" marL="0">
-              <a:buNone/>
-            </a:pPr>
-            <a:r>
-              <a:rPr lang="en-US" sz="1300" dirty="0">
-                <a:solidFill>
-                  <a:srgbClr val="94AACC"/>
-                </a:solidFill>
-                <a:latin typeface="Arial" pitchFamily="34" charset="0"/>
-                <a:ea typeface="Arial" pitchFamily="34" charset="-122"/>
-                <a:cs typeface="Arial" pitchFamily="34" charset="-120"/>
-              </a:rPr>
-              <a:t>campos de julio en CancelOS · cobertura de 4 semanas con hitos de sala, paciente y URPA</a:t>
-            </a:r>
-            <a:endParaRPr lang="en-US" sz="1300" dirty="0"/>
+              <a:t>Al año: 130 a 200 cirugías más en Quilpué; 300 a 470 en el HPMM con 7 pabellones. Requiere paciente preparado, equipo, instrumental y recuperación: no se suman fragmentos de salas o días distintos.</a:t>
+            </a:r>
+            <a:endParaRPr lang="en-US" sz="1200" dirty="0"/>
           </a:p>
         </p:txBody>
       </p:sp>
@@ -6962,7 +10658,7 @@
                 <a:ea typeface="Arial" pitchFamily="34" charset="-122"/>
                 <a:cs typeface="Arial" pitchFamily="34" charset="-120"/>
               </a:rPr>
-              <a:t>13  ·  FUENTES Y ANEXO</a:t>
+              <a:t>13  ·  HORARIO CONTINUO · CÓMO</a:t>
             </a:r>
             <a:endParaRPr lang="en-US" sz="1200" dirty="0"/>
           </a:p>
@@ -7001,7 +10697,7 @@
                 <a:ea typeface="Arial" pitchFamily="34" charset="-122"/>
                 <a:cs typeface="Arial" pitchFamily="34" charset="-120"/>
               </a:rPr>
-              <a:t>De dónde salen las cifras</a:t>
+              <a:t>Relevo en escalera y un piloto de cuatro semanas</a:t>
             </a:r>
             <a:endParaRPr lang="en-US" sz="3200" dirty="0"/>
           </a:p>
@@ -7040,7 +10736,3451 @@
                 <a:ea typeface="Arial" pitchFamily="34" charset="-122"/>
                 <a:cs typeface="Arial" pitchFamily="34" charset="-120"/>
               </a:rPr>
-              <a:t>14  /  14</a:t>
+              <a:t>14  /  17</a:t>
+            </a:r>
+            <a:endParaRPr lang="en-US" sz="1000" dirty="0"/>
+          </a:p>
+        </p:txBody>
+      </p:sp>
+      <p:sp>
+        <p:nvSpPr>
+          <p:cNvPr id="7" name="Text 5"/>
+          <p:cNvSpPr txBox="1"/>
+          <p:nvPr/>
+        </p:nvSpPr>
+        <p:spPr>
+          <a:xfrm>
+            <a:off x="5029200" y="6446520"/>
+            <a:ext cx="6611112" cy="274320"/>
+          </a:xfrm>
+          <a:prstGeom prst="rect">
+            <a:avLst/>
+          </a:prstGeom>
+          <a:noFill/>
+          <a:ln/>
+        </p:spPr>
+        <p:txBody>
+          <a:bodyPr wrap="square" lIns="0" tIns="0" rIns="0" bIns="0" rtlCol="0" anchor="ctr"/>
+          <a:lstStyle/>
+          <a:p>
+            <a:pPr algn="r" indent="0" marL="0">
+              <a:buNone/>
+            </a:pPr>
+            <a:r>
+              <a:rPr lang="en-US" sz="1000" spc="200" kern="0" dirty="0">
+                <a:solidFill>
+                  <a:srgbClr val="94AACC"/>
+                </a:solidFill>
+                <a:latin typeface="Arial" pitchFamily="34" charset="0"/>
+                <a:ea typeface="Arial" pitchFamily="34" charset="-122"/>
+                <a:cs typeface="Arial" pitchFamily="34" charset="-120"/>
+              </a:rPr>
+              <a:t>HQ  ·  COMITÉ QUIRÚRGICO  ·  SEPTIEMBRE 2026  ·  VERSIÓN BREVE</a:t>
+            </a:r>
+            <a:endParaRPr lang="en-US" sz="1000" dirty="0"/>
+          </a:p>
+        </p:txBody>
+      </p:sp>
+      <p:sp>
+        <p:nvSpPr>
+          <p:cNvPr id="9" name="Text 6"/>
+          <p:cNvSpPr txBox="1"/>
+          <p:nvPr/>
+        </p:nvSpPr>
+        <p:spPr>
+          <a:xfrm>
+            <a:off x="548640" y="1691640"/>
+            <a:ext cx="7315200" cy="274320"/>
+          </a:xfrm>
+          <a:prstGeom prst="rect">
+            <a:avLst/>
+          </a:prstGeom>
+          <a:noFill/>
+          <a:ln/>
+        </p:spPr>
+        <p:txBody>
+          <a:bodyPr wrap="square" lIns="0" tIns="0" rIns="0" bIns="0" rtlCol="0" anchor="ctr"/>
+          <a:lstStyle/>
+          <a:p>
+            <a:pPr algn="l" indent="0" marL="0">
+              <a:buNone/>
+            </a:pPr>
+            <a:r>
+              <a:rPr lang="en-US" sz="1100" b="1" spc="200" kern="0" dirty="0">
+                <a:solidFill>
+                  <a:srgbClr val="BCCDE8"/>
+                </a:solidFill>
+                <a:latin typeface="Arial" pitchFamily="34" charset="0"/>
+                <a:ea typeface="Arial" pitchFamily="34" charset="-122"/>
+                <a:cs typeface="Arial" pitchFamily="34" charset="-120"/>
+              </a:rPr>
+              <a:t>RELEVO ESCALONADO · UN EQUIPO CUBRE 45 MIN EN CADA PABELLÓN</a:t>
+            </a:r>
+            <a:endParaRPr lang="en-US" sz="1100" dirty="0"/>
+          </a:p>
+        </p:txBody>
+      </p:sp>
+      <p:sp>
+        <p:nvSpPr>
+          <p:cNvPr id="10" name="Shape 7"/>
+          <p:cNvSpPr/>
+          <p:nvPr/>
+        </p:nvSpPr>
+        <p:spPr>
+          <a:xfrm>
+            <a:off x="1737360" y="2011680"/>
+            <a:ext cx="0" cy="2148840"/>
+          </a:xfrm>
+          <a:prstGeom prst="line">
+            <a:avLst/>
+          </a:prstGeom>
+          <a:noFill/>
+          <a:ln w="6350">
+            <a:solidFill>
+              <a:srgbClr val="22304A"/>
+            </a:solidFill>
+            <a:prstDash val="dash"/>
+          </a:ln>
+        </p:spPr>
+      </p:sp>
+      <p:sp>
+        <p:nvSpPr>
+          <p:cNvPr id="11" name="Text 8"/>
+          <p:cNvSpPr txBox="1"/>
+          <p:nvPr/>
+        </p:nvSpPr>
+        <p:spPr>
+          <a:xfrm>
+            <a:off x="1417320" y="4160520"/>
+            <a:ext cx="640080" cy="228600"/>
+          </a:xfrm>
+          <a:prstGeom prst="rect">
+            <a:avLst/>
+          </a:prstGeom>
+          <a:noFill/>
+          <a:ln/>
+        </p:spPr>
+        <p:txBody>
+          <a:bodyPr wrap="square" lIns="0" tIns="0" rIns="0" bIns="0" rtlCol="0" anchor="ctr"/>
+          <a:lstStyle/>
+          <a:p>
+            <a:pPr algn="ctr" indent="0" marL="0">
+              <a:buNone/>
+            </a:pPr>
+            <a:r>
+              <a:rPr lang="en-US" sz="1000" dirty="0">
+                <a:solidFill>
+                  <a:srgbClr val="94AACC"/>
+                </a:solidFill>
+                <a:latin typeface="Arial" pitchFamily="34" charset="0"/>
+                <a:ea typeface="Arial" pitchFamily="34" charset="-122"/>
+                <a:cs typeface="Arial" pitchFamily="34" charset="-120"/>
+              </a:rPr>
+              <a:t>11:30</a:t>
+            </a:r>
+            <a:endParaRPr lang="en-US" sz="1000" dirty="0"/>
+          </a:p>
+        </p:txBody>
+      </p:sp>
+      <p:sp>
+        <p:nvSpPr>
+          <p:cNvPr id="12" name="Shape 9"/>
+          <p:cNvSpPr/>
+          <p:nvPr/>
+        </p:nvSpPr>
+        <p:spPr>
+          <a:xfrm>
+            <a:off x="2623625" y="2011680"/>
+            <a:ext cx="0" cy="2148840"/>
+          </a:xfrm>
+          <a:prstGeom prst="line">
+            <a:avLst/>
+          </a:prstGeom>
+          <a:noFill/>
+          <a:ln w="6350">
+            <a:solidFill>
+              <a:srgbClr val="22304A"/>
+            </a:solidFill>
+            <a:prstDash val="dash"/>
+          </a:ln>
+        </p:spPr>
+      </p:sp>
+      <p:sp>
+        <p:nvSpPr>
+          <p:cNvPr id="13" name="Text 10"/>
+          <p:cNvSpPr txBox="1"/>
+          <p:nvPr/>
+        </p:nvSpPr>
+        <p:spPr>
+          <a:xfrm>
+            <a:off x="2303585" y="4160520"/>
+            <a:ext cx="640080" cy="228600"/>
+          </a:xfrm>
+          <a:prstGeom prst="rect">
+            <a:avLst/>
+          </a:prstGeom>
+          <a:noFill/>
+          <a:ln/>
+        </p:spPr>
+        <p:txBody>
+          <a:bodyPr wrap="square" lIns="0" tIns="0" rIns="0" bIns="0" rtlCol="0" anchor="ctr"/>
+          <a:lstStyle/>
+          <a:p>
+            <a:pPr algn="ctr" indent="0" marL="0">
+              <a:buNone/>
+            </a:pPr>
+            <a:r>
+              <a:rPr lang="en-US" sz="1000" dirty="0">
+                <a:solidFill>
+                  <a:srgbClr val="94AACC"/>
+                </a:solidFill>
+                <a:latin typeface="Arial" pitchFamily="34" charset="0"/>
+                <a:ea typeface="Arial" pitchFamily="34" charset="-122"/>
+                <a:cs typeface="Arial" pitchFamily="34" charset="-120"/>
+              </a:rPr>
+              <a:t>12:00</a:t>
+            </a:r>
+            <a:endParaRPr lang="en-US" sz="1000" dirty="0"/>
+          </a:p>
+        </p:txBody>
+      </p:sp>
+      <p:sp>
+        <p:nvSpPr>
+          <p:cNvPr id="14" name="Shape 11"/>
+          <p:cNvSpPr/>
+          <p:nvPr/>
+        </p:nvSpPr>
+        <p:spPr>
+          <a:xfrm>
+            <a:off x="3509889" y="2011680"/>
+            <a:ext cx="0" cy="2148840"/>
+          </a:xfrm>
+          <a:prstGeom prst="line">
+            <a:avLst/>
+          </a:prstGeom>
+          <a:noFill/>
+          <a:ln w="6350">
+            <a:solidFill>
+              <a:srgbClr val="22304A"/>
+            </a:solidFill>
+            <a:prstDash val="dash"/>
+          </a:ln>
+        </p:spPr>
+      </p:sp>
+      <p:sp>
+        <p:nvSpPr>
+          <p:cNvPr id="15" name="Text 12"/>
+          <p:cNvSpPr txBox="1"/>
+          <p:nvPr/>
+        </p:nvSpPr>
+        <p:spPr>
+          <a:xfrm>
+            <a:off x="3189849" y="4160520"/>
+            <a:ext cx="640080" cy="228600"/>
+          </a:xfrm>
+          <a:prstGeom prst="rect">
+            <a:avLst/>
+          </a:prstGeom>
+          <a:noFill/>
+          <a:ln/>
+        </p:spPr>
+        <p:txBody>
+          <a:bodyPr wrap="square" lIns="0" tIns="0" rIns="0" bIns="0" rtlCol="0" anchor="ctr"/>
+          <a:lstStyle/>
+          <a:p>
+            <a:pPr algn="ctr" indent="0" marL="0">
+              <a:buNone/>
+            </a:pPr>
+            <a:r>
+              <a:rPr lang="en-US" sz="1000" dirty="0">
+                <a:solidFill>
+                  <a:srgbClr val="94AACC"/>
+                </a:solidFill>
+                <a:latin typeface="Arial" pitchFamily="34" charset="0"/>
+                <a:ea typeface="Arial" pitchFamily="34" charset="-122"/>
+                <a:cs typeface="Arial" pitchFamily="34" charset="-120"/>
+              </a:rPr>
+              <a:t>12:30</a:t>
+            </a:r>
+            <a:endParaRPr lang="en-US" sz="1000" dirty="0"/>
+          </a:p>
+        </p:txBody>
+      </p:sp>
+      <p:sp>
+        <p:nvSpPr>
+          <p:cNvPr id="16" name="Shape 13"/>
+          <p:cNvSpPr/>
+          <p:nvPr/>
+        </p:nvSpPr>
+        <p:spPr>
+          <a:xfrm>
+            <a:off x="4396154" y="2011680"/>
+            <a:ext cx="0" cy="2148840"/>
+          </a:xfrm>
+          <a:prstGeom prst="line">
+            <a:avLst/>
+          </a:prstGeom>
+          <a:noFill/>
+          <a:ln w="6350">
+            <a:solidFill>
+              <a:srgbClr val="22304A"/>
+            </a:solidFill>
+            <a:prstDash val="dash"/>
+          </a:ln>
+        </p:spPr>
+      </p:sp>
+      <p:sp>
+        <p:nvSpPr>
+          <p:cNvPr id="17" name="Text 14"/>
+          <p:cNvSpPr txBox="1"/>
+          <p:nvPr/>
+        </p:nvSpPr>
+        <p:spPr>
+          <a:xfrm>
+            <a:off x="4076114" y="4160520"/>
+            <a:ext cx="640080" cy="228600"/>
+          </a:xfrm>
+          <a:prstGeom prst="rect">
+            <a:avLst/>
+          </a:prstGeom>
+          <a:noFill/>
+          <a:ln/>
+        </p:spPr>
+        <p:txBody>
+          <a:bodyPr wrap="square" lIns="0" tIns="0" rIns="0" bIns="0" rtlCol="0" anchor="ctr"/>
+          <a:lstStyle/>
+          <a:p>
+            <a:pPr algn="ctr" indent="0" marL="0">
+              <a:buNone/>
+            </a:pPr>
+            <a:r>
+              <a:rPr lang="en-US" sz="1000" dirty="0">
+                <a:solidFill>
+                  <a:srgbClr val="94AACC"/>
+                </a:solidFill>
+                <a:latin typeface="Arial" pitchFamily="34" charset="0"/>
+                <a:ea typeface="Arial" pitchFamily="34" charset="-122"/>
+                <a:cs typeface="Arial" pitchFamily="34" charset="-120"/>
+              </a:rPr>
+              <a:t>13:00</a:t>
+            </a:r>
+            <a:endParaRPr lang="en-US" sz="1000" dirty="0"/>
+          </a:p>
+        </p:txBody>
+      </p:sp>
+      <p:sp>
+        <p:nvSpPr>
+          <p:cNvPr id="18" name="Shape 15"/>
+          <p:cNvSpPr/>
+          <p:nvPr/>
+        </p:nvSpPr>
+        <p:spPr>
+          <a:xfrm>
+            <a:off x="5282418" y="2011680"/>
+            <a:ext cx="0" cy="2148840"/>
+          </a:xfrm>
+          <a:prstGeom prst="line">
+            <a:avLst/>
+          </a:prstGeom>
+          <a:noFill/>
+          <a:ln w="6350">
+            <a:solidFill>
+              <a:srgbClr val="22304A"/>
+            </a:solidFill>
+            <a:prstDash val="dash"/>
+          </a:ln>
+        </p:spPr>
+      </p:sp>
+      <p:sp>
+        <p:nvSpPr>
+          <p:cNvPr id="19" name="Text 16"/>
+          <p:cNvSpPr txBox="1"/>
+          <p:nvPr/>
+        </p:nvSpPr>
+        <p:spPr>
+          <a:xfrm>
+            <a:off x="4962378" y="4160520"/>
+            <a:ext cx="640080" cy="228600"/>
+          </a:xfrm>
+          <a:prstGeom prst="rect">
+            <a:avLst/>
+          </a:prstGeom>
+          <a:noFill/>
+          <a:ln/>
+        </p:spPr>
+        <p:txBody>
+          <a:bodyPr wrap="square" lIns="0" tIns="0" rIns="0" bIns="0" rtlCol="0" anchor="ctr"/>
+          <a:lstStyle/>
+          <a:p>
+            <a:pPr algn="ctr" indent="0" marL="0">
+              <a:buNone/>
+            </a:pPr>
+            <a:r>
+              <a:rPr lang="en-US" sz="1000" dirty="0">
+                <a:solidFill>
+                  <a:srgbClr val="94AACC"/>
+                </a:solidFill>
+                <a:latin typeface="Arial" pitchFamily="34" charset="0"/>
+                <a:ea typeface="Arial" pitchFamily="34" charset="-122"/>
+                <a:cs typeface="Arial" pitchFamily="34" charset="-120"/>
+              </a:rPr>
+              <a:t>13:30</a:t>
+            </a:r>
+            <a:endParaRPr lang="en-US" sz="1000" dirty="0"/>
+          </a:p>
+        </p:txBody>
+      </p:sp>
+      <p:sp>
+        <p:nvSpPr>
+          <p:cNvPr id="20" name="Shape 17"/>
+          <p:cNvSpPr/>
+          <p:nvPr/>
+        </p:nvSpPr>
+        <p:spPr>
+          <a:xfrm>
+            <a:off x="6168683" y="2011680"/>
+            <a:ext cx="0" cy="2148840"/>
+          </a:xfrm>
+          <a:prstGeom prst="line">
+            <a:avLst/>
+          </a:prstGeom>
+          <a:noFill/>
+          <a:ln w="6350">
+            <a:solidFill>
+              <a:srgbClr val="22304A"/>
+            </a:solidFill>
+            <a:prstDash val="dash"/>
+          </a:ln>
+        </p:spPr>
+      </p:sp>
+      <p:sp>
+        <p:nvSpPr>
+          <p:cNvPr id="21" name="Text 18"/>
+          <p:cNvSpPr txBox="1"/>
+          <p:nvPr/>
+        </p:nvSpPr>
+        <p:spPr>
+          <a:xfrm>
+            <a:off x="5848643" y="4160520"/>
+            <a:ext cx="640080" cy="228600"/>
+          </a:xfrm>
+          <a:prstGeom prst="rect">
+            <a:avLst/>
+          </a:prstGeom>
+          <a:noFill/>
+          <a:ln/>
+        </p:spPr>
+        <p:txBody>
+          <a:bodyPr wrap="square" lIns="0" tIns="0" rIns="0" bIns="0" rtlCol="0" anchor="ctr"/>
+          <a:lstStyle/>
+          <a:p>
+            <a:pPr algn="ctr" indent="0" marL="0">
+              <a:buNone/>
+            </a:pPr>
+            <a:r>
+              <a:rPr lang="en-US" sz="1000" dirty="0">
+                <a:solidFill>
+                  <a:srgbClr val="94AACC"/>
+                </a:solidFill>
+                <a:latin typeface="Arial" pitchFamily="34" charset="0"/>
+                <a:ea typeface="Arial" pitchFamily="34" charset="-122"/>
+                <a:cs typeface="Arial" pitchFamily="34" charset="-120"/>
+              </a:rPr>
+              <a:t>14:00</a:t>
+            </a:r>
+            <a:endParaRPr lang="en-US" sz="1000" dirty="0"/>
+          </a:p>
+        </p:txBody>
+      </p:sp>
+      <p:sp>
+        <p:nvSpPr>
+          <p:cNvPr id="22" name="Shape 19"/>
+          <p:cNvSpPr/>
+          <p:nvPr/>
+        </p:nvSpPr>
+        <p:spPr>
+          <a:xfrm>
+            <a:off x="7054948" y="2011680"/>
+            <a:ext cx="0" cy="2148840"/>
+          </a:xfrm>
+          <a:prstGeom prst="line">
+            <a:avLst/>
+          </a:prstGeom>
+          <a:noFill/>
+          <a:ln w="6350">
+            <a:solidFill>
+              <a:srgbClr val="22304A"/>
+            </a:solidFill>
+            <a:prstDash val="dash"/>
+          </a:ln>
+        </p:spPr>
+      </p:sp>
+      <p:sp>
+        <p:nvSpPr>
+          <p:cNvPr id="23" name="Text 20"/>
+          <p:cNvSpPr txBox="1"/>
+          <p:nvPr/>
+        </p:nvSpPr>
+        <p:spPr>
+          <a:xfrm>
+            <a:off x="6734908" y="4160520"/>
+            <a:ext cx="640080" cy="228600"/>
+          </a:xfrm>
+          <a:prstGeom prst="rect">
+            <a:avLst/>
+          </a:prstGeom>
+          <a:noFill/>
+          <a:ln/>
+        </p:spPr>
+        <p:txBody>
+          <a:bodyPr wrap="square" lIns="0" tIns="0" rIns="0" bIns="0" rtlCol="0" anchor="ctr"/>
+          <a:lstStyle/>
+          <a:p>
+            <a:pPr algn="ctr" indent="0" marL="0">
+              <a:buNone/>
+            </a:pPr>
+            <a:r>
+              <a:rPr lang="en-US" sz="1000" dirty="0">
+                <a:solidFill>
+                  <a:srgbClr val="94AACC"/>
+                </a:solidFill>
+                <a:latin typeface="Arial" pitchFamily="34" charset="0"/>
+                <a:ea typeface="Arial" pitchFamily="34" charset="-122"/>
+                <a:cs typeface="Arial" pitchFamily="34" charset="-120"/>
+              </a:rPr>
+              <a:t>14:30</a:t>
+            </a:r>
+            <a:endParaRPr lang="en-US" sz="1000" dirty="0"/>
+          </a:p>
+        </p:txBody>
+      </p:sp>
+      <p:sp>
+        <p:nvSpPr>
+          <p:cNvPr id="24" name="Shape 21"/>
+          <p:cNvSpPr/>
+          <p:nvPr/>
+        </p:nvSpPr>
+        <p:spPr>
+          <a:xfrm>
+            <a:off x="3509889" y="2011680"/>
+            <a:ext cx="2658794" cy="2148840"/>
+          </a:xfrm>
+          <a:prstGeom prst="rect">
+            <a:avLst/>
+          </a:prstGeom>
+          <a:solidFill>
+            <a:srgbClr val="F5B342">
+              <a:alpha val="10000"/>
+            </a:srgbClr>
+          </a:solidFill>
+          <a:ln/>
+        </p:spPr>
+      </p:sp>
+      <p:sp>
+        <p:nvSpPr>
+          <p:cNvPr id="25" name="Text 22"/>
+          <p:cNvSpPr txBox="1"/>
+          <p:nvPr/>
+        </p:nvSpPr>
+        <p:spPr>
+          <a:xfrm>
+            <a:off x="3509889" y="2011680"/>
+            <a:ext cx="2658794" cy="228600"/>
+          </a:xfrm>
+          <a:prstGeom prst="rect">
+            <a:avLst/>
+          </a:prstGeom>
+          <a:noFill/>
+          <a:ln/>
+        </p:spPr>
+        <p:txBody>
+          <a:bodyPr wrap="square" lIns="0" tIns="0" rIns="0" bIns="0" rtlCol="0" anchor="ctr"/>
+          <a:lstStyle/>
+          <a:p>
+            <a:pPr algn="ctr" indent="0" marL="0">
+              <a:buNone/>
+            </a:pPr>
+            <a:r>
+              <a:rPr lang="en-US" sz="950" dirty="0">
+                <a:solidFill>
+                  <a:srgbClr val="F5B342"/>
+                </a:solidFill>
+                <a:latin typeface="Arial" pitchFamily="34" charset="0"/>
+                <a:ea typeface="Arial" pitchFamily="34" charset="-122"/>
+                <a:cs typeface="Arial" pitchFamily="34" charset="-120"/>
+              </a:rPr>
+              <a:t>franja 12:30–14:00</a:t>
+            </a:r>
+            <a:endParaRPr lang="en-US" sz="950" dirty="0"/>
+          </a:p>
+        </p:txBody>
+      </p:sp>
+      <p:sp>
+        <p:nvSpPr>
+          <p:cNvPr id="26" name="Text 23"/>
+          <p:cNvSpPr txBox="1"/>
+          <p:nvPr/>
+        </p:nvSpPr>
+        <p:spPr>
+          <a:xfrm>
+            <a:off x="548640" y="2331720"/>
+            <a:ext cx="1143000" cy="411480"/>
+          </a:xfrm>
+          <a:prstGeom prst="rect">
+            <a:avLst/>
+          </a:prstGeom>
+          <a:noFill/>
+          <a:ln/>
+        </p:spPr>
+        <p:txBody>
+          <a:bodyPr wrap="square" lIns="0" tIns="0" rIns="0" bIns="0" rtlCol="0" anchor="ctr"/>
+          <a:lstStyle/>
+          <a:p>
+            <a:pPr algn="l" indent="0" marL="0">
+              <a:buNone/>
+            </a:pPr>
+            <a:r>
+              <a:rPr lang="en-US" sz="1300" b="1" dirty="0">
+                <a:solidFill>
+                  <a:srgbClr val="EAF1FB"/>
+                </a:solidFill>
+                <a:latin typeface="Arial" pitchFamily="34" charset="0"/>
+                <a:ea typeface="Arial" pitchFamily="34" charset="-122"/>
+                <a:cs typeface="Arial" pitchFamily="34" charset="-120"/>
+              </a:rPr>
+              <a:t>Pabellón 2</a:t>
+            </a:r>
+            <a:endParaRPr lang="en-US" sz="1300" dirty="0"/>
+          </a:p>
+        </p:txBody>
+      </p:sp>
+      <p:sp>
+        <p:nvSpPr>
+          <p:cNvPr id="27" name="Shape 24"/>
+          <p:cNvSpPr/>
+          <p:nvPr/>
+        </p:nvSpPr>
+        <p:spPr>
+          <a:xfrm>
+            <a:off x="1737360" y="2377440"/>
+            <a:ext cx="5760720" cy="320040"/>
+          </a:xfrm>
+          <a:prstGeom prst="rect">
+            <a:avLst/>
+          </a:prstGeom>
+          <a:solidFill>
+            <a:srgbClr val="2DD4BF">
+              <a:alpha val="35000"/>
+            </a:srgbClr>
+          </a:solidFill>
+          <a:ln/>
+        </p:spPr>
+      </p:sp>
+      <p:sp>
+        <p:nvSpPr>
+          <p:cNvPr id="28" name="Shape 25"/>
+          <p:cNvSpPr/>
+          <p:nvPr/>
+        </p:nvSpPr>
+        <p:spPr>
+          <a:xfrm>
+            <a:off x="2623625" y="2377440"/>
+            <a:ext cx="1329397" cy="320040"/>
+          </a:xfrm>
+          <a:prstGeom prst="rect">
+            <a:avLst/>
+          </a:prstGeom>
+          <a:solidFill>
+            <a:srgbClr val="A78BFA"/>
+          </a:solidFill>
+          <a:ln w="12700">
+            <a:solidFill>
+              <a:srgbClr val="0B1220"/>
+            </a:solidFill>
+            <a:prstDash val="solid"/>
+          </a:ln>
+        </p:spPr>
+      </p:sp>
+      <p:sp>
+        <p:nvSpPr>
+          <p:cNvPr id="29" name="Text 26"/>
+          <p:cNvSpPr txBox="1"/>
+          <p:nvPr/>
+        </p:nvSpPr>
+        <p:spPr>
+          <a:xfrm>
+            <a:off x="2623625" y="2377440"/>
+            <a:ext cx="1329397" cy="320040"/>
+          </a:xfrm>
+          <a:prstGeom prst="rect">
+            <a:avLst/>
+          </a:prstGeom>
+          <a:noFill/>
+          <a:ln/>
+        </p:spPr>
+        <p:txBody>
+          <a:bodyPr wrap="square" lIns="0" tIns="0" rIns="0" bIns="0" rtlCol="0" anchor="ctr"/>
+          <a:lstStyle/>
+          <a:p>
+            <a:pPr algn="ctr" indent="0" marL="0">
+              <a:buNone/>
+            </a:pPr>
+            <a:r>
+              <a:rPr lang="en-US" sz="1050" b="1" dirty="0">
+                <a:solidFill>
+                  <a:srgbClr val="0B1220"/>
+                </a:solidFill>
+                <a:latin typeface="Arial" pitchFamily="34" charset="0"/>
+                <a:ea typeface="Arial" pitchFamily="34" charset="-122"/>
+                <a:cs typeface="Arial" pitchFamily="34" charset="-120"/>
+              </a:rPr>
+              <a:t>relevo</a:t>
+            </a:r>
+            <a:endParaRPr lang="en-US" sz="1050" dirty="0"/>
+          </a:p>
+        </p:txBody>
+      </p:sp>
+      <p:sp>
+        <p:nvSpPr>
+          <p:cNvPr id="30" name="Text 27"/>
+          <p:cNvSpPr txBox="1"/>
+          <p:nvPr/>
+        </p:nvSpPr>
+        <p:spPr>
+          <a:xfrm>
+            <a:off x="548640" y="2926080"/>
+            <a:ext cx="1143000" cy="411480"/>
+          </a:xfrm>
+          <a:prstGeom prst="rect">
+            <a:avLst/>
+          </a:prstGeom>
+          <a:noFill/>
+          <a:ln/>
+        </p:spPr>
+        <p:txBody>
+          <a:bodyPr wrap="square" lIns="0" tIns="0" rIns="0" bIns="0" rtlCol="0" anchor="ctr"/>
+          <a:lstStyle/>
+          <a:p>
+            <a:pPr algn="l" indent="0" marL="0">
+              <a:buNone/>
+            </a:pPr>
+            <a:r>
+              <a:rPr lang="en-US" sz="1300" b="1" dirty="0">
+                <a:solidFill>
+                  <a:srgbClr val="EAF1FB"/>
+                </a:solidFill>
+                <a:latin typeface="Arial" pitchFamily="34" charset="0"/>
+                <a:ea typeface="Arial" pitchFamily="34" charset="-122"/>
+                <a:cs typeface="Arial" pitchFamily="34" charset="-120"/>
+              </a:rPr>
+              <a:t>Pabellón 3</a:t>
+            </a:r>
+            <a:endParaRPr lang="en-US" sz="1300" dirty="0"/>
+          </a:p>
+        </p:txBody>
+      </p:sp>
+      <p:sp>
+        <p:nvSpPr>
+          <p:cNvPr id="31" name="Shape 28"/>
+          <p:cNvSpPr/>
+          <p:nvPr/>
+        </p:nvSpPr>
+        <p:spPr>
+          <a:xfrm>
+            <a:off x="1737360" y="2971800"/>
+            <a:ext cx="5760720" cy="320040"/>
+          </a:xfrm>
+          <a:prstGeom prst="rect">
+            <a:avLst/>
+          </a:prstGeom>
+          <a:solidFill>
+            <a:srgbClr val="2DD4BF">
+              <a:alpha val="35000"/>
+            </a:srgbClr>
+          </a:solidFill>
+          <a:ln/>
+        </p:spPr>
+      </p:sp>
+      <p:sp>
+        <p:nvSpPr>
+          <p:cNvPr id="32" name="Shape 29"/>
+          <p:cNvSpPr/>
+          <p:nvPr/>
+        </p:nvSpPr>
+        <p:spPr>
+          <a:xfrm>
+            <a:off x="3953022" y="2971800"/>
+            <a:ext cx="1329397" cy="320040"/>
+          </a:xfrm>
+          <a:prstGeom prst="rect">
+            <a:avLst/>
+          </a:prstGeom>
+          <a:solidFill>
+            <a:srgbClr val="A78BFA"/>
+          </a:solidFill>
+          <a:ln w="12700">
+            <a:solidFill>
+              <a:srgbClr val="0B1220"/>
+            </a:solidFill>
+            <a:prstDash val="solid"/>
+          </a:ln>
+        </p:spPr>
+      </p:sp>
+      <p:sp>
+        <p:nvSpPr>
+          <p:cNvPr id="33" name="Text 30"/>
+          <p:cNvSpPr txBox="1"/>
+          <p:nvPr/>
+        </p:nvSpPr>
+        <p:spPr>
+          <a:xfrm>
+            <a:off x="3953022" y="2971800"/>
+            <a:ext cx="1329397" cy="320040"/>
+          </a:xfrm>
+          <a:prstGeom prst="rect">
+            <a:avLst/>
+          </a:prstGeom>
+          <a:noFill/>
+          <a:ln/>
+        </p:spPr>
+        <p:txBody>
+          <a:bodyPr wrap="square" lIns="0" tIns="0" rIns="0" bIns="0" rtlCol="0" anchor="ctr"/>
+          <a:lstStyle/>
+          <a:p>
+            <a:pPr algn="ctr" indent="0" marL="0">
+              <a:buNone/>
+            </a:pPr>
+            <a:r>
+              <a:rPr lang="en-US" sz="1050" b="1" dirty="0">
+                <a:solidFill>
+                  <a:srgbClr val="0B1220"/>
+                </a:solidFill>
+                <a:latin typeface="Arial" pitchFamily="34" charset="0"/>
+                <a:ea typeface="Arial" pitchFamily="34" charset="-122"/>
+                <a:cs typeface="Arial" pitchFamily="34" charset="-120"/>
+              </a:rPr>
+              <a:t>relevo</a:t>
+            </a:r>
+            <a:endParaRPr lang="en-US" sz="1050" dirty="0"/>
+          </a:p>
+        </p:txBody>
+      </p:sp>
+      <p:sp>
+        <p:nvSpPr>
+          <p:cNvPr id="34" name="Text 31"/>
+          <p:cNvSpPr txBox="1"/>
+          <p:nvPr/>
+        </p:nvSpPr>
+        <p:spPr>
+          <a:xfrm>
+            <a:off x="548640" y="3520440"/>
+            <a:ext cx="1143000" cy="411480"/>
+          </a:xfrm>
+          <a:prstGeom prst="rect">
+            <a:avLst/>
+          </a:prstGeom>
+          <a:noFill/>
+          <a:ln/>
+        </p:spPr>
+        <p:txBody>
+          <a:bodyPr wrap="square" lIns="0" tIns="0" rIns="0" bIns="0" rtlCol="0" anchor="ctr"/>
+          <a:lstStyle/>
+          <a:p>
+            <a:pPr algn="l" indent="0" marL="0">
+              <a:buNone/>
+            </a:pPr>
+            <a:r>
+              <a:rPr lang="en-US" sz="1300" b="1" dirty="0">
+                <a:solidFill>
+                  <a:srgbClr val="EAF1FB"/>
+                </a:solidFill>
+                <a:latin typeface="Arial" pitchFamily="34" charset="0"/>
+                <a:ea typeface="Arial" pitchFamily="34" charset="-122"/>
+                <a:cs typeface="Arial" pitchFamily="34" charset="-120"/>
+              </a:rPr>
+              <a:t>Pabellón 4</a:t>
+            </a:r>
+            <a:endParaRPr lang="en-US" sz="1300" dirty="0"/>
+          </a:p>
+        </p:txBody>
+      </p:sp>
+      <p:sp>
+        <p:nvSpPr>
+          <p:cNvPr id="35" name="Shape 32"/>
+          <p:cNvSpPr/>
+          <p:nvPr/>
+        </p:nvSpPr>
+        <p:spPr>
+          <a:xfrm>
+            <a:off x="1737360" y="3566160"/>
+            <a:ext cx="5760720" cy="320040"/>
+          </a:xfrm>
+          <a:prstGeom prst="rect">
+            <a:avLst/>
+          </a:prstGeom>
+          <a:solidFill>
+            <a:srgbClr val="2DD4BF">
+              <a:alpha val="35000"/>
+            </a:srgbClr>
+          </a:solidFill>
+          <a:ln/>
+        </p:spPr>
+      </p:sp>
+      <p:sp>
+        <p:nvSpPr>
+          <p:cNvPr id="36" name="Shape 33"/>
+          <p:cNvSpPr/>
+          <p:nvPr/>
+        </p:nvSpPr>
+        <p:spPr>
+          <a:xfrm>
+            <a:off x="5282418" y="3566160"/>
+            <a:ext cx="1329397" cy="320040"/>
+          </a:xfrm>
+          <a:prstGeom prst="rect">
+            <a:avLst/>
+          </a:prstGeom>
+          <a:solidFill>
+            <a:srgbClr val="A78BFA"/>
+          </a:solidFill>
+          <a:ln w="12700">
+            <a:solidFill>
+              <a:srgbClr val="0B1220"/>
+            </a:solidFill>
+            <a:prstDash val="solid"/>
+          </a:ln>
+        </p:spPr>
+      </p:sp>
+      <p:sp>
+        <p:nvSpPr>
+          <p:cNvPr id="37" name="Text 34"/>
+          <p:cNvSpPr txBox="1"/>
+          <p:nvPr/>
+        </p:nvSpPr>
+        <p:spPr>
+          <a:xfrm>
+            <a:off x="5282418" y="3566160"/>
+            <a:ext cx="1329397" cy="320040"/>
+          </a:xfrm>
+          <a:prstGeom prst="rect">
+            <a:avLst/>
+          </a:prstGeom>
+          <a:noFill/>
+          <a:ln/>
+        </p:spPr>
+        <p:txBody>
+          <a:bodyPr wrap="square" lIns="0" tIns="0" rIns="0" bIns="0" rtlCol="0" anchor="ctr"/>
+          <a:lstStyle/>
+          <a:p>
+            <a:pPr algn="ctr" indent="0" marL="0">
+              <a:buNone/>
+            </a:pPr>
+            <a:r>
+              <a:rPr lang="en-US" sz="1050" b="1" dirty="0">
+                <a:solidFill>
+                  <a:srgbClr val="0B1220"/>
+                </a:solidFill>
+                <a:latin typeface="Arial" pitchFamily="34" charset="0"/>
+                <a:ea typeface="Arial" pitchFamily="34" charset="-122"/>
+                <a:cs typeface="Arial" pitchFamily="34" charset="-120"/>
+              </a:rPr>
+              <a:t>relevo</a:t>
+            </a:r>
+            <a:endParaRPr lang="en-US" sz="1050" dirty="0"/>
+          </a:p>
+        </p:txBody>
+      </p:sp>
+      <p:sp>
+        <p:nvSpPr>
+          <p:cNvPr id="38" name="Text 35"/>
+          <p:cNvSpPr txBox="1"/>
+          <p:nvPr/>
+        </p:nvSpPr>
+        <p:spPr>
+          <a:xfrm>
+            <a:off x="548640" y="4434840"/>
+            <a:ext cx="7315200" cy="274320"/>
+          </a:xfrm>
+          <a:prstGeom prst="rect">
+            <a:avLst/>
+          </a:prstGeom>
+          <a:noFill/>
+          <a:ln/>
+        </p:spPr>
+        <p:txBody>
+          <a:bodyPr wrap="square" lIns="0" tIns="0" rIns="0" bIns="0" rtlCol="0" anchor="ctr"/>
+          <a:lstStyle/>
+          <a:p>
+            <a:pPr algn="l" indent="0" marL="0">
+              <a:buNone/>
+            </a:pPr>
+            <a:r>
+              <a:rPr lang="en-US" sz="1050" dirty="0">
+                <a:solidFill>
+                  <a:srgbClr val="BCCDE8"/>
+                </a:solidFill>
+                <a:latin typeface="Arial" pitchFamily="34" charset="0"/>
+                <a:ea typeface="Arial" pitchFamily="34" charset="-122"/>
+                <a:cs typeface="Arial" pitchFamily="34" charset="-120"/>
+              </a:rPr>
+              <a:t>verde: el pabellón sigue operando · violeta: 45 min en que el equipo titular almuerza y el equipo de relevo cubre</a:t>
+            </a:r>
+            <a:endParaRPr lang="en-US" sz="1050" dirty="0"/>
+          </a:p>
+        </p:txBody>
+      </p:sp>
+      <p:sp>
+        <p:nvSpPr>
+          <p:cNvPr id="39" name="Shape 36"/>
+          <p:cNvSpPr/>
+          <p:nvPr/>
+        </p:nvSpPr>
+        <p:spPr>
+          <a:xfrm>
+            <a:off x="7863840" y="1691640"/>
+            <a:ext cx="3776472" cy="1463040"/>
+          </a:xfrm>
+          <a:prstGeom prst="roundRect">
+            <a:avLst>
+              <a:gd name="adj" fmla="val 5000"/>
+            </a:avLst>
+          </a:prstGeom>
+          <a:solidFill>
+            <a:srgbClr val="0F1930"/>
+          </a:solidFill>
+          <a:ln w="9525">
+            <a:solidFill>
+              <a:srgbClr val="22304A"/>
+            </a:solidFill>
+            <a:prstDash val="solid"/>
+          </a:ln>
+        </p:spPr>
+      </p:sp>
+      <p:sp>
+        <p:nvSpPr>
+          <p:cNvPr id="40" name="Text 37"/>
+          <p:cNvSpPr txBox="1"/>
+          <p:nvPr/>
+        </p:nvSpPr>
+        <p:spPr>
+          <a:xfrm>
+            <a:off x="8119872" y="1819656"/>
+            <a:ext cx="3264408" cy="518160"/>
+          </a:xfrm>
+          <a:prstGeom prst="rect">
+            <a:avLst/>
+          </a:prstGeom>
+          <a:noFill/>
+          <a:ln/>
+        </p:spPr>
+        <p:txBody>
+          <a:bodyPr wrap="square" lIns="0" tIns="0" rIns="0" bIns="0" rtlCol="0" anchor="ctr"/>
+          <a:lstStyle/>
+          <a:p>
+            <a:pPr algn="l" indent="0" marL="0">
+              <a:buNone/>
+            </a:pPr>
+            <a:r>
+              <a:rPr lang="en-US" sz="3400" b="1" dirty="0">
+                <a:solidFill>
+                  <a:srgbClr val="A78BFA"/>
+                </a:solidFill>
+                <a:latin typeface="Arial" pitchFamily="34" charset="0"/>
+                <a:ea typeface="Arial" pitchFamily="34" charset="-122"/>
+                <a:cs typeface="Arial" pitchFamily="34" charset="-120"/>
+              </a:rPr>
+              <a:t>1 equipo</a:t>
+            </a:r>
+            <a:endParaRPr lang="en-US" sz="3400" dirty="0"/>
+          </a:p>
+        </p:txBody>
+      </p:sp>
+      <p:sp>
+        <p:nvSpPr>
+          <p:cNvPr id="41" name="Text 38"/>
+          <p:cNvSpPr txBox="1"/>
+          <p:nvPr/>
+        </p:nvSpPr>
+        <p:spPr>
+          <a:xfrm>
+            <a:off x="8119872" y="2337816"/>
+            <a:ext cx="3264408" cy="274320"/>
+          </a:xfrm>
+          <a:prstGeom prst="rect">
+            <a:avLst/>
+          </a:prstGeom>
+          <a:noFill/>
+          <a:ln/>
+        </p:spPr>
+        <p:txBody>
+          <a:bodyPr wrap="square" lIns="0" tIns="0" rIns="0" bIns="0" rtlCol="0" anchor="ctr"/>
+          <a:lstStyle/>
+          <a:p>
+            <a:pPr algn="l" indent="0" marL="0">
+              <a:buNone/>
+            </a:pPr>
+            <a:r>
+              <a:rPr lang="en-US" sz="1300" b="1" dirty="0">
+                <a:solidFill>
+                  <a:srgbClr val="EAF1FB"/>
+                </a:solidFill>
+                <a:latin typeface="Arial" pitchFamily="34" charset="0"/>
+                <a:ea typeface="Arial" pitchFamily="34" charset="-122"/>
+                <a:cs typeface="Arial" pitchFamily="34" charset="-120"/>
+              </a:rPr>
+              <a:t>de relevo, por función</a:t>
+            </a:r>
+            <a:endParaRPr lang="en-US" sz="1300" dirty="0"/>
+          </a:p>
+        </p:txBody>
+      </p:sp>
+      <p:sp>
+        <p:nvSpPr>
+          <p:cNvPr id="42" name="Text 39"/>
+          <p:cNvSpPr txBox="1"/>
+          <p:nvPr/>
+        </p:nvSpPr>
+        <p:spPr>
+          <a:xfrm>
+            <a:off x="8119872" y="2612136"/>
+            <a:ext cx="3264408" cy="487680"/>
+          </a:xfrm>
+          <a:prstGeom prst="rect">
+            <a:avLst/>
+          </a:prstGeom>
+          <a:noFill/>
+          <a:ln/>
+        </p:spPr>
+        <p:txBody>
+          <a:bodyPr wrap="square" lIns="0" tIns="0" rIns="0" bIns="0" rtlCol="0" anchor="t"/>
+          <a:lstStyle/>
+          <a:p>
+            <a:pPr algn="l" indent="0" marL="0">
+              <a:buNone/>
+            </a:pPr>
+            <a:r>
+              <a:rPr lang="en-US" sz="1250" dirty="0">
+                <a:solidFill>
+                  <a:srgbClr val="94AACC"/>
+                </a:solidFill>
+                <a:latin typeface="Arial" pitchFamily="34" charset="0"/>
+                <a:ea typeface="Arial" pitchFamily="34" charset="-122"/>
+                <a:cs typeface="Arial" pitchFamily="34" charset="-120"/>
+              </a:rPr>
+              <a:t>enfermera, TENS, arsenalera y anestesiólogo · 2 h 15 por día · 47 h al mes</a:t>
+            </a:r>
+            <a:endParaRPr lang="en-US" sz="1250" dirty="0"/>
+          </a:p>
+        </p:txBody>
+      </p:sp>
+      <p:sp>
+        <p:nvSpPr>
+          <p:cNvPr id="43" name="Shape 40"/>
+          <p:cNvSpPr/>
+          <p:nvPr/>
+        </p:nvSpPr>
+        <p:spPr>
+          <a:xfrm>
+            <a:off x="7863840" y="3264408"/>
+            <a:ext cx="3776472" cy="1463040"/>
+          </a:xfrm>
+          <a:prstGeom prst="roundRect">
+            <a:avLst>
+              <a:gd name="adj" fmla="val 5000"/>
+            </a:avLst>
+          </a:prstGeom>
+          <a:solidFill>
+            <a:srgbClr val="0F1930"/>
+          </a:solidFill>
+          <a:ln w="19050">
+            <a:solidFill>
+              <a:srgbClr val="34D399"/>
+            </a:solidFill>
+            <a:prstDash val="solid"/>
+          </a:ln>
+        </p:spPr>
+      </p:sp>
+      <p:sp>
+        <p:nvSpPr>
+          <p:cNvPr id="44" name="Text 41"/>
+          <p:cNvSpPr txBox="1"/>
+          <p:nvPr/>
+        </p:nvSpPr>
+        <p:spPr>
+          <a:xfrm>
+            <a:off x="8119872" y="3392424"/>
+            <a:ext cx="3264408" cy="518160"/>
+          </a:xfrm>
+          <a:prstGeom prst="rect">
+            <a:avLst/>
+          </a:prstGeom>
+          <a:noFill/>
+          <a:ln/>
+        </p:spPr>
+        <p:txBody>
+          <a:bodyPr wrap="square" lIns="0" tIns="0" rIns="0" bIns="0" rtlCol="0" anchor="ctr"/>
+          <a:lstStyle/>
+          <a:p>
+            <a:pPr algn="l" indent="0" marL="0">
+              <a:buNone/>
+            </a:pPr>
+            <a:r>
+              <a:rPr lang="en-US" sz="3400" b="1" dirty="0">
+                <a:solidFill>
+                  <a:srgbClr val="34D399"/>
+                </a:solidFill>
+                <a:latin typeface="Arial" pitchFamily="34" charset="0"/>
+                <a:ea typeface="Arial" pitchFamily="34" charset="-122"/>
+                <a:cs typeface="Arial" pitchFamily="34" charset="-120"/>
+              </a:rPr>
+              <a:t>0 min</a:t>
+            </a:r>
+            <a:endParaRPr lang="en-US" sz="3400" dirty="0"/>
+          </a:p>
+        </p:txBody>
+      </p:sp>
+      <p:sp>
+        <p:nvSpPr>
+          <p:cNvPr id="45" name="Text 42"/>
+          <p:cNvSpPr txBox="1"/>
+          <p:nvPr/>
+        </p:nvSpPr>
+        <p:spPr>
+          <a:xfrm>
+            <a:off x="8119872" y="3910584"/>
+            <a:ext cx="3264408" cy="274320"/>
+          </a:xfrm>
+          <a:prstGeom prst="rect">
+            <a:avLst/>
+          </a:prstGeom>
+          <a:noFill/>
+          <a:ln/>
+        </p:spPr>
+        <p:txBody>
+          <a:bodyPr wrap="square" lIns="0" tIns="0" rIns="0" bIns="0" rtlCol="0" anchor="ctr"/>
+          <a:lstStyle/>
+          <a:p>
+            <a:pPr algn="l" indent="0" marL="0">
+              <a:buNone/>
+            </a:pPr>
+            <a:r>
+              <a:rPr lang="en-US" sz="1300" b="1" dirty="0">
+                <a:solidFill>
+                  <a:srgbClr val="EAF1FB"/>
+                </a:solidFill>
+                <a:latin typeface="Arial" pitchFamily="34" charset="0"/>
+                <a:ea typeface="Arial" pitchFamily="34" charset="-122"/>
+                <a:cs typeface="Arial" pitchFamily="34" charset="-120"/>
+              </a:rPr>
+              <a:t>de pabellón detenido al mediodía</a:t>
+            </a:r>
+            <a:endParaRPr lang="en-US" sz="1300" dirty="0"/>
+          </a:p>
+        </p:txBody>
+      </p:sp>
+      <p:sp>
+        <p:nvSpPr>
+          <p:cNvPr id="46" name="Text 43"/>
+          <p:cNvSpPr txBox="1"/>
+          <p:nvPr/>
+        </p:nvSpPr>
+        <p:spPr>
+          <a:xfrm>
+            <a:off x="8119872" y="4184904"/>
+            <a:ext cx="3264408" cy="487680"/>
+          </a:xfrm>
+          <a:prstGeom prst="rect">
+            <a:avLst/>
+          </a:prstGeom>
+          <a:noFill/>
+          <a:ln/>
+        </p:spPr>
+        <p:txBody>
+          <a:bodyPr wrap="square" lIns="0" tIns="0" rIns="0" bIns="0" rtlCol="0" anchor="t"/>
+          <a:lstStyle/>
+          <a:p>
+            <a:pPr algn="l" indent="0" marL="0">
+              <a:buNone/>
+            </a:pPr>
+            <a:r>
+              <a:rPr lang="en-US" sz="1250" dirty="0">
+                <a:solidFill>
+                  <a:srgbClr val="94AACC"/>
+                </a:solidFill>
+                <a:latin typeface="Arial" pitchFamily="34" charset="0"/>
+                <a:ea typeface="Arial" pitchFamily="34" charset="-122"/>
+                <a:cs typeface="Arial" pitchFamily="34" charset="-120"/>
+              </a:rPr>
+              <a:t>el descanso se mantiene: cambia el turno, no la pausa</a:t>
+            </a:r>
+            <a:endParaRPr lang="en-US" sz="1250" dirty="0"/>
+          </a:p>
+        </p:txBody>
+      </p:sp>
+      <p:sp>
+        <p:nvSpPr>
+          <p:cNvPr id="47" name="Shape 44"/>
+          <p:cNvSpPr/>
+          <p:nvPr/>
+        </p:nvSpPr>
+        <p:spPr>
+          <a:xfrm>
+            <a:off x="548640" y="4846320"/>
+            <a:ext cx="11091672" cy="1005840"/>
+          </a:xfrm>
+          <a:prstGeom prst="roundRect">
+            <a:avLst>
+              <a:gd name="adj" fmla="val 7273"/>
+            </a:avLst>
+          </a:prstGeom>
+          <a:solidFill>
+            <a:srgbClr val="0F1930"/>
+          </a:solidFill>
+          <a:ln w="19050">
+            <a:solidFill>
+              <a:srgbClr val="2DD4BF"/>
+            </a:solidFill>
+            <a:prstDash val="solid"/>
+          </a:ln>
+        </p:spPr>
+      </p:sp>
+      <p:sp>
+        <p:nvSpPr>
+          <p:cNvPr id="48" name="Text 45"/>
+          <p:cNvSpPr txBox="1"/>
+          <p:nvPr/>
+        </p:nvSpPr>
+        <p:spPr>
+          <a:xfrm>
+            <a:off x="822960" y="4901184"/>
+            <a:ext cx="10543032" cy="384048"/>
+          </a:xfrm>
+          <a:prstGeom prst="rect">
+            <a:avLst/>
+          </a:prstGeom>
+          <a:noFill/>
+          <a:ln/>
+        </p:spPr>
+        <p:txBody>
+          <a:bodyPr wrap="square" lIns="0" tIns="0" rIns="0" bIns="0" rtlCol="0" anchor="ctr"/>
+          <a:lstStyle/>
+          <a:p>
+            <a:pPr algn="l" indent="0" marL="0">
+              <a:buNone/>
+            </a:pPr>
+            <a:r>
+              <a:rPr lang="en-US" sz="1700" b="1" dirty="0">
+                <a:solidFill>
+                  <a:srgbClr val="5EEAD4"/>
+                </a:solidFill>
+                <a:latin typeface="Arial" pitchFamily="34" charset="0"/>
+                <a:ea typeface="Arial" pitchFamily="34" charset="-122"/>
+                <a:cs typeface="Arial" pitchFamily="34" charset="-120"/>
+              </a:rPr>
+              <a:t>Piloto de 4 semanas: jornadas con y sin relevo, misma agenda documentada</a:t>
+            </a:r>
+            <a:endParaRPr lang="en-US" sz="1700" dirty="0"/>
+          </a:p>
+        </p:txBody>
+      </p:sp>
+      <p:sp>
+        <p:nvSpPr>
+          <p:cNvPr id="49" name="Text 46"/>
+          <p:cNvSpPr txBox="1"/>
+          <p:nvPr/>
+        </p:nvSpPr>
+        <p:spPr>
+          <a:xfrm>
+            <a:off x="822960" y="5285232"/>
+            <a:ext cx="10543032" cy="548640"/>
+          </a:xfrm>
+          <a:prstGeom prst="rect">
+            <a:avLst/>
+          </a:prstGeom>
+          <a:noFill/>
+          <a:ln/>
+        </p:spPr>
+        <p:txBody>
+          <a:bodyPr wrap="square" lIns="0" tIns="0" rIns="0" bIns="0" rtlCol="0" anchor="t"/>
+          <a:lstStyle/>
+          <a:p>
+            <a:pPr algn="l" indent="0" marL="0">
+              <a:buNone/>
+            </a:pPr>
+            <a:r>
+              <a:rPr lang="en-US" sz="1250" dirty="0">
+                <a:solidFill>
+                  <a:srgbClr val="BCCDE8"/>
+                </a:solidFill>
+                <a:latin typeface="Arial" pitchFamily="34" charset="0"/>
+                <a:ea typeface="Arial" pitchFamily="34" charset="-122"/>
+                <a:cs typeface="Arial" pitchFamily="34" charset="-120"/>
+              </a:rPr>
+              <a:t>Registrar por intervalo: sala lista, paciente listo, equipo disponible, causa del bloqueo y hora de reanudación. Comparar hora final de tabla, casos completados, carga de trabajo y recambio bruto y neto. Decisión en comité.</a:t>
+            </a:r>
+            <a:endParaRPr lang="en-US" sz="1250" dirty="0"/>
+          </a:p>
+        </p:txBody>
+      </p:sp>
+      <p:sp>
+        <p:nvSpPr>
+          <p:cNvPr id="50" name="Text 47"/>
+          <p:cNvSpPr txBox="1"/>
+          <p:nvPr/>
+        </p:nvSpPr>
+        <p:spPr>
+          <a:xfrm>
+            <a:off x="548640" y="5943600"/>
+            <a:ext cx="11091672" cy="411480"/>
+          </a:xfrm>
+          <a:prstGeom prst="rect">
+            <a:avLst/>
+          </a:prstGeom>
+          <a:noFill/>
+          <a:ln/>
+        </p:spPr>
+        <p:txBody>
+          <a:bodyPr wrap="square" lIns="0" tIns="0" rIns="0" bIns="0" rtlCol="0" anchor="t"/>
+          <a:lstStyle/>
+          <a:p>
+            <a:pPr algn="l" indent="0" marL="0">
+              <a:buNone/>
+            </a:pPr>
+            <a:r>
+              <a:rPr lang="en-US" sz="1200" dirty="0">
+                <a:solidFill>
+                  <a:srgbClr val="94AACC"/>
+                </a:solidFill>
+                <a:latin typeface="Arial" pitchFamily="34" charset="0"/>
+                <a:ea typeface="Arial" pitchFamily="34" charset="-122"/>
+                <a:cs typeface="Arial" pitchFamily="34" charset="-120"/>
+              </a:rPr>
+              <a:t>Propuesta a validar con las jefaturas asistenciales y gestión de personas; el informe del 6-sep recomienda comparación concurrente (aleatorizar si es factible).</a:t>
+            </a:r>
+            <a:endParaRPr lang="en-US" sz="1200" dirty="0"/>
+          </a:p>
+        </p:txBody>
+      </p:sp>
+    </p:spTree>
+  </p:cSld>
+  <p:clrMapOvr>
+    <a:masterClrMapping/>
+  </p:clrMapOvr>
+</p:sld>
+</file>
+
+<file path=ppt/slides/slide15.xml><?xml version="1.0" encoding="utf-8"?>
+<p:sld xmlns:a="http://schemas.openxmlformats.org/drawingml/2006/main" xmlns:r="http://schemas.openxmlformats.org/officeDocument/2006/relationships" xmlns:p="http://schemas.openxmlformats.org/presentationml/2006/main">
+  <p:cSld name="Slide 15">
+    <p:bg>
+      <p:bgPr>
+        <a:solidFill>
+          <a:srgbClr val="0B1220"/>
+        </a:solidFill>
+      </p:bgPr>
+    </p:bg>
+    <p:spTree>
+      <p:nvGrpSpPr>
+        <p:cNvPr id="1" name=""/>
+        <p:cNvGrpSpPr/>
+        <p:nvPr/>
+      </p:nvGrpSpPr>
+      <p:grpSpPr>
+        <a:xfrm>
+          <a:off x="0" y="0"/>
+          <a:ext cx="0" cy="0"/>
+          <a:chOff x="0" y="0"/>
+          <a:chExt cx="0" cy="0"/>
+        </a:xfrm>
+      </p:grpSpPr>
+      <p:sp>
+        <p:nvSpPr>
+          <p:cNvPr id="2" name="Shape 0"/>
+          <p:cNvSpPr/>
+          <p:nvPr/>
+        </p:nvSpPr>
+        <p:spPr>
+          <a:xfrm>
+            <a:off x="8385048" y="-2286000"/>
+            <a:ext cx="5843016" cy="4315968"/>
+          </a:xfrm>
+          <a:prstGeom prst="ellipse">
+            <a:avLst/>
+          </a:prstGeom>
+          <a:gradFill rotWithShape="1">
+            <a:gsLst>
+              <a:gs pos="0">
+                <a:srgbClr val="2DD4BF">
+                  <a:alpha val="7059"/>
+                </a:srgbClr>
+              </a:gs>
+              <a:gs pos="100000">
+                <a:srgbClr val="2DD4BF">
+                  <a:alpha val="0"/>
+                </a:srgbClr>
+              </a:gs>
+            </a:gsLst>
+            <a:path path="circle">
+              <a:fillToRect l="50000" t="50000" r="50000" b="50000"/>
+            </a:path>
+          </a:gradFill>
+          <a:ln/>
+        </p:spPr>
+      </p:sp>
+      <p:sp>
+        <p:nvSpPr>
+          <p:cNvPr id="3" name="Shape 1"/>
+          <p:cNvSpPr/>
+          <p:nvPr/>
+        </p:nvSpPr>
+        <p:spPr>
+          <a:xfrm>
+            <a:off x="-2029968" y="4572000"/>
+            <a:ext cx="5586984" cy="3813048"/>
+          </a:xfrm>
+          <a:prstGeom prst="ellipse">
+            <a:avLst/>
+          </a:prstGeom>
+          <a:gradFill rotWithShape="1">
+            <a:gsLst>
+              <a:gs pos="0">
+                <a:srgbClr val="A78BFA">
+                  <a:alpha val="5490"/>
+                </a:srgbClr>
+              </a:gs>
+              <a:gs pos="100000">
+                <a:srgbClr val="A78BFA">
+                  <a:alpha val="0"/>
+                </a:srgbClr>
+              </a:gs>
+            </a:gsLst>
+            <a:path path="circle">
+              <a:fillToRect l="50000" t="50000" r="50000" b="50000"/>
+            </a:path>
+          </a:gradFill>
+          <a:ln/>
+        </p:spPr>
+      </p:sp>
+      <p:sp>
+        <p:nvSpPr>
+          <p:cNvPr id="4" name="Text 2"/>
+          <p:cNvSpPr txBox="1"/>
+          <p:nvPr/>
+        </p:nvSpPr>
+        <p:spPr>
+          <a:xfrm>
+            <a:off x="548640" y="347472"/>
+            <a:ext cx="9144000" cy="310896"/>
+          </a:xfrm>
+          <a:prstGeom prst="rect">
+            <a:avLst/>
+          </a:prstGeom>
+          <a:noFill/>
+          <a:ln/>
+        </p:spPr>
+        <p:txBody>
+          <a:bodyPr wrap="square" lIns="0" tIns="0" rIns="0" bIns="0" rtlCol="0" anchor="ctr"/>
+          <a:lstStyle/>
+          <a:p>
+            <a:pPr algn="l" indent="0" marL="0">
+              <a:buNone/>
+            </a:pPr>
+            <a:r>
+              <a:rPr lang="en-US" sz="1200" b="1" spc="300" kern="0" dirty="0">
+                <a:solidFill>
+                  <a:srgbClr val="5EEAD4"/>
+                </a:solidFill>
+                <a:latin typeface="Arial" pitchFamily="34" charset="0"/>
+                <a:ea typeface="Arial" pitchFamily="34" charset="-122"/>
+                <a:cs typeface="Arial" pitchFamily="34" charset="-120"/>
+              </a:rPr>
+              <a:t>14  ·  PROYECCIÓN</a:t>
+            </a:r>
+            <a:endParaRPr lang="en-US" sz="1200" dirty="0"/>
+          </a:p>
+        </p:txBody>
+      </p:sp>
+      <p:sp>
+        <p:nvSpPr>
+          <p:cNvPr id="5" name="Text 3"/>
+          <p:cNvSpPr txBox="1"/>
+          <p:nvPr/>
+        </p:nvSpPr>
+        <p:spPr>
+          <a:xfrm>
+            <a:off x="548640" y="713232"/>
+            <a:ext cx="11091672" cy="914400"/>
+          </a:xfrm>
+          <a:prstGeom prst="rect">
+            <a:avLst/>
+          </a:prstGeom>
+          <a:noFill/>
+          <a:ln/>
+        </p:spPr>
+        <p:txBody>
+          <a:bodyPr wrap="square" lIns="0" tIns="0" rIns="0" bIns="0" rtlCol="0" anchor="ctr"/>
+          <a:lstStyle/>
+          <a:p>
+            <a:pPr algn="l" indent="0" marL="0">
+              <a:buNone/>
+            </a:pPr>
+            <a:r>
+              <a:rPr lang="en-US" sz="2800" b="1" dirty="0">
+                <a:solidFill>
+                  <a:srgbClr val="FFFFFF"/>
+                </a:solidFill>
+                <a:latin typeface="Arial" pitchFamily="34" charset="0"/>
+                <a:ea typeface="Arial" pitchFamily="34" charset="-122"/>
+                <a:cs typeface="Arial" pitchFamily="34" charset="-120"/>
+              </a:rPr>
+              <a:t>Qué esperar si el régimen se sostiene, y qué pasa si no</a:t>
+            </a:r>
+            <a:endParaRPr lang="en-US" sz="2800" dirty="0"/>
+          </a:p>
+        </p:txBody>
+      </p:sp>
+      <p:sp>
+        <p:nvSpPr>
+          <p:cNvPr id="6" name="Text 4"/>
+          <p:cNvSpPr txBox="1"/>
+          <p:nvPr/>
+        </p:nvSpPr>
+        <p:spPr>
+          <a:xfrm>
+            <a:off x="548640" y="6446520"/>
+            <a:ext cx="1463040" cy="274320"/>
+          </a:xfrm>
+          <a:prstGeom prst="rect">
+            <a:avLst/>
+          </a:prstGeom>
+          <a:noFill/>
+          <a:ln/>
+        </p:spPr>
+        <p:txBody>
+          <a:bodyPr wrap="square" lIns="0" tIns="0" rIns="0" bIns="0" rtlCol="0" anchor="ctr"/>
+          <a:lstStyle/>
+          <a:p>
+            <a:pPr algn="l" indent="0" marL="0">
+              <a:buNone/>
+            </a:pPr>
+            <a:r>
+              <a:rPr lang="en-US" sz="1000" spc="200" kern="0" dirty="0">
+                <a:solidFill>
+                  <a:srgbClr val="94AACC"/>
+                </a:solidFill>
+                <a:latin typeface="Arial" pitchFamily="34" charset="0"/>
+                <a:ea typeface="Arial" pitchFamily="34" charset="-122"/>
+                <a:cs typeface="Arial" pitchFamily="34" charset="-120"/>
+              </a:rPr>
+              <a:t>15  /  17</a:t>
+            </a:r>
+            <a:endParaRPr lang="en-US" sz="1000" dirty="0"/>
+          </a:p>
+        </p:txBody>
+      </p:sp>
+      <p:sp>
+        <p:nvSpPr>
+          <p:cNvPr id="7" name="Text 5"/>
+          <p:cNvSpPr txBox="1"/>
+          <p:nvPr/>
+        </p:nvSpPr>
+        <p:spPr>
+          <a:xfrm>
+            <a:off x="5029200" y="6446520"/>
+            <a:ext cx="6611112" cy="274320"/>
+          </a:xfrm>
+          <a:prstGeom prst="rect">
+            <a:avLst/>
+          </a:prstGeom>
+          <a:noFill/>
+          <a:ln/>
+        </p:spPr>
+        <p:txBody>
+          <a:bodyPr wrap="square" lIns="0" tIns="0" rIns="0" bIns="0" rtlCol="0" anchor="ctr"/>
+          <a:lstStyle/>
+          <a:p>
+            <a:pPr algn="r" indent="0" marL="0">
+              <a:buNone/>
+            </a:pPr>
+            <a:r>
+              <a:rPr lang="en-US" sz="1000" spc="200" kern="0" dirty="0">
+                <a:solidFill>
+                  <a:srgbClr val="94AACC"/>
+                </a:solidFill>
+                <a:latin typeface="Arial" pitchFamily="34" charset="0"/>
+                <a:ea typeface="Arial" pitchFamily="34" charset="-122"/>
+                <a:cs typeface="Arial" pitchFamily="34" charset="-120"/>
+              </a:rPr>
+              <a:t>HQ  ·  COMITÉ QUIRÚRGICO  ·  SEPTIEMBRE 2026  ·  VERSIÓN BREVE</a:t>
+            </a:r>
+            <a:endParaRPr lang="en-US" sz="1000" dirty="0"/>
+          </a:p>
+        </p:txBody>
+      </p:sp>
+      <p:sp>
+        <p:nvSpPr>
+          <p:cNvPr id="9" name="Shape 6"/>
+          <p:cNvSpPr/>
+          <p:nvPr/>
+        </p:nvSpPr>
+        <p:spPr>
+          <a:xfrm>
+            <a:off x="548640" y="1828800"/>
+            <a:ext cx="3566160" cy="2148840"/>
+          </a:xfrm>
+          <a:prstGeom prst="roundRect">
+            <a:avLst>
+              <a:gd name="adj" fmla="val 3404"/>
+            </a:avLst>
+          </a:prstGeom>
+          <a:solidFill>
+            <a:srgbClr val="0F1930"/>
+          </a:solidFill>
+          <a:ln w="9525">
+            <a:solidFill>
+              <a:srgbClr val="22304A"/>
+            </a:solidFill>
+            <a:prstDash val="solid"/>
+          </a:ln>
+        </p:spPr>
+      </p:sp>
+      <p:sp>
+        <p:nvSpPr>
+          <p:cNvPr id="10" name="Text 7"/>
+          <p:cNvSpPr txBox="1"/>
+          <p:nvPr/>
+        </p:nvSpPr>
+        <p:spPr>
+          <a:xfrm>
+            <a:off x="804672" y="1956816"/>
+            <a:ext cx="3054096" cy="670560"/>
+          </a:xfrm>
+          <a:prstGeom prst="rect">
+            <a:avLst/>
+          </a:prstGeom>
+          <a:noFill/>
+          <a:ln/>
+        </p:spPr>
+        <p:txBody>
+          <a:bodyPr wrap="square" lIns="0" tIns="0" rIns="0" bIns="0" rtlCol="0" anchor="ctr"/>
+          <a:lstStyle/>
+          <a:p>
+            <a:pPr algn="l" indent="0" marL="0">
+              <a:buNone/>
+            </a:pPr>
+            <a:r>
+              <a:rPr lang="en-US" sz="4400" b="1" dirty="0">
+                <a:solidFill>
+                  <a:srgbClr val="5EEAD4"/>
+                </a:solidFill>
+                <a:latin typeface="Arial" pitchFamily="34" charset="0"/>
+                <a:ea typeface="Arial" pitchFamily="34" charset="-122"/>
+                <a:cs typeface="Arial" pitchFamily="34" charset="-120"/>
+              </a:rPr>
+              <a:t>2 a 10</a:t>
+            </a:r>
+            <a:endParaRPr lang="en-US" sz="4400" dirty="0"/>
+          </a:p>
+        </p:txBody>
+      </p:sp>
+      <p:sp>
+        <p:nvSpPr>
+          <p:cNvPr id="11" name="Text 8"/>
+          <p:cNvSpPr txBox="1"/>
+          <p:nvPr/>
+        </p:nvSpPr>
+        <p:spPr>
+          <a:xfrm>
+            <a:off x="804672" y="2627376"/>
+            <a:ext cx="3054096" cy="274320"/>
+          </a:xfrm>
+          <a:prstGeom prst="rect">
+            <a:avLst/>
+          </a:prstGeom>
+          <a:noFill/>
+          <a:ln/>
+        </p:spPr>
+        <p:txBody>
+          <a:bodyPr wrap="square" lIns="0" tIns="0" rIns="0" bIns="0" rtlCol="0" anchor="ctr"/>
+          <a:lstStyle/>
+          <a:p>
+            <a:pPr algn="l" indent="0" marL="0">
+              <a:buNone/>
+            </a:pPr>
+            <a:r>
+              <a:rPr lang="en-US" sz="1300" b="1" dirty="0">
+                <a:solidFill>
+                  <a:srgbClr val="EAF1FB"/>
+                </a:solidFill>
+                <a:latin typeface="Arial" pitchFamily="34" charset="0"/>
+                <a:ea typeface="Arial" pitchFamily="34" charset="-122"/>
+                <a:cs typeface="Arial" pitchFamily="34" charset="-120"/>
+              </a:rPr>
+              <a:t>suspensiones en septiembre</a:t>
+            </a:r>
+            <a:endParaRPr lang="en-US" sz="1300" dirty="0"/>
+          </a:p>
+        </p:txBody>
+      </p:sp>
+      <p:sp>
+        <p:nvSpPr>
+          <p:cNvPr id="12" name="Text 9"/>
+          <p:cNvSpPr txBox="1"/>
+          <p:nvPr/>
+        </p:nvSpPr>
+        <p:spPr>
+          <a:xfrm>
+            <a:off x="804672" y="2901696"/>
+            <a:ext cx="3054096" cy="1021080"/>
+          </a:xfrm>
+          <a:prstGeom prst="rect">
+            <a:avLst/>
+          </a:prstGeom>
+          <a:noFill/>
+          <a:ln/>
+        </p:spPr>
+        <p:txBody>
+          <a:bodyPr wrap="square" lIns="0" tIns="0" rIns="0" bIns="0" rtlCol="0" anchor="t"/>
+          <a:lstStyle/>
+          <a:p>
+            <a:pPr algn="l" indent="0" marL="0">
+              <a:buNone/>
+            </a:pPr>
+            <a:r>
+              <a:rPr lang="en-US" sz="1250" dirty="0">
+                <a:solidFill>
+                  <a:srgbClr val="94AACC"/>
+                </a:solidFill>
+                <a:latin typeface="Arial" pitchFamily="34" charset="0"/>
+                <a:ea typeface="Arial" pitchFamily="34" charset="-122"/>
+                <a:cs typeface="Arial" pitchFamily="34" charset="-120"/>
+              </a:rPr>
+              <a:t>pronóstico prudente · más de 10 es señal de deterioro</a:t>
+            </a:r>
+            <a:endParaRPr lang="en-US" sz="1250" dirty="0"/>
+          </a:p>
+        </p:txBody>
+      </p:sp>
+      <p:sp>
+        <p:nvSpPr>
+          <p:cNvPr id="13" name="Shape 10"/>
+          <p:cNvSpPr/>
+          <p:nvPr/>
+        </p:nvSpPr>
+        <p:spPr>
+          <a:xfrm>
+            <a:off x="4311396" y="1828800"/>
+            <a:ext cx="3566160" cy="2148840"/>
+          </a:xfrm>
+          <a:prstGeom prst="roundRect">
+            <a:avLst>
+              <a:gd name="adj" fmla="val 3404"/>
+            </a:avLst>
+          </a:prstGeom>
+          <a:solidFill>
+            <a:srgbClr val="0F1930"/>
+          </a:solidFill>
+          <a:ln w="9525">
+            <a:solidFill>
+              <a:srgbClr val="22304A"/>
+            </a:solidFill>
+            <a:prstDash val="solid"/>
+          </a:ln>
+        </p:spPr>
+      </p:sp>
+      <p:sp>
+        <p:nvSpPr>
+          <p:cNvPr id="14" name="Text 11"/>
+          <p:cNvSpPr txBox="1"/>
+          <p:nvPr/>
+        </p:nvSpPr>
+        <p:spPr>
+          <a:xfrm>
+            <a:off x="4567428" y="1956816"/>
+            <a:ext cx="3054096" cy="670560"/>
+          </a:xfrm>
+          <a:prstGeom prst="rect">
+            <a:avLst/>
+          </a:prstGeom>
+          <a:noFill/>
+          <a:ln/>
+        </p:spPr>
+        <p:txBody>
+          <a:bodyPr wrap="square" lIns="0" tIns="0" rIns="0" bIns="0" rtlCol="0" anchor="ctr"/>
+          <a:lstStyle/>
+          <a:p>
+            <a:pPr algn="l" indent="0" marL="0">
+              <a:buNone/>
+            </a:pPr>
+            <a:r>
+              <a:rPr lang="en-US" sz="4400" b="1" dirty="0">
+                <a:solidFill>
+                  <a:srgbClr val="F5B342"/>
+                </a:solidFill>
+                <a:latin typeface="Arial" pitchFamily="34" charset="0"/>
+                <a:ea typeface="Arial" pitchFamily="34" charset="-122"/>
+                <a:cs typeface="Arial" pitchFamily="34" charset="-120"/>
+              </a:rPr>
+              <a:t>9 · 29 · 69</a:t>
+            </a:r>
+            <a:endParaRPr lang="en-US" sz="4400" dirty="0"/>
+          </a:p>
+        </p:txBody>
+      </p:sp>
+      <p:sp>
+        <p:nvSpPr>
+          <p:cNvPr id="15" name="Text 12"/>
+          <p:cNvSpPr txBox="1"/>
+          <p:nvPr/>
+        </p:nvSpPr>
+        <p:spPr>
+          <a:xfrm>
+            <a:off x="4567428" y="2627376"/>
+            <a:ext cx="3054096" cy="274320"/>
+          </a:xfrm>
+          <a:prstGeom prst="rect">
+            <a:avLst/>
+          </a:prstGeom>
+          <a:noFill/>
+          <a:ln/>
+        </p:spPr>
+        <p:txBody>
+          <a:bodyPr wrap="square" lIns="0" tIns="0" rIns="0" bIns="0" rtlCol="0" anchor="ctr"/>
+          <a:lstStyle/>
+          <a:p>
+            <a:pPr algn="l" indent="0" marL="0">
+              <a:buNone/>
+            </a:pPr>
+            <a:r>
+              <a:rPr lang="en-US" sz="1300" b="1" dirty="0">
+                <a:solidFill>
+                  <a:srgbClr val="EAF1FB"/>
+                </a:solidFill>
+                <a:latin typeface="Arial" pitchFamily="34" charset="0"/>
+                <a:ea typeface="Arial" pitchFamily="34" charset="-122"/>
+                <a:cs typeface="Arial" pitchFamily="34" charset="-120"/>
+              </a:rPr>
+              <a:t>septiembre a diciembre</a:t>
+            </a:r>
+            <a:endParaRPr lang="en-US" sz="1300" dirty="0"/>
+          </a:p>
+        </p:txBody>
+      </p:sp>
+      <p:sp>
+        <p:nvSpPr>
+          <p:cNvPr id="16" name="Text 13"/>
+          <p:cNvSpPr txBox="1"/>
+          <p:nvPr/>
+        </p:nvSpPr>
+        <p:spPr>
+          <a:xfrm>
+            <a:off x="4567428" y="2901696"/>
+            <a:ext cx="3054096" cy="1021080"/>
+          </a:xfrm>
+          <a:prstGeom prst="rect">
+            <a:avLst/>
+          </a:prstGeom>
+          <a:noFill/>
+          <a:ln/>
+        </p:spPr>
+        <p:txBody>
+          <a:bodyPr wrap="square" lIns="0" tIns="0" rIns="0" bIns="0" rtlCol="0" anchor="t"/>
+          <a:lstStyle/>
+          <a:p>
+            <a:pPr algn="l" indent="0" marL="0">
+              <a:buNone/>
+            </a:pPr>
+            <a:r>
+              <a:rPr lang="en-US" sz="1250" dirty="0">
+                <a:solidFill>
+                  <a:srgbClr val="94AACC"/>
+                </a:solidFill>
+                <a:latin typeface="Arial" pitchFamily="34" charset="0"/>
+                <a:ea typeface="Arial" pitchFamily="34" charset="-122"/>
+                <a:cs typeface="Arial" pitchFamily="34" charset="-120"/>
+              </a:rPr>
+              <a:t>si se sostiene · si sube a 4 % · si vuelve 2025</a:t>
+            </a:r>
+            <a:endParaRPr lang="en-US" sz="1250" dirty="0"/>
+          </a:p>
+        </p:txBody>
+      </p:sp>
+      <p:sp>
+        <p:nvSpPr>
+          <p:cNvPr id="17" name="Shape 14"/>
+          <p:cNvSpPr/>
+          <p:nvPr/>
+        </p:nvSpPr>
+        <p:spPr>
+          <a:xfrm>
+            <a:off x="8074152" y="1828800"/>
+            <a:ext cx="3566160" cy="2148840"/>
+          </a:xfrm>
+          <a:prstGeom prst="roundRect">
+            <a:avLst>
+              <a:gd name="adj" fmla="val 3404"/>
+            </a:avLst>
+          </a:prstGeom>
+          <a:solidFill>
+            <a:srgbClr val="0F1930"/>
+          </a:solidFill>
+          <a:ln w="9525">
+            <a:solidFill>
+              <a:srgbClr val="22304A"/>
+            </a:solidFill>
+            <a:prstDash val="solid"/>
+          </a:ln>
+        </p:spPr>
+      </p:sp>
+      <p:sp>
+        <p:nvSpPr>
+          <p:cNvPr id="18" name="Text 15"/>
+          <p:cNvSpPr txBox="1"/>
+          <p:nvPr/>
+        </p:nvSpPr>
+        <p:spPr>
+          <a:xfrm>
+            <a:off x="8330184" y="1956816"/>
+            <a:ext cx="3054096" cy="670560"/>
+          </a:xfrm>
+          <a:prstGeom prst="rect">
+            <a:avLst/>
+          </a:prstGeom>
+          <a:noFill/>
+          <a:ln/>
+        </p:spPr>
+        <p:txBody>
+          <a:bodyPr wrap="square" lIns="0" tIns="0" rIns="0" bIns="0" rtlCol="0" anchor="ctr"/>
+          <a:lstStyle/>
+          <a:p>
+            <a:pPr algn="l" indent="0" marL="0">
+              <a:buNone/>
+            </a:pPr>
+            <a:r>
+              <a:rPr lang="en-US" sz="4400" b="1" dirty="0">
+                <a:solidFill>
+                  <a:srgbClr val="34D399"/>
+                </a:solidFill>
+                <a:latin typeface="Arial" pitchFamily="34" charset="0"/>
+                <a:ea typeface="Arial" pitchFamily="34" charset="-122"/>
+                <a:cs typeface="Arial" pitchFamily="34" charset="-120"/>
+              </a:rPr>
+              <a:t>66 vs 505</a:t>
+            </a:r>
+            <a:endParaRPr lang="en-US" sz="4400" dirty="0"/>
+          </a:p>
+        </p:txBody>
+      </p:sp>
+      <p:sp>
+        <p:nvSpPr>
+          <p:cNvPr id="19" name="Text 16"/>
+          <p:cNvSpPr txBox="1"/>
+          <p:nvPr/>
+        </p:nvSpPr>
+        <p:spPr>
+          <a:xfrm>
+            <a:off x="8330184" y="2627376"/>
+            <a:ext cx="3054096" cy="274320"/>
+          </a:xfrm>
+          <a:prstGeom prst="rect">
+            <a:avLst/>
+          </a:prstGeom>
+          <a:noFill/>
+          <a:ln/>
+        </p:spPr>
+        <p:txBody>
+          <a:bodyPr wrap="square" lIns="0" tIns="0" rIns="0" bIns="0" rtlCol="0" anchor="ctr"/>
+          <a:lstStyle/>
+          <a:p>
+            <a:pPr algn="l" indent="0" marL="0">
+              <a:buNone/>
+            </a:pPr>
+            <a:r>
+              <a:rPr lang="en-US" sz="1300" b="1" dirty="0">
+                <a:solidFill>
+                  <a:srgbClr val="EAF1FB"/>
+                </a:solidFill>
+                <a:latin typeface="Arial" pitchFamily="34" charset="0"/>
+                <a:ea typeface="Arial" pitchFamily="34" charset="-122"/>
+                <a:cs typeface="Arial" pitchFamily="34" charset="-120"/>
+              </a:rPr>
+              <a:t>al año en el HPMM (7 pabellones)</a:t>
+            </a:r>
+            <a:endParaRPr lang="en-US" sz="1300" dirty="0"/>
+          </a:p>
+        </p:txBody>
+      </p:sp>
+      <p:sp>
+        <p:nvSpPr>
+          <p:cNvPr id="20" name="Text 17"/>
+          <p:cNvSpPr txBox="1"/>
+          <p:nvPr/>
+        </p:nvSpPr>
+        <p:spPr>
+          <a:xfrm>
+            <a:off x="8330184" y="2901696"/>
+            <a:ext cx="3054096" cy="1021080"/>
+          </a:xfrm>
+          <a:prstGeom prst="rect">
+            <a:avLst/>
+          </a:prstGeom>
+          <a:noFill/>
+          <a:ln/>
+        </p:spPr>
+        <p:txBody>
+          <a:bodyPr wrap="square" lIns="0" tIns="0" rIns="0" bIns="0" rtlCol="0" anchor="t"/>
+          <a:lstStyle/>
+          <a:p>
+            <a:pPr algn="l" indent="0" marL="0">
+              <a:buNone/>
+            </a:pPr>
+            <a:r>
+              <a:rPr lang="en-US" sz="1250" dirty="0">
+                <a:solidFill>
+                  <a:srgbClr val="94AACC"/>
+                </a:solidFill>
+                <a:latin typeface="Arial" pitchFamily="34" charset="0"/>
+                <a:ea typeface="Arial" pitchFamily="34" charset="-122"/>
+                <a:cs typeface="Arial" pitchFamily="34" charset="-120"/>
+              </a:rPr>
+              <a:t>régimen actual vs tasa 2025 · 439 pacientes de diferencia</a:t>
+            </a:r>
+            <a:endParaRPr lang="en-US" sz="1250" dirty="0"/>
+          </a:p>
+        </p:txBody>
+      </p:sp>
+      <p:sp>
+        <p:nvSpPr>
+          <p:cNvPr id="21" name="Shape 18"/>
+          <p:cNvSpPr/>
+          <p:nvPr/>
+        </p:nvSpPr>
+        <p:spPr>
+          <a:xfrm>
+            <a:off x="548640" y="4206240"/>
+            <a:ext cx="11091672" cy="1463040"/>
+          </a:xfrm>
+          <a:prstGeom prst="roundRect">
+            <a:avLst>
+              <a:gd name="adj" fmla="val 5000"/>
+            </a:avLst>
+          </a:prstGeom>
+          <a:solidFill>
+            <a:srgbClr val="0F1930"/>
+          </a:solidFill>
+          <a:ln w="19050">
+            <a:solidFill>
+              <a:srgbClr val="2DD4BF"/>
+            </a:solidFill>
+            <a:prstDash val="solid"/>
+          </a:ln>
+        </p:spPr>
+      </p:sp>
+      <p:sp>
+        <p:nvSpPr>
+          <p:cNvPr id="22" name="Text 19"/>
+          <p:cNvSpPr txBox="1"/>
+          <p:nvPr/>
+        </p:nvSpPr>
+        <p:spPr>
+          <a:xfrm>
+            <a:off x="868680" y="4315968"/>
+            <a:ext cx="10451592" cy="548640"/>
+          </a:xfrm>
+          <a:prstGeom prst="rect">
+            <a:avLst/>
+          </a:prstGeom>
+          <a:noFill/>
+          <a:ln/>
+        </p:spPr>
+        <p:txBody>
+          <a:bodyPr wrap="square" lIns="0" tIns="0" rIns="0" bIns="0" rtlCol="0" anchor="ctr"/>
+          <a:lstStyle/>
+          <a:p>
+            <a:pPr algn="l" indent="0" marL="0">
+              <a:buNone/>
+            </a:pPr>
+            <a:r>
+              <a:rPr lang="en-US" sz="1800" b="1" dirty="0">
+                <a:solidFill>
+                  <a:srgbClr val="5EEAD4"/>
+                </a:solidFill>
+                <a:latin typeface="Arial" pitchFamily="34" charset="0"/>
+                <a:ea typeface="Arial" pitchFamily="34" charset="-122"/>
+                <a:cs typeface="Arial" pitchFamily="34" charset="-120"/>
+              </a:rPr>
+              <a:t>El traslado al Marga Marga multiplica por 2,3 la exposición: amplifica la tasa que llevemos</a:t>
+            </a:r>
+            <a:endParaRPr lang="en-US" sz="1800" dirty="0"/>
+          </a:p>
+        </p:txBody>
+      </p:sp>
+      <p:sp>
+        <p:nvSpPr>
+          <p:cNvPr id="23" name="Text 20"/>
+          <p:cNvSpPr txBox="1"/>
+          <p:nvPr/>
+        </p:nvSpPr>
+        <p:spPr>
+          <a:xfrm>
+            <a:off x="868680" y="4892040"/>
+            <a:ext cx="10451592" cy="640080"/>
+          </a:xfrm>
+          <a:prstGeom prst="rect">
+            <a:avLst/>
+          </a:prstGeom>
+          <a:noFill/>
+          <a:ln/>
+        </p:spPr>
+        <p:txBody>
+          <a:bodyPr wrap="square" lIns="0" tIns="0" rIns="0" bIns="0" rtlCol="0" anchor="t"/>
+          <a:lstStyle/>
+          <a:p>
+            <a:pPr algn="l" indent="0" marL="0">
+              <a:buNone/>
+            </a:pPr>
+            <a:r>
+              <a:rPr lang="en-US" sz="1500" dirty="0">
+                <a:solidFill>
+                  <a:srgbClr val="BCCDE8"/>
+                </a:solidFill>
+                <a:latin typeface="Arial" pitchFamily="34" charset="0"/>
+                <a:ea typeface="Arial" pitchFamily="34" charset="-122"/>
+                <a:cs typeface="Arial" pitchFamily="34" charset="-120"/>
+              </a:rPr>
+              <a:t>Sostener el régimen depende de lo que se institucionalice antes del traslado: causal completa, lunes blindado, dotación y camas de rescate.</a:t>
+            </a:r>
+            <a:endParaRPr lang="en-US" sz="1500" dirty="0"/>
+          </a:p>
+        </p:txBody>
+      </p:sp>
+      <p:sp>
+        <p:nvSpPr>
+          <p:cNvPr id="24" name="Text 21"/>
+          <p:cNvSpPr txBox="1"/>
+          <p:nvPr/>
+        </p:nvSpPr>
+        <p:spPr>
+          <a:xfrm>
+            <a:off x="548640" y="5943600"/>
+            <a:ext cx="11091672" cy="411480"/>
+          </a:xfrm>
+          <a:prstGeom prst="rect">
+            <a:avLst/>
+          </a:prstGeom>
+          <a:noFill/>
+          <a:ln/>
+        </p:spPr>
+        <p:txBody>
+          <a:bodyPr wrap="square" lIns="0" tIns="0" rIns="0" bIns="0" rtlCol="0" anchor="t"/>
+          <a:lstStyle/>
+          <a:p>
+            <a:pPr algn="l" indent="0" marL="0">
+              <a:buNone/>
+            </a:pPr>
+            <a:r>
+              <a:rPr lang="en-US" sz="1200" dirty="0">
+                <a:solidFill>
+                  <a:srgbClr val="94AACC"/>
+                </a:solidFill>
+                <a:latin typeface="Arial" pitchFamily="34" charset="0"/>
+                <a:ea typeface="Arial" pitchFamily="34" charset="-122"/>
+                <a:cs typeface="Arial" pitchFamily="34" charset="-120"/>
+              </a:rPr>
+              <a:t>Escenarios binomiales con el volumen de cada período; no incorporan estacionalidad ni cambio de mezcla.</a:t>
+            </a:r>
+            <a:endParaRPr lang="en-US" sz="1200" dirty="0"/>
+          </a:p>
+        </p:txBody>
+      </p:sp>
+    </p:spTree>
+  </p:cSld>
+  <p:clrMapOvr>
+    <a:masterClrMapping/>
+  </p:clrMapOvr>
+</p:sld>
+</file>
+
+<file path=ppt/slides/slide16.xml><?xml version="1.0" encoding="utf-8"?>
+<p:sld xmlns:a="http://schemas.openxmlformats.org/drawingml/2006/main" xmlns:r="http://schemas.openxmlformats.org/officeDocument/2006/relationships" xmlns:p="http://schemas.openxmlformats.org/presentationml/2006/main">
+  <p:cSld name="Slide 16">
+    <p:bg>
+      <p:bgPr>
+        <a:solidFill>
+          <a:srgbClr val="0B1220"/>
+        </a:solidFill>
+      </p:bgPr>
+    </p:bg>
+    <p:spTree>
+      <p:nvGrpSpPr>
+        <p:cNvPr id="1" name=""/>
+        <p:cNvGrpSpPr/>
+        <p:nvPr/>
+      </p:nvGrpSpPr>
+      <p:grpSpPr>
+        <a:xfrm>
+          <a:off x="0" y="0"/>
+          <a:ext cx="0" cy="0"/>
+          <a:chOff x="0" y="0"/>
+          <a:chExt cx="0" cy="0"/>
+        </a:xfrm>
+      </p:grpSpPr>
+      <p:sp>
+        <p:nvSpPr>
+          <p:cNvPr id="2" name="Shape 0"/>
+          <p:cNvSpPr/>
+          <p:nvPr/>
+        </p:nvSpPr>
+        <p:spPr>
+          <a:xfrm>
+            <a:off x="8385048" y="-2286000"/>
+            <a:ext cx="5843016" cy="4315968"/>
+          </a:xfrm>
+          <a:prstGeom prst="ellipse">
+            <a:avLst/>
+          </a:prstGeom>
+          <a:gradFill rotWithShape="1">
+            <a:gsLst>
+              <a:gs pos="0">
+                <a:srgbClr val="2DD4BF">
+                  <a:alpha val="7059"/>
+                </a:srgbClr>
+              </a:gs>
+              <a:gs pos="100000">
+                <a:srgbClr val="2DD4BF">
+                  <a:alpha val="0"/>
+                </a:srgbClr>
+              </a:gs>
+            </a:gsLst>
+            <a:path path="circle">
+              <a:fillToRect l="50000" t="50000" r="50000" b="50000"/>
+            </a:path>
+          </a:gradFill>
+          <a:ln/>
+        </p:spPr>
+      </p:sp>
+      <p:sp>
+        <p:nvSpPr>
+          <p:cNvPr id="3" name="Shape 1"/>
+          <p:cNvSpPr/>
+          <p:nvPr/>
+        </p:nvSpPr>
+        <p:spPr>
+          <a:xfrm>
+            <a:off x="-2029968" y="4572000"/>
+            <a:ext cx="5586984" cy="3813048"/>
+          </a:xfrm>
+          <a:prstGeom prst="ellipse">
+            <a:avLst/>
+          </a:prstGeom>
+          <a:gradFill rotWithShape="1">
+            <a:gsLst>
+              <a:gs pos="0">
+                <a:srgbClr val="A78BFA">
+                  <a:alpha val="5490"/>
+                </a:srgbClr>
+              </a:gs>
+              <a:gs pos="100000">
+                <a:srgbClr val="A78BFA">
+                  <a:alpha val="0"/>
+                </a:srgbClr>
+              </a:gs>
+            </a:gsLst>
+            <a:path path="circle">
+              <a:fillToRect l="50000" t="50000" r="50000" b="50000"/>
+            </a:path>
+          </a:gradFill>
+          <a:ln/>
+        </p:spPr>
+      </p:sp>
+      <p:sp>
+        <p:nvSpPr>
+          <p:cNvPr id="4" name="Text 2"/>
+          <p:cNvSpPr txBox="1"/>
+          <p:nvPr/>
+        </p:nvSpPr>
+        <p:spPr>
+          <a:xfrm>
+            <a:off x="548640" y="347472"/>
+            <a:ext cx="9144000" cy="310896"/>
+          </a:xfrm>
+          <a:prstGeom prst="rect">
+            <a:avLst/>
+          </a:prstGeom>
+          <a:noFill/>
+          <a:ln/>
+        </p:spPr>
+        <p:txBody>
+          <a:bodyPr wrap="square" lIns="0" tIns="0" rIns="0" bIns="0" rtlCol="0" anchor="ctr"/>
+          <a:lstStyle/>
+          <a:p>
+            <a:pPr algn="l" indent="0" marL="0">
+              <a:buNone/>
+            </a:pPr>
+            <a:r>
+              <a:rPr lang="en-US" sz="1200" b="1" spc="300" kern="0" dirty="0">
+                <a:solidFill>
+                  <a:srgbClr val="5EEAD4"/>
+                </a:solidFill>
+                <a:latin typeface="Arial" pitchFamily="34" charset="0"/>
+                <a:ea typeface="Arial" pitchFamily="34" charset="-122"/>
+                <a:cs typeface="Arial" pitchFamily="34" charset="-120"/>
+              </a:rPr>
+              <a:t>15  ·  SEPTIEMBRE</a:t>
+            </a:r>
+            <a:endParaRPr lang="en-US" sz="1200" dirty="0"/>
+          </a:p>
+        </p:txBody>
+      </p:sp>
+      <p:sp>
+        <p:nvSpPr>
+          <p:cNvPr id="5" name="Text 3"/>
+          <p:cNvSpPr txBox="1"/>
+          <p:nvPr/>
+        </p:nvSpPr>
+        <p:spPr>
+          <a:xfrm>
+            <a:off x="548640" y="713232"/>
+            <a:ext cx="11091672" cy="914400"/>
+          </a:xfrm>
+          <a:prstGeom prst="rect">
+            <a:avLst/>
+          </a:prstGeom>
+          <a:noFill/>
+          <a:ln/>
+        </p:spPr>
+        <p:txBody>
+          <a:bodyPr wrap="square" lIns="0" tIns="0" rIns="0" bIns="0" rtlCol="0" anchor="ctr"/>
+          <a:lstStyle/>
+          <a:p>
+            <a:pPr algn="l" indent="0" marL="0">
+              <a:buNone/>
+            </a:pPr>
+            <a:r>
+              <a:rPr lang="en-US" sz="3200" b="1" dirty="0">
+                <a:solidFill>
+                  <a:srgbClr val="FFFFFF"/>
+                </a:solidFill>
+                <a:latin typeface="Arial" pitchFamily="34" charset="0"/>
+                <a:ea typeface="Arial" pitchFamily="34" charset="-122"/>
+                <a:cs typeface="Arial" pitchFamily="34" charset="-120"/>
+              </a:rPr>
+              <a:t>Cinco decisiones para septiembre</a:t>
+            </a:r>
+            <a:endParaRPr lang="en-US" sz="3200" dirty="0"/>
+          </a:p>
+        </p:txBody>
+      </p:sp>
+      <p:sp>
+        <p:nvSpPr>
+          <p:cNvPr id="6" name="Text 4"/>
+          <p:cNvSpPr txBox="1"/>
+          <p:nvPr/>
+        </p:nvSpPr>
+        <p:spPr>
+          <a:xfrm>
+            <a:off x="548640" y="6446520"/>
+            <a:ext cx="1463040" cy="274320"/>
+          </a:xfrm>
+          <a:prstGeom prst="rect">
+            <a:avLst/>
+          </a:prstGeom>
+          <a:noFill/>
+          <a:ln/>
+        </p:spPr>
+        <p:txBody>
+          <a:bodyPr wrap="square" lIns="0" tIns="0" rIns="0" bIns="0" rtlCol="0" anchor="ctr"/>
+          <a:lstStyle/>
+          <a:p>
+            <a:pPr algn="l" indent="0" marL="0">
+              <a:buNone/>
+            </a:pPr>
+            <a:r>
+              <a:rPr lang="en-US" sz="1000" spc="200" kern="0" dirty="0">
+                <a:solidFill>
+                  <a:srgbClr val="94AACC"/>
+                </a:solidFill>
+                <a:latin typeface="Arial" pitchFamily="34" charset="0"/>
+                <a:ea typeface="Arial" pitchFamily="34" charset="-122"/>
+                <a:cs typeface="Arial" pitchFamily="34" charset="-120"/>
+              </a:rPr>
+              <a:t>16  /  17</a:t>
+            </a:r>
+            <a:endParaRPr lang="en-US" sz="1000" dirty="0"/>
+          </a:p>
+        </p:txBody>
+      </p:sp>
+      <p:sp>
+        <p:nvSpPr>
+          <p:cNvPr id="7" name="Text 5"/>
+          <p:cNvSpPr txBox="1"/>
+          <p:nvPr/>
+        </p:nvSpPr>
+        <p:spPr>
+          <a:xfrm>
+            <a:off x="5029200" y="6446520"/>
+            <a:ext cx="6611112" cy="274320"/>
+          </a:xfrm>
+          <a:prstGeom prst="rect">
+            <a:avLst/>
+          </a:prstGeom>
+          <a:noFill/>
+          <a:ln/>
+        </p:spPr>
+        <p:txBody>
+          <a:bodyPr wrap="square" lIns="0" tIns="0" rIns="0" bIns="0" rtlCol="0" anchor="ctr"/>
+          <a:lstStyle/>
+          <a:p>
+            <a:pPr algn="r" indent="0" marL="0">
+              <a:buNone/>
+            </a:pPr>
+            <a:r>
+              <a:rPr lang="en-US" sz="1000" spc="200" kern="0" dirty="0">
+                <a:solidFill>
+                  <a:srgbClr val="94AACC"/>
+                </a:solidFill>
+                <a:latin typeface="Arial" pitchFamily="34" charset="0"/>
+                <a:ea typeface="Arial" pitchFamily="34" charset="-122"/>
+                <a:cs typeface="Arial" pitchFamily="34" charset="-120"/>
+              </a:rPr>
+              <a:t>HQ  ·  COMITÉ QUIRÚRGICO  ·  SEPTIEMBRE 2026  ·  VERSIÓN BREVE</a:t>
+            </a:r>
+            <a:endParaRPr lang="en-US" sz="1000" dirty="0"/>
+          </a:p>
+        </p:txBody>
+      </p:sp>
+      <p:sp>
+        <p:nvSpPr>
+          <p:cNvPr id="9" name="Shape 6"/>
+          <p:cNvSpPr/>
+          <p:nvPr/>
+        </p:nvSpPr>
+        <p:spPr>
+          <a:xfrm>
+            <a:off x="548640" y="1783080"/>
+            <a:ext cx="11091672" cy="749808"/>
+          </a:xfrm>
+          <a:prstGeom prst="roundRect">
+            <a:avLst>
+              <a:gd name="adj" fmla="val 9756"/>
+            </a:avLst>
+          </a:prstGeom>
+          <a:solidFill>
+            <a:srgbClr val="0F1930"/>
+          </a:solidFill>
+          <a:ln w="19050">
+            <a:solidFill>
+              <a:srgbClr val="F26B6B"/>
+            </a:solidFill>
+            <a:prstDash val="solid"/>
+          </a:ln>
+        </p:spPr>
+      </p:sp>
+      <p:sp>
+        <p:nvSpPr>
+          <p:cNvPr id="10" name="Text 7"/>
+          <p:cNvSpPr txBox="1"/>
+          <p:nvPr/>
+        </p:nvSpPr>
+        <p:spPr>
+          <a:xfrm>
+            <a:off x="777240" y="1783080"/>
+            <a:ext cx="548640" cy="749808"/>
+          </a:xfrm>
+          <a:prstGeom prst="rect">
+            <a:avLst/>
+          </a:prstGeom>
+          <a:noFill/>
+          <a:ln/>
+        </p:spPr>
+        <p:txBody>
+          <a:bodyPr wrap="square" lIns="0" tIns="0" rIns="0" bIns="0" rtlCol="0" anchor="ctr"/>
+          <a:lstStyle/>
+          <a:p>
+            <a:pPr algn="l" indent="0" marL="0">
+              <a:buNone/>
+            </a:pPr>
+            <a:r>
+              <a:rPr lang="en-US" sz="3000" b="1" dirty="0">
+                <a:solidFill>
+                  <a:srgbClr val="F26B6B"/>
+                </a:solidFill>
+                <a:latin typeface="Arial" pitchFamily="34" charset="0"/>
+                <a:ea typeface="Arial" pitchFamily="34" charset="-122"/>
+                <a:cs typeface="Arial" pitchFamily="34" charset="-120"/>
+              </a:rPr>
+              <a:t>1</a:t>
+            </a:r>
+            <a:endParaRPr lang="en-US" sz="3000" dirty="0"/>
+          </a:p>
+        </p:txBody>
+      </p:sp>
+      <p:sp>
+        <p:nvSpPr>
+          <p:cNvPr id="11" name="Text 8"/>
+          <p:cNvSpPr txBox="1"/>
+          <p:nvPr/>
+        </p:nvSpPr>
+        <p:spPr>
+          <a:xfrm>
+            <a:off x="1417320" y="1856232"/>
+            <a:ext cx="7772400" cy="365760"/>
+          </a:xfrm>
+          <a:prstGeom prst="rect">
+            <a:avLst/>
+          </a:prstGeom>
+          <a:noFill/>
+          <a:ln/>
+        </p:spPr>
+        <p:txBody>
+          <a:bodyPr wrap="square" lIns="0" tIns="0" rIns="0" bIns="0" rtlCol="0" anchor="ctr"/>
+          <a:lstStyle/>
+          <a:p>
+            <a:pPr algn="l" indent="0" marL="0">
+              <a:buNone/>
+            </a:pPr>
+            <a:r>
+              <a:rPr lang="en-US" sz="1800" b="1" dirty="0">
+                <a:solidFill>
+                  <a:srgbClr val="FFFFFF"/>
+                </a:solidFill>
+                <a:latin typeface="Arial" pitchFamily="34" charset="0"/>
+                <a:ea typeface="Arial" pitchFamily="34" charset="-122"/>
+                <a:cs typeface="Arial" pitchFamily="34" charset="-120"/>
+              </a:rPr>
+              <a:t>Completar la causa de las 38 suspensiones</a:t>
+            </a:r>
+            <a:endParaRPr lang="en-US" sz="1800" dirty="0"/>
+          </a:p>
+        </p:txBody>
+      </p:sp>
+      <p:sp>
+        <p:nvSpPr>
+          <p:cNvPr id="12" name="Text 9"/>
+          <p:cNvSpPr txBox="1"/>
+          <p:nvPr/>
+        </p:nvSpPr>
+        <p:spPr>
+          <a:xfrm>
+            <a:off x="1417320" y="2203704"/>
+            <a:ext cx="9994392" cy="310896"/>
+          </a:xfrm>
+          <a:prstGeom prst="rect">
+            <a:avLst/>
+          </a:prstGeom>
+          <a:noFill/>
+          <a:ln/>
+        </p:spPr>
+        <p:txBody>
+          <a:bodyPr wrap="square" lIns="0" tIns="0" rIns="0" bIns="0" rtlCol="0" anchor="ctr"/>
+          <a:lstStyle/>
+          <a:p>
+            <a:pPr algn="l" indent="0" marL="0">
+              <a:buNone/>
+            </a:pPr>
+            <a:r>
+              <a:rPr lang="en-US" sz="1300" dirty="0">
+                <a:solidFill>
+                  <a:srgbClr val="94AACC"/>
+                </a:solidFill>
+                <a:latin typeface="Arial" pitchFamily="34" charset="0"/>
+                <a:ea typeface="Arial" pitchFamily="34" charset="-122"/>
+                <a:cs typeface="Arial" pitchFamily="34" charset="-120"/>
+              </a:rPr>
+              <a:t>por jornada en el fin de semana; "sin causa determinada" disponible</a:t>
+            </a:r>
+            <a:endParaRPr lang="en-US" sz="1300" dirty="0"/>
+          </a:p>
+        </p:txBody>
+      </p:sp>
+      <p:sp>
+        <p:nvSpPr>
+          <p:cNvPr id="13" name="Shape 10"/>
+          <p:cNvSpPr/>
+          <p:nvPr/>
+        </p:nvSpPr>
+        <p:spPr>
+          <a:xfrm>
+            <a:off x="548640" y="2624328"/>
+            <a:ext cx="11091672" cy="749808"/>
+          </a:xfrm>
+          <a:prstGeom prst="roundRect">
+            <a:avLst>
+              <a:gd name="adj" fmla="val 9756"/>
+            </a:avLst>
+          </a:prstGeom>
+          <a:solidFill>
+            <a:srgbClr val="0F1930"/>
+          </a:solidFill>
+          <a:ln w="19050">
+            <a:solidFill>
+              <a:srgbClr val="F26B6B"/>
+            </a:solidFill>
+            <a:prstDash val="solid"/>
+          </a:ln>
+        </p:spPr>
+      </p:sp>
+      <p:sp>
+        <p:nvSpPr>
+          <p:cNvPr id="14" name="Text 11"/>
+          <p:cNvSpPr txBox="1"/>
+          <p:nvPr/>
+        </p:nvSpPr>
+        <p:spPr>
+          <a:xfrm>
+            <a:off x="777240" y="2624328"/>
+            <a:ext cx="548640" cy="749808"/>
+          </a:xfrm>
+          <a:prstGeom prst="rect">
+            <a:avLst/>
+          </a:prstGeom>
+          <a:noFill/>
+          <a:ln/>
+        </p:spPr>
+        <p:txBody>
+          <a:bodyPr wrap="square" lIns="0" tIns="0" rIns="0" bIns="0" rtlCol="0" anchor="ctr"/>
+          <a:lstStyle/>
+          <a:p>
+            <a:pPr algn="l" indent="0" marL="0">
+              <a:buNone/>
+            </a:pPr>
+            <a:r>
+              <a:rPr lang="en-US" sz="3000" b="1" dirty="0">
+                <a:solidFill>
+                  <a:srgbClr val="F26B6B"/>
+                </a:solidFill>
+                <a:latin typeface="Arial" pitchFamily="34" charset="0"/>
+                <a:ea typeface="Arial" pitchFamily="34" charset="-122"/>
+                <a:cs typeface="Arial" pitchFamily="34" charset="-120"/>
+              </a:rPr>
+              <a:t>2</a:t>
+            </a:r>
+            <a:endParaRPr lang="en-US" sz="3000" dirty="0"/>
+          </a:p>
+        </p:txBody>
+      </p:sp>
+      <p:sp>
+        <p:nvSpPr>
+          <p:cNvPr id="15" name="Text 12"/>
+          <p:cNvSpPr txBox="1"/>
+          <p:nvPr/>
+        </p:nvSpPr>
+        <p:spPr>
+          <a:xfrm>
+            <a:off x="1417320" y="2697480"/>
+            <a:ext cx="7772400" cy="365760"/>
+          </a:xfrm>
+          <a:prstGeom prst="rect">
+            <a:avLst/>
+          </a:prstGeom>
+          <a:noFill/>
+          <a:ln/>
+        </p:spPr>
+        <p:txBody>
+          <a:bodyPr wrap="square" lIns="0" tIns="0" rIns="0" bIns="0" rtlCol="0" anchor="ctr"/>
+          <a:lstStyle/>
+          <a:p>
+            <a:pPr algn="l" indent="0" marL="0">
+              <a:buNone/>
+            </a:pPr>
+            <a:r>
+              <a:rPr lang="en-US" sz="1800" b="1" dirty="0">
+                <a:solidFill>
+                  <a:srgbClr val="FFFFFF"/>
+                </a:solidFill>
+                <a:latin typeface="Arial" pitchFamily="34" charset="0"/>
+                <a:ea typeface="Arial" pitchFamily="34" charset="-122"/>
+                <a:cs typeface="Arial" pitchFamily="34" charset="-120"/>
+              </a:rPr>
+              <a:t>Blindar el lunes y recuperar el pabellón-día</a:t>
+            </a:r>
+            <a:endParaRPr lang="en-US" sz="1800" dirty="0"/>
+          </a:p>
+        </p:txBody>
+      </p:sp>
+      <p:sp>
+        <p:nvSpPr>
+          <p:cNvPr id="16" name="Text 13"/>
+          <p:cNvSpPr txBox="1"/>
+          <p:nvPr/>
+        </p:nvSpPr>
+        <p:spPr>
+          <a:xfrm>
+            <a:off x="1417320" y="3044952"/>
+            <a:ext cx="9994392" cy="310896"/>
+          </a:xfrm>
+          <a:prstGeom prst="rect">
+            <a:avLst/>
+          </a:prstGeom>
+          <a:noFill/>
+          <a:ln/>
+        </p:spPr>
+        <p:txBody>
+          <a:bodyPr wrap="square" lIns="0" tIns="0" rIns="0" bIns="0" rtlCol="0" anchor="ctr"/>
+          <a:lstStyle/>
+          <a:p>
+            <a:pPr algn="l" indent="0" marL="0">
+              <a:buNone/>
+            </a:pPr>
+            <a:r>
+              <a:rPr lang="en-US" sz="1300" dirty="0">
+                <a:solidFill>
+                  <a:srgbClr val="94AACC"/>
+                </a:solidFill>
+                <a:latin typeface="Arial" pitchFamily="34" charset="0"/>
+                <a:ea typeface="Arial" pitchFamily="34" charset="-122"/>
+                <a:cs typeface="Arial" pitchFamily="34" charset="-120"/>
+              </a:rPr>
+              <a:t>confirmación el viernes en la tarde · enfermería asegurada en Pabellón 2</a:t>
+            </a:r>
+            <a:endParaRPr lang="en-US" sz="1300" dirty="0"/>
+          </a:p>
+        </p:txBody>
+      </p:sp>
+      <p:sp>
+        <p:nvSpPr>
+          <p:cNvPr id="17" name="Shape 14"/>
+          <p:cNvSpPr/>
+          <p:nvPr/>
+        </p:nvSpPr>
+        <p:spPr>
+          <a:xfrm>
+            <a:off x="548640" y="3465576"/>
+            <a:ext cx="11091672" cy="749808"/>
+          </a:xfrm>
+          <a:prstGeom prst="roundRect">
+            <a:avLst>
+              <a:gd name="adj" fmla="val 9756"/>
+            </a:avLst>
+          </a:prstGeom>
+          <a:solidFill>
+            <a:srgbClr val="0F1930"/>
+          </a:solidFill>
+          <a:ln w="19050">
+            <a:solidFill>
+              <a:srgbClr val="F5B342"/>
+            </a:solidFill>
+            <a:prstDash val="solid"/>
+          </a:ln>
+        </p:spPr>
+      </p:sp>
+      <p:sp>
+        <p:nvSpPr>
+          <p:cNvPr id="18" name="Text 15"/>
+          <p:cNvSpPr txBox="1"/>
+          <p:nvPr/>
+        </p:nvSpPr>
+        <p:spPr>
+          <a:xfrm>
+            <a:off x="777240" y="3465576"/>
+            <a:ext cx="548640" cy="749808"/>
+          </a:xfrm>
+          <a:prstGeom prst="rect">
+            <a:avLst/>
+          </a:prstGeom>
+          <a:noFill/>
+          <a:ln/>
+        </p:spPr>
+        <p:txBody>
+          <a:bodyPr wrap="square" lIns="0" tIns="0" rIns="0" bIns="0" rtlCol="0" anchor="ctr"/>
+          <a:lstStyle/>
+          <a:p>
+            <a:pPr algn="l" indent="0" marL="0">
+              <a:buNone/>
+            </a:pPr>
+            <a:r>
+              <a:rPr lang="en-US" sz="3000" b="1" dirty="0">
+                <a:solidFill>
+                  <a:srgbClr val="F5B342"/>
+                </a:solidFill>
+                <a:latin typeface="Arial" pitchFamily="34" charset="0"/>
+                <a:ea typeface="Arial" pitchFamily="34" charset="-122"/>
+                <a:cs typeface="Arial" pitchFamily="34" charset="-120"/>
+              </a:rPr>
+              <a:t>3</a:t>
+            </a:r>
+            <a:endParaRPr lang="en-US" sz="3000" dirty="0"/>
+          </a:p>
+        </p:txBody>
+      </p:sp>
+      <p:sp>
+        <p:nvSpPr>
+          <p:cNvPr id="19" name="Text 16"/>
+          <p:cNvSpPr txBox="1"/>
+          <p:nvPr/>
+        </p:nvSpPr>
+        <p:spPr>
+          <a:xfrm>
+            <a:off x="1417320" y="3538728"/>
+            <a:ext cx="7772400" cy="365760"/>
+          </a:xfrm>
+          <a:prstGeom prst="rect">
+            <a:avLst/>
+          </a:prstGeom>
+          <a:noFill/>
+          <a:ln/>
+        </p:spPr>
+        <p:txBody>
+          <a:bodyPr wrap="square" lIns="0" tIns="0" rIns="0" bIns="0" rtlCol="0" anchor="ctr"/>
+          <a:lstStyle/>
+          <a:p>
+            <a:pPr algn="l" indent="0" marL="0">
+              <a:buNone/>
+            </a:pPr>
+            <a:r>
+              <a:rPr lang="en-US" sz="1800" b="1" dirty="0">
+                <a:solidFill>
+                  <a:srgbClr val="FFFFFF"/>
+                </a:solidFill>
+                <a:latin typeface="Arial" pitchFamily="34" charset="0"/>
+                <a:ea typeface="Arial" pitchFamily="34" charset="-122"/>
+                <a:cs typeface="Arial" pitchFamily="34" charset="-120"/>
+              </a:rPr>
+              <a:t>Auditar el error de programación</a:t>
+            </a:r>
+            <a:endParaRPr lang="en-US" sz="1800" dirty="0"/>
+          </a:p>
+        </p:txBody>
+      </p:sp>
+      <p:sp>
+        <p:nvSpPr>
+          <p:cNvPr id="20" name="Text 17"/>
+          <p:cNvSpPr txBox="1"/>
+          <p:nvPr/>
+        </p:nvSpPr>
+        <p:spPr>
+          <a:xfrm>
+            <a:off x="1417320" y="3886200"/>
+            <a:ext cx="9994392" cy="310896"/>
+          </a:xfrm>
+          <a:prstGeom prst="rect">
+            <a:avLst/>
+          </a:prstGeom>
+          <a:noFill/>
+          <a:ln/>
+        </p:spPr>
+        <p:txBody>
+          <a:bodyPr wrap="square" lIns="0" tIns="0" rIns="0" bIns="0" rtlCol="0" anchor="ctr"/>
+          <a:lstStyle/>
+          <a:p>
+            <a:pPr algn="l" indent="0" marL="0">
+              <a:buNone/>
+            </a:pPr>
+            <a:r>
+              <a:rPr lang="en-US" sz="1300" dirty="0">
+                <a:solidFill>
+                  <a:srgbClr val="94AACC"/>
+                </a:solidFill>
+                <a:latin typeface="Arial" pitchFamily="34" charset="0"/>
+                <a:ea typeface="Arial" pitchFamily="34" charset="-122"/>
+                <a:cs typeface="Arial" pitchFamily="34" charset="-120"/>
+              </a:rPr>
+              <a:t>7 casos, 3 cirugías mayores directas · separar error de agenda de indicación o insumo</a:t>
+            </a:r>
+            <a:endParaRPr lang="en-US" sz="1300" dirty="0"/>
+          </a:p>
+        </p:txBody>
+      </p:sp>
+      <p:sp>
+        <p:nvSpPr>
+          <p:cNvPr id="21" name="Shape 18"/>
+          <p:cNvSpPr/>
+          <p:nvPr/>
+        </p:nvSpPr>
+        <p:spPr>
+          <a:xfrm>
+            <a:off x="548640" y="4306824"/>
+            <a:ext cx="11091672" cy="749808"/>
+          </a:xfrm>
+          <a:prstGeom prst="roundRect">
+            <a:avLst>
+              <a:gd name="adj" fmla="val 9756"/>
+            </a:avLst>
+          </a:prstGeom>
+          <a:solidFill>
+            <a:srgbClr val="0F1930"/>
+          </a:solidFill>
+          <a:ln w="19050">
+            <a:solidFill>
+              <a:srgbClr val="F5B342"/>
+            </a:solidFill>
+            <a:prstDash val="solid"/>
+          </a:ln>
+        </p:spPr>
+      </p:sp>
+      <p:sp>
+        <p:nvSpPr>
+          <p:cNvPr id="22" name="Text 19"/>
+          <p:cNvSpPr txBox="1"/>
+          <p:nvPr/>
+        </p:nvSpPr>
+        <p:spPr>
+          <a:xfrm>
+            <a:off x="777240" y="4306824"/>
+            <a:ext cx="548640" cy="749808"/>
+          </a:xfrm>
+          <a:prstGeom prst="rect">
+            <a:avLst/>
+          </a:prstGeom>
+          <a:noFill/>
+          <a:ln/>
+        </p:spPr>
+        <p:txBody>
+          <a:bodyPr wrap="square" lIns="0" tIns="0" rIns="0" bIns="0" rtlCol="0" anchor="ctr"/>
+          <a:lstStyle/>
+          <a:p>
+            <a:pPr algn="l" indent="0" marL="0">
+              <a:buNone/>
+            </a:pPr>
+            <a:r>
+              <a:rPr lang="en-US" sz="3000" b="1" dirty="0">
+                <a:solidFill>
+                  <a:srgbClr val="F5B342"/>
+                </a:solidFill>
+                <a:latin typeface="Arial" pitchFamily="34" charset="0"/>
+                <a:ea typeface="Arial" pitchFamily="34" charset="-122"/>
+                <a:cs typeface="Arial" pitchFamily="34" charset="-120"/>
+              </a:rPr>
+              <a:t>4</a:t>
+            </a:r>
+            <a:endParaRPr lang="en-US" sz="3000" dirty="0"/>
+          </a:p>
+        </p:txBody>
+      </p:sp>
+      <p:sp>
+        <p:nvSpPr>
+          <p:cNvPr id="23" name="Text 20"/>
+          <p:cNvSpPr txBox="1"/>
+          <p:nvPr/>
+        </p:nvSpPr>
+        <p:spPr>
+          <a:xfrm>
+            <a:off x="1417320" y="4379976"/>
+            <a:ext cx="7772400" cy="365760"/>
+          </a:xfrm>
+          <a:prstGeom prst="rect">
+            <a:avLst/>
+          </a:prstGeom>
+          <a:noFill/>
+          <a:ln/>
+        </p:spPr>
+        <p:txBody>
+          <a:bodyPr wrap="square" lIns="0" tIns="0" rIns="0" bIns="0" rtlCol="0" anchor="ctr"/>
+          <a:lstStyle/>
+          <a:p>
+            <a:pPr algn="l" indent="0" marL="0">
+              <a:buNone/>
+            </a:pPr>
+            <a:r>
+              <a:rPr lang="en-US" sz="1800" b="1" dirty="0">
+                <a:solidFill>
+                  <a:srgbClr val="FFFFFF"/>
+                </a:solidFill>
+                <a:latin typeface="Arial" pitchFamily="34" charset="0"/>
+                <a:ea typeface="Arial" pitchFamily="34" charset="-122"/>
+                <a:cs typeface="Arial" pitchFamily="34" charset="-120"/>
+              </a:rPr>
+              <a:t>Consentimiento y ayuno antes de la tabla</a:t>
+            </a:r>
+            <a:endParaRPr lang="en-US" sz="1800" dirty="0"/>
+          </a:p>
+        </p:txBody>
+      </p:sp>
+      <p:sp>
+        <p:nvSpPr>
+          <p:cNvPr id="24" name="Text 21"/>
+          <p:cNvSpPr txBox="1"/>
+          <p:nvPr/>
+        </p:nvSpPr>
+        <p:spPr>
+          <a:xfrm>
+            <a:off x="1417320" y="4727448"/>
+            <a:ext cx="9994392" cy="310896"/>
+          </a:xfrm>
+          <a:prstGeom prst="rect">
+            <a:avLst/>
+          </a:prstGeom>
+          <a:noFill/>
+          <a:ln/>
+        </p:spPr>
+        <p:txBody>
+          <a:bodyPr wrap="square" lIns="0" tIns="0" rIns="0" bIns="0" rtlCol="0" anchor="ctr"/>
+          <a:lstStyle/>
+          <a:p>
+            <a:pPr algn="l" indent="0" marL="0">
+              <a:buNone/>
+            </a:pPr>
+            <a:r>
+              <a:rPr lang="en-US" sz="1300" dirty="0">
+                <a:solidFill>
+                  <a:srgbClr val="94AACC"/>
+                </a:solidFill>
+                <a:latin typeface="Arial" pitchFamily="34" charset="0"/>
+                <a:ea typeface="Arial" pitchFamily="34" charset="-122"/>
+                <a:cs typeface="Arial" pitchFamily="34" charset="-120"/>
+              </a:rPr>
+              <a:t>medida del 31 de agosto: sin consentimiento firmado no hay tabla</a:t>
+            </a:r>
+            <a:endParaRPr lang="en-US" sz="1300" dirty="0"/>
+          </a:p>
+        </p:txBody>
+      </p:sp>
+      <p:sp>
+        <p:nvSpPr>
+          <p:cNvPr id="25" name="Shape 22"/>
+          <p:cNvSpPr/>
+          <p:nvPr/>
+        </p:nvSpPr>
+        <p:spPr>
+          <a:xfrm>
+            <a:off x="548640" y="5148072"/>
+            <a:ext cx="11091672" cy="749808"/>
+          </a:xfrm>
+          <a:prstGeom prst="roundRect">
+            <a:avLst>
+              <a:gd name="adj" fmla="val 9756"/>
+            </a:avLst>
+          </a:prstGeom>
+          <a:solidFill>
+            <a:srgbClr val="0F1930"/>
+          </a:solidFill>
+          <a:ln w="19050">
+            <a:solidFill>
+              <a:srgbClr val="2DD4BF"/>
+            </a:solidFill>
+            <a:prstDash val="solid"/>
+          </a:ln>
+        </p:spPr>
+      </p:sp>
+      <p:sp>
+        <p:nvSpPr>
+          <p:cNvPr id="26" name="Text 23"/>
+          <p:cNvSpPr txBox="1"/>
+          <p:nvPr/>
+        </p:nvSpPr>
+        <p:spPr>
+          <a:xfrm>
+            <a:off x="777240" y="5148072"/>
+            <a:ext cx="548640" cy="749808"/>
+          </a:xfrm>
+          <a:prstGeom prst="rect">
+            <a:avLst/>
+          </a:prstGeom>
+          <a:noFill/>
+          <a:ln/>
+        </p:spPr>
+        <p:txBody>
+          <a:bodyPr wrap="square" lIns="0" tIns="0" rIns="0" bIns="0" rtlCol="0" anchor="ctr"/>
+          <a:lstStyle/>
+          <a:p>
+            <a:pPr algn="l" indent="0" marL="0">
+              <a:buNone/>
+            </a:pPr>
+            <a:r>
+              <a:rPr lang="en-US" sz="3000" b="1" dirty="0">
+                <a:solidFill>
+                  <a:srgbClr val="2DD4BF"/>
+                </a:solidFill>
+                <a:latin typeface="Arial" pitchFamily="34" charset="0"/>
+                <a:ea typeface="Arial" pitchFamily="34" charset="-122"/>
+                <a:cs typeface="Arial" pitchFamily="34" charset="-120"/>
+              </a:rPr>
+              <a:t>5</a:t>
+            </a:r>
+            <a:endParaRPr lang="en-US" sz="3000" dirty="0"/>
+          </a:p>
+        </p:txBody>
+      </p:sp>
+      <p:sp>
+        <p:nvSpPr>
+          <p:cNvPr id="27" name="Text 24"/>
+          <p:cNvSpPr txBox="1"/>
+          <p:nvPr/>
+        </p:nvSpPr>
+        <p:spPr>
+          <a:xfrm>
+            <a:off x="1417320" y="5221224"/>
+            <a:ext cx="7772400" cy="365760"/>
+          </a:xfrm>
+          <a:prstGeom prst="rect">
+            <a:avLst/>
+          </a:prstGeom>
+          <a:noFill/>
+          <a:ln/>
+        </p:spPr>
+        <p:txBody>
+          <a:bodyPr wrap="square" lIns="0" tIns="0" rIns="0" bIns="0" rtlCol="0" anchor="ctr"/>
+          <a:lstStyle/>
+          <a:p>
+            <a:pPr algn="l" indent="0" marL="0">
+              <a:buNone/>
+            </a:pPr>
+            <a:r>
+              <a:rPr lang="en-US" sz="1800" b="1" dirty="0">
+                <a:solidFill>
+                  <a:srgbClr val="FFFFFF"/>
+                </a:solidFill>
+                <a:latin typeface="Arial" pitchFamily="34" charset="0"/>
+                <a:ea typeface="Arial" pitchFamily="34" charset="-122"/>
+                <a:cs typeface="Arial" pitchFamily="34" charset="-120"/>
+              </a:rPr>
+              <a:t>Piloto de horario continuo y registro operable</a:t>
+            </a:r>
+            <a:endParaRPr lang="en-US" sz="1800" dirty="0"/>
+          </a:p>
+        </p:txBody>
+      </p:sp>
+      <p:sp>
+        <p:nvSpPr>
+          <p:cNvPr id="28" name="Text 25"/>
+          <p:cNvSpPr txBox="1"/>
+          <p:nvPr/>
+        </p:nvSpPr>
+        <p:spPr>
+          <a:xfrm>
+            <a:off x="1417320" y="5568696"/>
+            <a:ext cx="9994392" cy="310896"/>
+          </a:xfrm>
+          <a:prstGeom prst="rect">
+            <a:avLst/>
+          </a:prstGeom>
+          <a:noFill/>
+          <a:ln/>
+        </p:spPr>
+        <p:txBody>
+          <a:bodyPr wrap="square" lIns="0" tIns="0" rIns="0" bIns="0" rtlCol="0" anchor="ctr"/>
+          <a:lstStyle/>
+          <a:p>
+            <a:pPr algn="l" indent="0" marL="0">
+              <a:buNone/>
+            </a:pPr>
+            <a:r>
+              <a:rPr lang="en-US" sz="1300" dirty="0">
+                <a:solidFill>
+                  <a:srgbClr val="94AACC"/>
+                </a:solidFill>
+                <a:latin typeface="Arial" pitchFamily="34" charset="0"/>
+                <a:ea typeface="Arial" pitchFamily="34" charset="-122"/>
+                <a:cs typeface="Arial" pitchFamily="34" charset="-120"/>
+              </a:rPr>
+              <a:t>equipo de relevo en escalera, 4 semanas con y sin cobertura · campos de julio en CancelOS</a:t>
+            </a:r>
+            <a:endParaRPr lang="en-US" sz="1300" dirty="0"/>
+          </a:p>
+        </p:txBody>
+      </p:sp>
+    </p:spTree>
+  </p:cSld>
+  <p:clrMapOvr>
+    <a:masterClrMapping/>
+  </p:clrMapOvr>
+</p:sld>
+</file>
+
+<file path=ppt/slides/slide17.xml><?xml version="1.0" encoding="utf-8"?>
+<p:sld xmlns:a="http://schemas.openxmlformats.org/drawingml/2006/main" xmlns:r="http://schemas.openxmlformats.org/officeDocument/2006/relationships" xmlns:p="http://schemas.openxmlformats.org/presentationml/2006/main">
+  <p:cSld name="Slide 17">
+    <p:bg>
+      <p:bgPr>
+        <a:solidFill>
+          <a:srgbClr val="0B1220"/>
+        </a:solidFill>
+      </p:bgPr>
+    </p:bg>
+    <p:spTree>
+      <p:nvGrpSpPr>
+        <p:cNvPr id="1" name=""/>
+        <p:cNvGrpSpPr/>
+        <p:nvPr/>
+      </p:nvGrpSpPr>
+      <p:grpSpPr>
+        <a:xfrm>
+          <a:off x="0" y="0"/>
+          <a:ext cx="0" cy="0"/>
+          <a:chOff x="0" y="0"/>
+          <a:chExt cx="0" cy="0"/>
+        </a:xfrm>
+      </p:grpSpPr>
+      <p:sp>
+        <p:nvSpPr>
+          <p:cNvPr id="2" name="Shape 0"/>
+          <p:cNvSpPr/>
+          <p:nvPr/>
+        </p:nvSpPr>
+        <p:spPr>
+          <a:xfrm>
+            <a:off x="8385048" y="-2286000"/>
+            <a:ext cx="5843016" cy="4315968"/>
+          </a:xfrm>
+          <a:prstGeom prst="ellipse">
+            <a:avLst/>
+          </a:prstGeom>
+          <a:gradFill rotWithShape="1">
+            <a:gsLst>
+              <a:gs pos="0">
+                <a:srgbClr val="2DD4BF">
+                  <a:alpha val="7059"/>
+                </a:srgbClr>
+              </a:gs>
+              <a:gs pos="100000">
+                <a:srgbClr val="2DD4BF">
+                  <a:alpha val="0"/>
+                </a:srgbClr>
+              </a:gs>
+            </a:gsLst>
+            <a:path path="circle">
+              <a:fillToRect l="50000" t="50000" r="50000" b="50000"/>
+            </a:path>
+          </a:gradFill>
+          <a:ln/>
+        </p:spPr>
+      </p:sp>
+      <p:sp>
+        <p:nvSpPr>
+          <p:cNvPr id="3" name="Shape 1"/>
+          <p:cNvSpPr/>
+          <p:nvPr/>
+        </p:nvSpPr>
+        <p:spPr>
+          <a:xfrm>
+            <a:off x="-2029968" y="4572000"/>
+            <a:ext cx="5586984" cy="3813048"/>
+          </a:xfrm>
+          <a:prstGeom prst="ellipse">
+            <a:avLst/>
+          </a:prstGeom>
+          <a:gradFill rotWithShape="1">
+            <a:gsLst>
+              <a:gs pos="0">
+                <a:srgbClr val="A78BFA">
+                  <a:alpha val="5490"/>
+                </a:srgbClr>
+              </a:gs>
+              <a:gs pos="100000">
+                <a:srgbClr val="A78BFA">
+                  <a:alpha val="0"/>
+                </a:srgbClr>
+              </a:gs>
+            </a:gsLst>
+            <a:path path="circle">
+              <a:fillToRect l="50000" t="50000" r="50000" b="50000"/>
+            </a:path>
+          </a:gradFill>
+          <a:ln/>
+        </p:spPr>
+      </p:sp>
+      <p:sp>
+        <p:nvSpPr>
+          <p:cNvPr id="4" name="Text 2"/>
+          <p:cNvSpPr txBox="1"/>
+          <p:nvPr/>
+        </p:nvSpPr>
+        <p:spPr>
+          <a:xfrm>
+            <a:off x="548640" y="347472"/>
+            <a:ext cx="9144000" cy="310896"/>
+          </a:xfrm>
+          <a:prstGeom prst="rect">
+            <a:avLst/>
+          </a:prstGeom>
+          <a:noFill/>
+          <a:ln/>
+        </p:spPr>
+        <p:txBody>
+          <a:bodyPr wrap="square" lIns="0" tIns="0" rIns="0" bIns="0" rtlCol="0" anchor="ctr"/>
+          <a:lstStyle/>
+          <a:p>
+            <a:pPr algn="l" indent="0" marL="0">
+              <a:buNone/>
+            </a:pPr>
+            <a:r>
+              <a:rPr lang="en-US" sz="1200" b="1" spc="300" kern="0" dirty="0">
+                <a:solidFill>
+                  <a:srgbClr val="5EEAD4"/>
+                </a:solidFill>
+                <a:latin typeface="Arial" pitchFamily="34" charset="0"/>
+                <a:ea typeface="Arial" pitchFamily="34" charset="-122"/>
+                <a:cs typeface="Arial" pitchFamily="34" charset="-120"/>
+              </a:rPr>
+              <a:t>16  ·  FUENTES Y ANEXO</a:t>
+            </a:r>
+            <a:endParaRPr lang="en-US" sz="1200" dirty="0"/>
+          </a:p>
+        </p:txBody>
+      </p:sp>
+      <p:sp>
+        <p:nvSpPr>
+          <p:cNvPr id="5" name="Text 3"/>
+          <p:cNvSpPr txBox="1"/>
+          <p:nvPr/>
+        </p:nvSpPr>
+        <p:spPr>
+          <a:xfrm>
+            <a:off x="548640" y="713232"/>
+            <a:ext cx="11091672" cy="914400"/>
+          </a:xfrm>
+          <a:prstGeom prst="rect">
+            <a:avLst/>
+          </a:prstGeom>
+          <a:noFill/>
+          <a:ln/>
+        </p:spPr>
+        <p:txBody>
+          <a:bodyPr wrap="square" lIns="0" tIns="0" rIns="0" bIns="0" rtlCol="0" anchor="ctr"/>
+          <a:lstStyle/>
+          <a:p>
+            <a:pPr algn="l" indent="0" marL="0">
+              <a:buNone/>
+            </a:pPr>
+            <a:r>
+              <a:rPr lang="en-US" sz="3200" b="1" dirty="0">
+                <a:solidFill>
+                  <a:srgbClr val="FFFFFF"/>
+                </a:solidFill>
+                <a:latin typeface="Arial" pitchFamily="34" charset="0"/>
+                <a:ea typeface="Arial" pitchFamily="34" charset="-122"/>
+                <a:cs typeface="Arial" pitchFamily="34" charset="-120"/>
+              </a:rPr>
+              <a:t>De dónde salen las cifras</a:t>
+            </a:r>
+            <a:endParaRPr lang="en-US" sz="3200" dirty="0"/>
+          </a:p>
+        </p:txBody>
+      </p:sp>
+      <p:sp>
+        <p:nvSpPr>
+          <p:cNvPr id="6" name="Text 4"/>
+          <p:cNvSpPr txBox="1"/>
+          <p:nvPr/>
+        </p:nvSpPr>
+        <p:spPr>
+          <a:xfrm>
+            <a:off x="548640" y="6446520"/>
+            <a:ext cx="1463040" cy="274320"/>
+          </a:xfrm>
+          <a:prstGeom prst="rect">
+            <a:avLst/>
+          </a:prstGeom>
+          <a:noFill/>
+          <a:ln/>
+        </p:spPr>
+        <p:txBody>
+          <a:bodyPr wrap="square" lIns="0" tIns="0" rIns="0" bIns="0" rtlCol="0" anchor="ctr"/>
+          <a:lstStyle/>
+          <a:p>
+            <a:pPr algn="l" indent="0" marL="0">
+              <a:buNone/>
+            </a:pPr>
+            <a:r>
+              <a:rPr lang="en-US" sz="1000" spc="200" kern="0" dirty="0">
+                <a:solidFill>
+                  <a:srgbClr val="94AACC"/>
+                </a:solidFill>
+                <a:latin typeface="Arial" pitchFamily="34" charset="0"/>
+                <a:ea typeface="Arial" pitchFamily="34" charset="-122"/>
+                <a:cs typeface="Arial" pitchFamily="34" charset="-120"/>
+              </a:rPr>
+              <a:t>17  /  17</a:t>
             </a:r>
             <a:endParaRPr lang="en-US" sz="1000" dirty="0"/>
           </a:p>
@@ -7906,7 +15046,7 @@
                 <a:ea typeface="Arial" pitchFamily="34" charset="-122"/>
                 <a:cs typeface="Arial" pitchFamily="34" charset="-120"/>
               </a:rPr>
-              <a:t>2  /  14</a:t>
+              <a:t>2  /  17</a:t>
             </a:r>
             <a:endParaRPr lang="en-US" sz="1000" dirty="0"/>
           </a:p>
@@ -8579,7 +15719,7 @@
                 <a:ea typeface="Arial" pitchFamily="34" charset="-122"/>
                 <a:cs typeface="Arial" pitchFamily="34" charset="-120"/>
               </a:rPr>
-              <a:t>3  /  14</a:t>
+              <a:t>3  /  17</a:t>
             </a:r>
             <a:endParaRPr lang="en-US" sz="1000" dirty="0"/>
           </a:p>
@@ -10810,7 +17950,7 @@
                 <a:ea typeface="Arial" pitchFamily="34" charset="-122"/>
                 <a:cs typeface="Arial" pitchFamily="34" charset="-120"/>
               </a:rPr>
-              <a:t>4  /  14</a:t>
+              <a:t>4  /  17</a:t>
             </a:r>
             <a:endParaRPr lang="en-US" sz="1000" dirty="0"/>
           </a:p>
@@ -13987,7 +21127,7 @@
                 <a:ea typeface="Arial" pitchFamily="34" charset="-122"/>
                 <a:cs typeface="Arial" pitchFamily="34" charset="-120"/>
               </a:rPr>
-              <a:t>5  /  14</a:t>
+              <a:t>5  /  17</a:t>
             </a:r>
             <a:endParaRPr lang="en-US" sz="1000" dirty="0"/>
           </a:p>
@@ -14714,7 +21854,7 @@
                 <a:ea typeface="Arial" pitchFamily="34" charset="-122"/>
                 <a:cs typeface="Arial" pitchFamily="34" charset="-120"/>
               </a:rPr>
-              <a:t>6  /  14</a:t>
+              <a:t>6  /  17</a:t>
             </a:r>
             <a:endParaRPr lang="en-US" sz="1000" dirty="0"/>
           </a:p>
@@ -15441,7 +22581,7 @@
                 <a:ea typeface="Arial" pitchFamily="34" charset="-122"/>
                 <a:cs typeface="Arial" pitchFamily="34" charset="-120"/>
               </a:rPr>
-              <a:t>7  /  14</a:t>
+              <a:t>7  /  17</a:t>
             </a:r>
             <a:endParaRPr lang="en-US" sz="1000" dirty="0"/>
           </a:p>
@@ -16273,7 +23413,7 @@
                 <a:ea typeface="Arial" pitchFamily="34" charset="-122"/>
                 <a:cs typeface="Arial" pitchFamily="34" charset="-120"/>
               </a:rPr>
-              <a:t>8  /  14</a:t>
+              <a:t>8  /  17</a:t>
             </a:r>
             <a:endParaRPr lang="en-US" sz="1000" dirty="0"/>
           </a:p>
@@ -17788,7 +24928,7 @@
                 <a:ea typeface="Arial" pitchFamily="34" charset="-122"/>
                 <a:cs typeface="Arial" pitchFamily="34" charset="-120"/>
               </a:rPr>
-              <a:t>9  /  14</a:t>
+              <a:t>9  /  17</a:t>
             </a:r>
             <a:endParaRPr lang="en-US" sz="1000" dirty="0"/>
           </a:p>
